--- a/files/Disertación 02.pptx
+++ b/files/Disertación 02.pptx
@@ -5,7 +5,7 @@
     <p:sldMasterId id="2147483653" r:id="rId1"/>
   </p:sldMasterIdLst>
   <p:notesMasterIdLst>
-    <p:notesMasterId r:id="rId13"/>
+    <p:notesMasterId r:id="rId15"/>
   </p:notesMasterIdLst>
   <p:sldIdLst>
     <p:sldId id="256" r:id="rId2"/>
@@ -14,11 +14,13 @@
     <p:sldId id="262" r:id="rId5"/>
     <p:sldId id="261" r:id="rId6"/>
     <p:sldId id="263" r:id="rId7"/>
-    <p:sldId id="264" r:id="rId8"/>
-    <p:sldId id="265" r:id="rId9"/>
-    <p:sldId id="266" r:id="rId10"/>
-    <p:sldId id="267" r:id="rId11"/>
-    <p:sldId id="268" r:id="rId12"/>
+    <p:sldId id="269" r:id="rId8"/>
+    <p:sldId id="270" r:id="rId9"/>
+    <p:sldId id="264" r:id="rId10"/>
+    <p:sldId id="265" r:id="rId11"/>
+    <p:sldId id="266" r:id="rId12"/>
+    <p:sldId id="267" r:id="rId13"/>
+    <p:sldId id="268" r:id="rId14"/>
   </p:sldIdLst>
   <p:sldSz cx="10693400" cy="7562850"/>
   <p:notesSz cx="10693400" cy="7562850"/>
@@ -14055,6 +14057,2165 @@
         <p:cNvPr id="1" name="">
           <a:extLst>
             <a:ext uri="{FF2B5EF4-FFF2-40B4-BE49-F238E27FC236}">
+              <a16:creationId xmlns:a16="http://schemas.microsoft.com/office/drawing/2014/main" id="{58378244-2460-9143-8232-E1BBD43881DF}"/>
+            </a:ext>
+          </a:extLst>
+        </p:cNvPr>
+        <p:cNvGrpSpPr/>
+        <p:nvPr/>
+      </p:nvGrpSpPr>
+      <p:grpSpPr>
+        <a:xfrm>
+          <a:off x="0" y="0"/>
+          <a:ext cx="0" cy="0"/>
+          <a:chOff x="0" y="0"/>
+          <a:chExt cx="0" cy="0"/>
+        </a:xfrm>
+      </p:grpSpPr>
+      <p:sp>
+        <p:nvSpPr>
+          <p:cNvPr id="5" name="Google Shape;64;p8">
+            <a:extLst>
+              <a:ext uri="{FF2B5EF4-FFF2-40B4-BE49-F238E27FC236}">
+                <a16:creationId xmlns:a16="http://schemas.microsoft.com/office/drawing/2014/main" id="{59561CCD-A111-FC6F-5D51-E76EE83D6C67}"/>
+              </a:ext>
+            </a:extLst>
+          </p:cNvPr>
+          <p:cNvSpPr txBox="1">
+            <a:spLocks/>
+          </p:cNvSpPr>
+          <p:nvPr/>
+        </p:nvSpPr>
+        <p:spPr>
+          <a:xfrm>
+            <a:off x="4365444" y="838437"/>
+            <a:ext cx="5061312" cy="444342"/>
+          </a:xfrm>
+          <a:prstGeom prst="rect">
+            <a:avLst/>
+          </a:prstGeom>
+          <a:noFill/>
+          <a:ln>
+            <a:noFill/>
+          </a:ln>
+        </p:spPr>
+        <p:txBody>
+          <a:bodyPr spcFirstLastPara="1" wrap="square" lIns="0" tIns="13325" rIns="0" bIns="0" anchor="t" anchorCtr="0">
+            <a:spAutoFit/>
+          </a:bodyPr>
+          <a:lstStyle>
+            <a:defPPr marR="0" lvl="0" algn="l" rtl="0">
+              <a:lnSpc>
+                <a:spcPct val="100000"/>
+              </a:lnSpc>
+              <a:spcBef>
+                <a:spcPts val="0"/>
+              </a:spcBef>
+              <a:spcAft>
+                <a:spcPts val="0"/>
+              </a:spcAft>
+            </a:defPPr>
+            <a:lvl1pPr marR="0" lvl="0" algn="l" rtl="0">
+              <a:lnSpc>
+                <a:spcPct val="100000"/>
+              </a:lnSpc>
+              <a:spcBef>
+                <a:spcPts val="0"/>
+              </a:spcBef>
+              <a:spcAft>
+                <a:spcPts val="0"/>
+              </a:spcAft>
+              <a:buClr>
+                <a:srgbClr val="000000"/>
+              </a:buClr>
+              <a:buSzPts val="1400"/>
+              <a:buFont typeface="Arial"/>
+              <a:buNone/>
+              <a:defRPr sz="3150" b="1" i="0" u="none" strike="noStrike" cap="none">
+                <a:solidFill>
+                  <a:schemeClr val="lt1"/>
+                </a:solidFill>
+                <a:latin typeface="Times New Roman"/>
+                <a:ea typeface="Times New Roman"/>
+                <a:cs typeface="Times New Roman"/>
+                <a:sym typeface="Times New Roman"/>
+              </a:defRPr>
+            </a:lvl1pPr>
+            <a:lvl2pPr marR="0" lvl="1" algn="l" rtl="0">
+              <a:lnSpc>
+                <a:spcPct val="100000"/>
+              </a:lnSpc>
+              <a:spcBef>
+                <a:spcPts val="0"/>
+              </a:spcBef>
+              <a:spcAft>
+                <a:spcPts val="0"/>
+              </a:spcAft>
+              <a:buClr>
+                <a:srgbClr val="000000"/>
+              </a:buClr>
+              <a:buSzPts val="1400"/>
+              <a:buFont typeface="Arial"/>
+              <a:buNone/>
+              <a:defRPr sz="1800" b="0" i="0" u="none" strike="noStrike" cap="none">
+                <a:solidFill>
+                  <a:srgbClr val="000000"/>
+                </a:solidFill>
+                <a:latin typeface="Arial"/>
+                <a:ea typeface="Arial"/>
+                <a:cs typeface="Arial"/>
+                <a:sym typeface="Arial"/>
+              </a:defRPr>
+            </a:lvl2pPr>
+            <a:lvl3pPr marR="0" lvl="2" algn="l" rtl="0">
+              <a:lnSpc>
+                <a:spcPct val="100000"/>
+              </a:lnSpc>
+              <a:spcBef>
+                <a:spcPts val="0"/>
+              </a:spcBef>
+              <a:spcAft>
+                <a:spcPts val="0"/>
+              </a:spcAft>
+              <a:buClr>
+                <a:srgbClr val="000000"/>
+              </a:buClr>
+              <a:buSzPts val="1400"/>
+              <a:buFont typeface="Arial"/>
+              <a:buNone/>
+              <a:defRPr sz="1800" b="0" i="0" u="none" strike="noStrike" cap="none">
+                <a:solidFill>
+                  <a:srgbClr val="000000"/>
+                </a:solidFill>
+                <a:latin typeface="Arial"/>
+                <a:ea typeface="Arial"/>
+                <a:cs typeface="Arial"/>
+                <a:sym typeface="Arial"/>
+              </a:defRPr>
+            </a:lvl3pPr>
+            <a:lvl4pPr marR="0" lvl="3" algn="l" rtl="0">
+              <a:lnSpc>
+                <a:spcPct val="100000"/>
+              </a:lnSpc>
+              <a:spcBef>
+                <a:spcPts val="0"/>
+              </a:spcBef>
+              <a:spcAft>
+                <a:spcPts val="0"/>
+              </a:spcAft>
+              <a:buClr>
+                <a:srgbClr val="000000"/>
+              </a:buClr>
+              <a:buSzPts val="1400"/>
+              <a:buFont typeface="Arial"/>
+              <a:buNone/>
+              <a:defRPr sz="1800" b="0" i="0" u="none" strike="noStrike" cap="none">
+                <a:solidFill>
+                  <a:srgbClr val="000000"/>
+                </a:solidFill>
+                <a:latin typeface="Arial"/>
+                <a:ea typeface="Arial"/>
+                <a:cs typeface="Arial"/>
+                <a:sym typeface="Arial"/>
+              </a:defRPr>
+            </a:lvl4pPr>
+            <a:lvl5pPr marR="0" lvl="4" algn="l" rtl="0">
+              <a:lnSpc>
+                <a:spcPct val="100000"/>
+              </a:lnSpc>
+              <a:spcBef>
+                <a:spcPts val="0"/>
+              </a:spcBef>
+              <a:spcAft>
+                <a:spcPts val="0"/>
+              </a:spcAft>
+              <a:buClr>
+                <a:srgbClr val="000000"/>
+              </a:buClr>
+              <a:buSzPts val="1400"/>
+              <a:buFont typeface="Arial"/>
+              <a:buNone/>
+              <a:defRPr sz="1800" b="0" i="0" u="none" strike="noStrike" cap="none">
+                <a:solidFill>
+                  <a:srgbClr val="000000"/>
+                </a:solidFill>
+                <a:latin typeface="Arial"/>
+                <a:ea typeface="Arial"/>
+                <a:cs typeface="Arial"/>
+                <a:sym typeface="Arial"/>
+              </a:defRPr>
+            </a:lvl5pPr>
+            <a:lvl6pPr marR="0" lvl="5" algn="l" rtl="0">
+              <a:lnSpc>
+                <a:spcPct val="100000"/>
+              </a:lnSpc>
+              <a:spcBef>
+                <a:spcPts val="0"/>
+              </a:spcBef>
+              <a:spcAft>
+                <a:spcPts val="0"/>
+              </a:spcAft>
+              <a:buClr>
+                <a:srgbClr val="000000"/>
+              </a:buClr>
+              <a:buSzPts val="1400"/>
+              <a:buFont typeface="Arial"/>
+              <a:buNone/>
+              <a:defRPr sz="1800" b="0" i="0" u="none" strike="noStrike" cap="none">
+                <a:solidFill>
+                  <a:srgbClr val="000000"/>
+                </a:solidFill>
+                <a:latin typeface="Arial"/>
+                <a:ea typeface="Arial"/>
+                <a:cs typeface="Arial"/>
+                <a:sym typeface="Arial"/>
+              </a:defRPr>
+            </a:lvl6pPr>
+            <a:lvl7pPr marR="0" lvl="6" algn="l" rtl="0">
+              <a:lnSpc>
+                <a:spcPct val="100000"/>
+              </a:lnSpc>
+              <a:spcBef>
+                <a:spcPts val="0"/>
+              </a:spcBef>
+              <a:spcAft>
+                <a:spcPts val="0"/>
+              </a:spcAft>
+              <a:buClr>
+                <a:srgbClr val="000000"/>
+              </a:buClr>
+              <a:buSzPts val="1400"/>
+              <a:buFont typeface="Arial"/>
+              <a:buNone/>
+              <a:defRPr sz="1800" b="0" i="0" u="none" strike="noStrike" cap="none">
+                <a:solidFill>
+                  <a:srgbClr val="000000"/>
+                </a:solidFill>
+                <a:latin typeface="Arial"/>
+                <a:ea typeface="Arial"/>
+                <a:cs typeface="Arial"/>
+                <a:sym typeface="Arial"/>
+              </a:defRPr>
+            </a:lvl7pPr>
+            <a:lvl8pPr marR="0" lvl="7" algn="l" rtl="0">
+              <a:lnSpc>
+                <a:spcPct val="100000"/>
+              </a:lnSpc>
+              <a:spcBef>
+                <a:spcPts val="0"/>
+              </a:spcBef>
+              <a:spcAft>
+                <a:spcPts val="0"/>
+              </a:spcAft>
+              <a:buClr>
+                <a:srgbClr val="000000"/>
+              </a:buClr>
+              <a:buSzPts val="1400"/>
+              <a:buFont typeface="Arial"/>
+              <a:buNone/>
+              <a:defRPr sz="1800" b="0" i="0" u="none" strike="noStrike" cap="none">
+                <a:solidFill>
+                  <a:srgbClr val="000000"/>
+                </a:solidFill>
+                <a:latin typeface="Arial"/>
+                <a:ea typeface="Arial"/>
+                <a:cs typeface="Arial"/>
+                <a:sym typeface="Arial"/>
+              </a:defRPr>
+            </a:lvl8pPr>
+            <a:lvl9pPr marR="0" lvl="8" algn="l" rtl="0">
+              <a:lnSpc>
+                <a:spcPct val="100000"/>
+              </a:lnSpc>
+              <a:spcBef>
+                <a:spcPts val="0"/>
+              </a:spcBef>
+              <a:spcAft>
+                <a:spcPts val="0"/>
+              </a:spcAft>
+              <a:buClr>
+                <a:srgbClr val="000000"/>
+              </a:buClr>
+              <a:buSzPts val="1400"/>
+              <a:buFont typeface="Arial"/>
+              <a:buNone/>
+              <a:defRPr sz="1800" b="0" i="0" u="none" strike="noStrike" cap="none">
+                <a:solidFill>
+                  <a:srgbClr val="000000"/>
+                </a:solidFill>
+                <a:latin typeface="Arial"/>
+                <a:ea typeface="Arial"/>
+                <a:cs typeface="Arial"/>
+                <a:sym typeface="Arial"/>
+              </a:defRPr>
+            </a:lvl9pPr>
+          </a:lstStyle>
+          <a:p>
+            <a:r>
+              <a:rPr lang="es-MX" sz="2800" dirty="0">
+                <a:solidFill>
+                  <a:schemeClr val="bg1"/>
+                </a:solidFill>
+                <a:latin typeface="TimesNewRomanPS-BoldMT"/>
+              </a:rPr>
+              <a:t>Métodos propuestos</a:t>
+            </a:r>
+          </a:p>
+        </p:txBody>
+      </p:sp>
+      <p:graphicFrame>
+        <p:nvGraphicFramePr>
+          <p:cNvPr id="10" name="Tabla 9">
+            <a:extLst>
+              <a:ext uri="{FF2B5EF4-FFF2-40B4-BE49-F238E27FC236}">
+                <a16:creationId xmlns:a16="http://schemas.microsoft.com/office/drawing/2014/main" id="{88DCA0B4-4A51-BC2B-7A76-DF427EF734DB}"/>
+              </a:ext>
+            </a:extLst>
+          </p:cNvPr>
+          <p:cNvGraphicFramePr>
+            <a:graphicFrameLocks noGrp="1"/>
+          </p:cNvGraphicFramePr>
+          <p:nvPr>
+            <p:extLst>
+              <p:ext uri="{D42A27DB-BD31-4B8C-83A1-F6EECF244321}">
+                <p14:modId xmlns:p14="http://schemas.microsoft.com/office/powerpoint/2010/main" val="2506482992"/>
+              </p:ext>
+            </p:extLst>
+          </p:nvPr>
+        </p:nvGraphicFramePr>
+        <p:xfrm>
+          <a:off x="518160" y="2274513"/>
+          <a:ext cx="9657080" cy="3013824"/>
+        </p:xfrm>
+        <a:graphic>
+          <a:graphicData uri="http://schemas.openxmlformats.org/drawingml/2006/table">
+            <a:tbl>
+              <a:tblPr firstRow="1" bandRow="1">
+                <a:tableStyleId>{5202B0CA-FC54-4496-8BCA-5EF66A818D29}</a:tableStyleId>
+              </a:tblPr>
+              <a:tblGrid>
+                <a:gridCol w="2472268">
+                  <a:extLst>
+                    <a:ext uri="{9D8B030D-6E8A-4147-A177-3AD203B41FA5}">
+                      <a16:colId xmlns:a16="http://schemas.microsoft.com/office/drawing/2014/main" val="521138003"/>
+                    </a:ext>
+                  </a:extLst>
+                </a:gridCol>
+                <a:gridCol w="7184812">
+                  <a:extLst>
+                    <a:ext uri="{9D8B030D-6E8A-4147-A177-3AD203B41FA5}">
+                      <a16:colId xmlns:a16="http://schemas.microsoft.com/office/drawing/2014/main" val="1720936488"/>
+                    </a:ext>
+                  </a:extLst>
+                </a:gridCol>
+              </a:tblGrid>
+              <a:tr h="528931">
+                <a:tc>
+                  <a:txBody>
+                    <a:bodyPr/>
+                    <a:lstStyle/>
+                    <a:p>
+                      <a:pPr algn="ctr"/>
+                      <a:r>
+                        <a:rPr lang="es-PE" sz="2000" dirty="0">
+                          <a:latin typeface="Times New Roman" panose="02020603050405020304" pitchFamily="18" charset="0"/>
+                          <a:cs typeface="Times New Roman" panose="02020603050405020304" pitchFamily="18" charset="0"/>
+                        </a:rPr>
+                        <a:t>Actividad </a:t>
+                      </a:r>
+                    </a:p>
+                  </a:txBody>
+                  <a:tcPr/>
+                </a:tc>
+                <a:tc>
+                  <a:txBody>
+                    <a:bodyPr/>
+                    <a:lstStyle/>
+                    <a:p>
+                      <a:pPr algn="ctr"/>
+                      <a:r>
+                        <a:rPr lang="es-PE" sz="2000" dirty="0">
+                          <a:latin typeface="Times New Roman" panose="02020603050405020304" pitchFamily="18" charset="0"/>
+                          <a:cs typeface="Times New Roman" panose="02020603050405020304" pitchFamily="18" charset="0"/>
+                        </a:rPr>
+                        <a:t>Descripción</a:t>
+                      </a:r>
+                    </a:p>
+                  </a:txBody>
+                  <a:tcPr/>
+                </a:tc>
+                <a:extLst>
+                  <a:ext uri="{0D108BD9-81ED-4DB2-BD59-A6C34878D82A}">
+                    <a16:rowId xmlns:a16="http://schemas.microsoft.com/office/drawing/2014/main" val="2925334713"/>
+                  </a:ext>
+                </a:extLst>
+              </a:tr>
+              <a:tr h="831543">
+                <a:tc>
+                  <a:txBody>
+                    <a:bodyPr/>
+                    <a:lstStyle/>
+                    <a:p>
+                      <a:pPr marR="0" algn="l" rtl="0">
+                        <a:lnSpc>
+                          <a:spcPct val="100000"/>
+                        </a:lnSpc>
+                        <a:spcBef>
+                          <a:spcPts val="0"/>
+                        </a:spcBef>
+                        <a:spcAft>
+                          <a:spcPts val="0"/>
+                        </a:spcAft>
+                        <a:buClr>
+                          <a:srgbClr val="000000"/>
+                        </a:buClr>
+                        <a:buFont typeface="Arial"/>
+                      </a:pPr>
+                      <a:r>
+                        <a:rPr lang="es-PE" sz="1800" b="1" i="0" u="none" strike="noStrike" cap="none" dirty="0">
+                          <a:solidFill>
+                            <a:schemeClr val="dk1"/>
+                          </a:solidFill>
+                          <a:effectLst/>
+                          <a:latin typeface="Times New Roman" panose="02020603050405020304" pitchFamily="18" charset="0"/>
+                          <a:ea typeface="+mn-ea"/>
+                          <a:cs typeface="Times New Roman" panose="02020603050405020304" pitchFamily="18" charset="0"/>
+                          <a:sym typeface="Arial"/>
+                        </a:rPr>
+                        <a:t>Evaluación de patogenicidad</a:t>
+                      </a:r>
+                    </a:p>
+                  </a:txBody>
+                  <a:tcPr/>
+                </a:tc>
+                <a:tc>
+                  <a:txBody>
+                    <a:bodyPr/>
+                    <a:lstStyle/>
+                    <a:p>
+                      <a:pPr algn="just">
+                        <a:lnSpc>
+                          <a:spcPct val="150000"/>
+                        </a:lnSpc>
+                      </a:pPr>
+                      <a:r>
+                        <a:rPr lang="es-MX" sz="1400" b="0" i="0" u="none" strike="noStrike" cap="none" dirty="0">
+                          <a:solidFill>
+                            <a:schemeClr val="dk1"/>
+                          </a:solidFill>
+                          <a:effectLst/>
+                          <a:latin typeface="Times New Roman" panose="02020603050405020304" pitchFamily="18" charset="0"/>
+                          <a:ea typeface="+mn-ea"/>
+                          <a:cs typeface="Times New Roman" panose="02020603050405020304" pitchFamily="18" charset="0"/>
+                          <a:sym typeface="Arial"/>
+                        </a:rPr>
+                        <a:t>10 adultos de </a:t>
+                      </a:r>
+                      <a:r>
+                        <a:rPr lang="es-MX" sz="1400" b="0" i="1" u="none" strike="noStrike" cap="none" dirty="0">
+                          <a:solidFill>
+                            <a:schemeClr val="dk1"/>
+                          </a:solidFill>
+                          <a:effectLst/>
+                          <a:latin typeface="Times New Roman" panose="02020603050405020304" pitchFamily="18" charset="0"/>
+                          <a:ea typeface="+mn-ea"/>
+                          <a:cs typeface="Times New Roman" panose="02020603050405020304" pitchFamily="18" charset="0"/>
+                          <a:sym typeface="Arial"/>
+                        </a:rPr>
+                        <a:t>M</a:t>
+                      </a:r>
+                      <a:r>
+                        <a:rPr lang="es-MX" sz="1400" b="0" i="0" u="none" strike="noStrike" cap="none" dirty="0">
+                          <a:solidFill>
+                            <a:schemeClr val="dk1"/>
+                          </a:solidFill>
+                          <a:effectLst/>
+                          <a:latin typeface="Times New Roman" panose="02020603050405020304" pitchFamily="18" charset="0"/>
+                          <a:ea typeface="+mn-ea"/>
+                          <a:cs typeface="Times New Roman" panose="02020603050405020304" pitchFamily="18" charset="0"/>
+                          <a:sym typeface="Arial"/>
+                        </a:rPr>
+                        <a:t>. </a:t>
+                      </a:r>
+                      <a:r>
+                        <a:rPr lang="es-MX" sz="1400" b="0" i="1" u="none" strike="noStrike" cap="none" dirty="0" err="1">
+                          <a:solidFill>
+                            <a:schemeClr val="dk1"/>
+                          </a:solidFill>
+                          <a:effectLst/>
+                          <a:latin typeface="Times New Roman" panose="02020603050405020304" pitchFamily="18" charset="0"/>
+                          <a:ea typeface="+mn-ea"/>
+                          <a:cs typeface="Times New Roman" panose="02020603050405020304" pitchFamily="18" charset="0"/>
+                          <a:sym typeface="Arial"/>
+                        </a:rPr>
+                        <a:t>hemipterus</a:t>
+                      </a:r>
+                      <a:r>
+                        <a:rPr lang="es-MX" sz="1400" b="0" i="0" u="none" strike="noStrike" cap="none" dirty="0">
+                          <a:solidFill>
+                            <a:schemeClr val="dk1"/>
+                          </a:solidFill>
+                          <a:effectLst/>
+                          <a:latin typeface="Times New Roman" panose="02020603050405020304" pitchFamily="18" charset="0"/>
+                          <a:ea typeface="+mn-ea"/>
+                          <a:cs typeface="Times New Roman" panose="02020603050405020304" pitchFamily="18" charset="0"/>
+                          <a:sym typeface="Arial"/>
+                        </a:rPr>
+                        <a:t> serán sumergidos durante un minuto en una suspensión conidial de de 1 x 10⁷ conidios por mililitro, complementada con </a:t>
+                      </a:r>
+                      <a:r>
+                        <a:rPr lang="es-MX" sz="1400" b="0" i="0" u="none" strike="noStrike" cap="none" dirty="0" err="1">
+                          <a:solidFill>
+                            <a:schemeClr val="dk1"/>
+                          </a:solidFill>
+                          <a:effectLst/>
+                          <a:latin typeface="Times New Roman" panose="02020603050405020304" pitchFamily="18" charset="0"/>
+                          <a:ea typeface="+mn-ea"/>
+                          <a:cs typeface="Times New Roman" panose="02020603050405020304" pitchFamily="18" charset="0"/>
+                          <a:sym typeface="Arial"/>
+                        </a:rPr>
+                        <a:t>Tween</a:t>
+                      </a:r>
+                      <a:r>
+                        <a:rPr lang="es-MX" sz="1400" b="0" i="0" u="none" strike="noStrike" cap="none" dirty="0">
+                          <a:solidFill>
+                            <a:schemeClr val="dk1"/>
+                          </a:solidFill>
+                          <a:effectLst/>
+                          <a:latin typeface="Times New Roman" panose="02020603050405020304" pitchFamily="18" charset="0"/>
+                          <a:ea typeface="+mn-ea"/>
+                          <a:cs typeface="Times New Roman" panose="02020603050405020304" pitchFamily="18" charset="0"/>
+                          <a:sym typeface="Arial"/>
+                        </a:rPr>
+                        <a:t> 80 al 0,1 %. </a:t>
+                      </a:r>
+                      <a:endParaRPr lang="es-PE" sz="1400" b="0" i="0" u="none" strike="noStrike" cap="none" dirty="0">
+                        <a:solidFill>
+                          <a:schemeClr val="dk1"/>
+                        </a:solidFill>
+                        <a:effectLst/>
+                        <a:latin typeface="Times New Roman" panose="02020603050405020304" pitchFamily="18" charset="0"/>
+                        <a:ea typeface="+mn-ea"/>
+                        <a:cs typeface="Times New Roman" panose="02020603050405020304" pitchFamily="18" charset="0"/>
+                        <a:sym typeface="Arial"/>
+                      </a:endParaRPr>
+                    </a:p>
+                  </a:txBody>
+                  <a:tcPr/>
+                </a:tc>
+                <a:extLst>
+                  <a:ext uri="{0D108BD9-81ED-4DB2-BD59-A6C34878D82A}">
+                    <a16:rowId xmlns:a16="http://schemas.microsoft.com/office/drawing/2014/main" val="217625775"/>
+                  </a:ext>
+                </a:extLst>
+              </a:tr>
+              <a:tr h="1194334">
+                <a:tc>
+                  <a:txBody>
+                    <a:bodyPr/>
+                    <a:lstStyle/>
+                    <a:p>
+                      <a:pPr marR="0" algn="l" rtl="0">
+                        <a:lnSpc>
+                          <a:spcPct val="100000"/>
+                        </a:lnSpc>
+                        <a:spcBef>
+                          <a:spcPts val="0"/>
+                        </a:spcBef>
+                        <a:spcAft>
+                          <a:spcPts val="0"/>
+                        </a:spcAft>
+                        <a:buClr>
+                          <a:srgbClr val="000000"/>
+                        </a:buClr>
+                        <a:buFont typeface="Arial"/>
+                      </a:pPr>
+                      <a:r>
+                        <a:rPr lang="es-MX" sz="1800" b="1" i="0" u="none" strike="noStrike" cap="none" dirty="0">
+                          <a:solidFill>
+                            <a:schemeClr val="dk1"/>
+                          </a:solidFill>
+                          <a:effectLst/>
+                          <a:latin typeface="Times New Roman" panose="02020603050405020304" pitchFamily="18" charset="0"/>
+                          <a:ea typeface="+mn-ea"/>
+                          <a:cs typeface="Times New Roman" panose="02020603050405020304" pitchFamily="18" charset="0"/>
+                          <a:sym typeface="Arial"/>
+                        </a:rPr>
+                        <a:t>Producción de conidios en arroz</a:t>
+                      </a:r>
+                      <a:endParaRPr lang="es-PE" sz="1800" b="1" i="0" u="none" strike="noStrike" cap="none" dirty="0">
+                        <a:solidFill>
+                          <a:schemeClr val="dk1"/>
+                        </a:solidFill>
+                        <a:effectLst/>
+                        <a:latin typeface="Times New Roman" panose="02020603050405020304" pitchFamily="18" charset="0"/>
+                        <a:ea typeface="+mn-ea"/>
+                        <a:cs typeface="Times New Roman" panose="02020603050405020304" pitchFamily="18" charset="0"/>
+                        <a:sym typeface="Arial"/>
+                      </a:endParaRPr>
+                    </a:p>
+                  </a:txBody>
+                  <a:tcPr/>
+                </a:tc>
+                <a:tc>
+                  <a:txBody>
+                    <a:bodyPr/>
+                    <a:lstStyle/>
+                    <a:p>
+                      <a:pPr algn="just">
+                        <a:lnSpc>
+                          <a:spcPct val="150000"/>
+                        </a:lnSpc>
+                      </a:pPr>
+                      <a:r>
+                        <a:rPr lang="es-MX" sz="1400" b="0" i="0" u="none" strike="noStrike" cap="none" dirty="0">
+                          <a:solidFill>
+                            <a:schemeClr val="dk1"/>
+                          </a:solidFill>
+                          <a:effectLst/>
+                          <a:latin typeface="Times New Roman" panose="02020603050405020304" pitchFamily="18" charset="0"/>
+                          <a:ea typeface="+mn-ea"/>
+                          <a:cs typeface="Times New Roman" panose="02020603050405020304" pitchFamily="18" charset="0"/>
+                          <a:sym typeface="Arial"/>
+                        </a:rPr>
+                        <a:t>Metodología utilizada por Torres et al. (2016), Se emplearán 50 gramos de arroz depositados en bolsas de </a:t>
+                      </a:r>
+                      <a:r>
+                        <a:rPr lang="es-MX" sz="1400" b="0" i="0" u="none" strike="noStrike" cap="none" dirty="0" err="1">
+                          <a:solidFill>
+                            <a:schemeClr val="dk1"/>
+                          </a:solidFill>
+                          <a:effectLst/>
+                          <a:latin typeface="Times New Roman" panose="02020603050405020304" pitchFamily="18" charset="0"/>
+                          <a:ea typeface="+mn-ea"/>
+                          <a:cs typeface="Times New Roman" panose="02020603050405020304" pitchFamily="18" charset="0"/>
+                          <a:sym typeface="Arial"/>
+                        </a:rPr>
+                        <a:t>polipapel</a:t>
+                      </a:r>
+                      <a:r>
+                        <a:rPr lang="es-MX" sz="1400" b="0" i="0" u="none" strike="noStrike" cap="none" dirty="0">
+                          <a:solidFill>
+                            <a:schemeClr val="dk1"/>
+                          </a:solidFill>
+                          <a:effectLst/>
+                          <a:latin typeface="Times New Roman" panose="02020603050405020304" pitchFamily="18" charset="0"/>
+                          <a:ea typeface="+mn-ea"/>
+                          <a:cs typeface="Times New Roman" panose="02020603050405020304" pitchFamily="18" charset="0"/>
+                          <a:sym typeface="Arial"/>
+                        </a:rPr>
+                        <a:t>, humedecidos con 12 mililitros de agua destilada, y esterilizados a 121 °C durante 20 minutos. Posterior, las bolsas serán inoculadas con 5 mililitros de suspensión con 1 x 10⁶ conidios por mililitro, e incubadas durante 15 días a una temperatura constante de 25 ± 1 °C y bajo un fotoperiodo de 12 horas luz y 12 horas oscuridad.</a:t>
+                      </a:r>
+                      <a:endParaRPr lang="es-PE" sz="1400" b="0" i="0" u="none" strike="noStrike" cap="none" dirty="0">
+                        <a:solidFill>
+                          <a:schemeClr val="dk1"/>
+                        </a:solidFill>
+                        <a:effectLst/>
+                        <a:latin typeface="Times New Roman" panose="02020603050405020304" pitchFamily="18" charset="0"/>
+                        <a:ea typeface="+mn-ea"/>
+                        <a:cs typeface="Times New Roman" panose="02020603050405020304" pitchFamily="18" charset="0"/>
+                        <a:sym typeface="Arial"/>
+                      </a:endParaRPr>
+                    </a:p>
+                  </a:txBody>
+                  <a:tcPr/>
+                </a:tc>
+                <a:extLst>
+                  <a:ext uri="{0D108BD9-81ED-4DB2-BD59-A6C34878D82A}">
+                    <a16:rowId xmlns:a16="http://schemas.microsoft.com/office/drawing/2014/main" val="469007191"/>
+                  </a:ext>
+                </a:extLst>
+              </a:tr>
+            </a:tbl>
+          </a:graphicData>
+        </a:graphic>
+      </p:graphicFrame>
+    </p:spTree>
+    <p:extLst>
+      <p:ext uri="{BB962C8B-B14F-4D97-AF65-F5344CB8AC3E}">
+        <p14:creationId xmlns:p14="http://schemas.microsoft.com/office/powerpoint/2010/main" val="3666577282"/>
+      </p:ext>
+    </p:extLst>
+  </p:cSld>
+  <p:clrMapOvr>
+    <a:masterClrMapping/>
+  </p:clrMapOvr>
+</p:sld>
+</file>
+
+<file path=ppt/slides/slide11.xml><?xml version="1.0" encoding="utf-8"?>
+<p:sld xmlns:a="http://schemas.openxmlformats.org/drawingml/2006/main" xmlns:r="http://schemas.openxmlformats.org/officeDocument/2006/relationships" xmlns:p="http://schemas.openxmlformats.org/presentationml/2006/main">
+  <p:cSld>
+    <p:spTree>
+      <p:nvGrpSpPr>
+        <p:cNvPr id="1" name="">
+          <a:extLst>
+            <a:ext uri="{FF2B5EF4-FFF2-40B4-BE49-F238E27FC236}">
+              <a16:creationId xmlns:a16="http://schemas.microsoft.com/office/drawing/2014/main" id="{0B26082B-809C-81BB-DAAF-E3D93385A7C1}"/>
+            </a:ext>
+          </a:extLst>
+        </p:cNvPr>
+        <p:cNvGrpSpPr/>
+        <p:nvPr/>
+      </p:nvGrpSpPr>
+      <p:grpSpPr>
+        <a:xfrm>
+          <a:off x="0" y="0"/>
+          <a:ext cx="0" cy="0"/>
+          <a:chOff x="0" y="0"/>
+          <a:chExt cx="0" cy="0"/>
+        </a:xfrm>
+      </p:grpSpPr>
+      <p:sp>
+        <p:nvSpPr>
+          <p:cNvPr id="5" name="Google Shape;64;p8">
+            <a:extLst>
+              <a:ext uri="{FF2B5EF4-FFF2-40B4-BE49-F238E27FC236}">
+                <a16:creationId xmlns:a16="http://schemas.microsoft.com/office/drawing/2014/main" id="{1A8782ED-6115-1971-8734-DF4047C69220}"/>
+              </a:ext>
+            </a:extLst>
+          </p:cNvPr>
+          <p:cNvSpPr txBox="1">
+            <a:spLocks/>
+          </p:cNvSpPr>
+          <p:nvPr/>
+        </p:nvSpPr>
+        <p:spPr>
+          <a:xfrm>
+            <a:off x="4365444" y="838437"/>
+            <a:ext cx="5061312" cy="444342"/>
+          </a:xfrm>
+          <a:prstGeom prst="rect">
+            <a:avLst/>
+          </a:prstGeom>
+          <a:noFill/>
+          <a:ln>
+            <a:noFill/>
+          </a:ln>
+        </p:spPr>
+        <p:txBody>
+          <a:bodyPr spcFirstLastPara="1" wrap="square" lIns="0" tIns="13325" rIns="0" bIns="0" anchor="t" anchorCtr="0">
+            <a:spAutoFit/>
+          </a:bodyPr>
+          <a:lstStyle>
+            <a:defPPr marR="0" lvl="0" algn="l" rtl="0">
+              <a:lnSpc>
+                <a:spcPct val="100000"/>
+              </a:lnSpc>
+              <a:spcBef>
+                <a:spcPts val="0"/>
+              </a:spcBef>
+              <a:spcAft>
+                <a:spcPts val="0"/>
+              </a:spcAft>
+            </a:defPPr>
+            <a:lvl1pPr marR="0" lvl="0" algn="l" rtl="0">
+              <a:lnSpc>
+                <a:spcPct val="100000"/>
+              </a:lnSpc>
+              <a:spcBef>
+                <a:spcPts val="0"/>
+              </a:spcBef>
+              <a:spcAft>
+                <a:spcPts val="0"/>
+              </a:spcAft>
+              <a:buClr>
+                <a:srgbClr val="000000"/>
+              </a:buClr>
+              <a:buSzPts val="1400"/>
+              <a:buFont typeface="Arial"/>
+              <a:buNone/>
+              <a:defRPr sz="3150" b="1" i="0" u="none" strike="noStrike" cap="none">
+                <a:solidFill>
+                  <a:schemeClr val="lt1"/>
+                </a:solidFill>
+                <a:latin typeface="Times New Roman"/>
+                <a:ea typeface="Times New Roman"/>
+                <a:cs typeface="Times New Roman"/>
+                <a:sym typeface="Times New Roman"/>
+              </a:defRPr>
+            </a:lvl1pPr>
+            <a:lvl2pPr marR="0" lvl="1" algn="l" rtl="0">
+              <a:lnSpc>
+                <a:spcPct val="100000"/>
+              </a:lnSpc>
+              <a:spcBef>
+                <a:spcPts val="0"/>
+              </a:spcBef>
+              <a:spcAft>
+                <a:spcPts val="0"/>
+              </a:spcAft>
+              <a:buClr>
+                <a:srgbClr val="000000"/>
+              </a:buClr>
+              <a:buSzPts val="1400"/>
+              <a:buFont typeface="Arial"/>
+              <a:buNone/>
+              <a:defRPr sz="1800" b="0" i="0" u="none" strike="noStrike" cap="none">
+                <a:solidFill>
+                  <a:srgbClr val="000000"/>
+                </a:solidFill>
+                <a:latin typeface="Arial"/>
+                <a:ea typeface="Arial"/>
+                <a:cs typeface="Arial"/>
+                <a:sym typeface="Arial"/>
+              </a:defRPr>
+            </a:lvl2pPr>
+            <a:lvl3pPr marR="0" lvl="2" algn="l" rtl="0">
+              <a:lnSpc>
+                <a:spcPct val="100000"/>
+              </a:lnSpc>
+              <a:spcBef>
+                <a:spcPts val="0"/>
+              </a:spcBef>
+              <a:spcAft>
+                <a:spcPts val="0"/>
+              </a:spcAft>
+              <a:buClr>
+                <a:srgbClr val="000000"/>
+              </a:buClr>
+              <a:buSzPts val="1400"/>
+              <a:buFont typeface="Arial"/>
+              <a:buNone/>
+              <a:defRPr sz="1800" b="0" i="0" u="none" strike="noStrike" cap="none">
+                <a:solidFill>
+                  <a:srgbClr val="000000"/>
+                </a:solidFill>
+                <a:latin typeface="Arial"/>
+                <a:ea typeface="Arial"/>
+                <a:cs typeface="Arial"/>
+                <a:sym typeface="Arial"/>
+              </a:defRPr>
+            </a:lvl3pPr>
+            <a:lvl4pPr marR="0" lvl="3" algn="l" rtl="0">
+              <a:lnSpc>
+                <a:spcPct val="100000"/>
+              </a:lnSpc>
+              <a:spcBef>
+                <a:spcPts val="0"/>
+              </a:spcBef>
+              <a:spcAft>
+                <a:spcPts val="0"/>
+              </a:spcAft>
+              <a:buClr>
+                <a:srgbClr val="000000"/>
+              </a:buClr>
+              <a:buSzPts val="1400"/>
+              <a:buFont typeface="Arial"/>
+              <a:buNone/>
+              <a:defRPr sz="1800" b="0" i="0" u="none" strike="noStrike" cap="none">
+                <a:solidFill>
+                  <a:srgbClr val="000000"/>
+                </a:solidFill>
+                <a:latin typeface="Arial"/>
+                <a:ea typeface="Arial"/>
+                <a:cs typeface="Arial"/>
+                <a:sym typeface="Arial"/>
+              </a:defRPr>
+            </a:lvl4pPr>
+            <a:lvl5pPr marR="0" lvl="4" algn="l" rtl="0">
+              <a:lnSpc>
+                <a:spcPct val="100000"/>
+              </a:lnSpc>
+              <a:spcBef>
+                <a:spcPts val="0"/>
+              </a:spcBef>
+              <a:spcAft>
+                <a:spcPts val="0"/>
+              </a:spcAft>
+              <a:buClr>
+                <a:srgbClr val="000000"/>
+              </a:buClr>
+              <a:buSzPts val="1400"/>
+              <a:buFont typeface="Arial"/>
+              <a:buNone/>
+              <a:defRPr sz="1800" b="0" i="0" u="none" strike="noStrike" cap="none">
+                <a:solidFill>
+                  <a:srgbClr val="000000"/>
+                </a:solidFill>
+                <a:latin typeface="Arial"/>
+                <a:ea typeface="Arial"/>
+                <a:cs typeface="Arial"/>
+                <a:sym typeface="Arial"/>
+              </a:defRPr>
+            </a:lvl5pPr>
+            <a:lvl6pPr marR="0" lvl="5" algn="l" rtl="0">
+              <a:lnSpc>
+                <a:spcPct val="100000"/>
+              </a:lnSpc>
+              <a:spcBef>
+                <a:spcPts val="0"/>
+              </a:spcBef>
+              <a:spcAft>
+                <a:spcPts val="0"/>
+              </a:spcAft>
+              <a:buClr>
+                <a:srgbClr val="000000"/>
+              </a:buClr>
+              <a:buSzPts val="1400"/>
+              <a:buFont typeface="Arial"/>
+              <a:buNone/>
+              <a:defRPr sz="1800" b="0" i="0" u="none" strike="noStrike" cap="none">
+                <a:solidFill>
+                  <a:srgbClr val="000000"/>
+                </a:solidFill>
+                <a:latin typeface="Arial"/>
+                <a:ea typeface="Arial"/>
+                <a:cs typeface="Arial"/>
+                <a:sym typeface="Arial"/>
+              </a:defRPr>
+            </a:lvl6pPr>
+            <a:lvl7pPr marR="0" lvl="6" algn="l" rtl="0">
+              <a:lnSpc>
+                <a:spcPct val="100000"/>
+              </a:lnSpc>
+              <a:spcBef>
+                <a:spcPts val="0"/>
+              </a:spcBef>
+              <a:spcAft>
+                <a:spcPts val="0"/>
+              </a:spcAft>
+              <a:buClr>
+                <a:srgbClr val="000000"/>
+              </a:buClr>
+              <a:buSzPts val="1400"/>
+              <a:buFont typeface="Arial"/>
+              <a:buNone/>
+              <a:defRPr sz="1800" b="0" i="0" u="none" strike="noStrike" cap="none">
+                <a:solidFill>
+                  <a:srgbClr val="000000"/>
+                </a:solidFill>
+                <a:latin typeface="Arial"/>
+                <a:ea typeface="Arial"/>
+                <a:cs typeface="Arial"/>
+                <a:sym typeface="Arial"/>
+              </a:defRPr>
+            </a:lvl7pPr>
+            <a:lvl8pPr marR="0" lvl="7" algn="l" rtl="0">
+              <a:lnSpc>
+                <a:spcPct val="100000"/>
+              </a:lnSpc>
+              <a:spcBef>
+                <a:spcPts val="0"/>
+              </a:spcBef>
+              <a:spcAft>
+                <a:spcPts val="0"/>
+              </a:spcAft>
+              <a:buClr>
+                <a:srgbClr val="000000"/>
+              </a:buClr>
+              <a:buSzPts val="1400"/>
+              <a:buFont typeface="Arial"/>
+              <a:buNone/>
+              <a:defRPr sz="1800" b="0" i="0" u="none" strike="noStrike" cap="none">
+                <a:solidFill>
+                  <a:srgbClr val="000000"/>
+                </a:solidFill>
+                <a:latin typeface="Arial"/>
+                <a:ea typeface="Arial"/>
+                <a:cs typeface="Arial"/>
+                <a:sym typeface="Arial"/>
+              </a:defRPr>
+            </a:lvl8pPr>
+            <a:lvl9pPr marR="0" lvl="8" algn="l" rtl="0">
+              <a:lnSpc>
+                <a:spcPct val="100000"/>
+              </a:lnSpc>
+              <a:spcBef>
+                <a:spcPts val="0"/>
+              </a:spcBef>
+              <a:spcAft>
+                <a:spcPts val="0"/>
+              </a:spcAft>
+              <a:buClr>
+                <a:srgbClr val="000000"/>
+              </a:buClr>
+              <a:buSzPts val="1400"/>
+              <a:buFont typeface="Arial"/>
+              <a:buNone/>
+              <a:defRPr sz="1800" b="0" i="0" u="none" strike="noStrike" cap="none">
+                <a:solidFill>
+                  <a:srgbClr val="000000"/>
+                </a:solidFill>
+                <a:latin typeface="Arial"/>
+                <a:ea typeface="Arial"/>
+                <a:cs typeface="Arial"/>
+                <a:sym typeface="Arial"/>
+              </a:defRPr>
+            </a:lvl9pPr>
+          </a:lstStyle>
+          <a:p>
+            <a:r>
+              <a:rPr lang="es-MX" sz="2800" dirty="0">
+                <a:solidFill>
+                  <a:schemeClr val="bg1"/>
+                </a:solidFill>
+                <a:latin typeface="TimesNewRomanPS-BoldMT"/>
+              </a:rPr>
+              <a:t>Referencias</a:t>
+            </a:r>
+          </a:p>
+        </p:txBody>
+      </p:sp>
+      <p:sp>
+        <p:nvSpPr>
+          <p:cNvPr id="2" name="CuadroTexto 1">
+            <a:extLst>
+              <a:ext uri="{FF2B5EF4-FFF2-40B4-BE49-F238E27FC236}">
+                <a16:creationId xmlns:a16="http://schemas.microsoft.com/office/drawing/2014/main" id="{FBFE8A56-7ABD-95F0-220D-966357247E6C}"/>
+              </a:ext>
+            </a:extLst>
+          </p:cNvPr>
+          <p:cNvSpPr txBox="1"/>
+          <p:nvPr/>
+        </p:nvSpPr>
+        <p:spPr>
+          <a:xfrm>
+            <a:off x="431800" y="1498600"/>
+            <a:ext cx="10160000" cy="5869364"/>
+          </a:xfrm>
+          <a:prstGeom prst="rect">
+            <a:avLst/>
+          </a:prstGeom>
+          <a:noFill/>
+        </p:spPr>
+        <p:txBody>
+          <a:bodyPr wrap="square" rtlCol="0">
+            <a:spAutoFit/>
+          </a:bodyPr>
+          <a:lstStyle/>
+          <a:p>
+            <a:pPr indent="-457200">
+              <a:lnSpc>
+                <a:spcPct val="150000"/>
+              </a:lnSpc>
+            </a:pPr>
+            <a:r>
+              <a:rPr lang="es-PE" dirty="0" err="1">
+                <a:latin typeface="Times New Roman" panose="02020603050405020304" pitchFamily="18" charset="0"/>
+                <a:cs typeface="Times New Roman" panose="02020603050405020304" pitchFamily="18" charset="0"/>
+              </a:rPr>
+              <a:t>Algarate</a:t>
+            </a:r>
+            <a:r>
+              <a:rPr lang="es-PE" dirty="0">
+                <a:latin typeface="Times New Roman" panose="02020603050405020304" pitchFamily="18" charset="0"/>
+                <a:cs typeface="Times New Roman" panose="02020603050405020304" pitchFamily="18" charset="0"/>
+              </a:rPr>
+              <a:t>, D. C., &amp; Marianella, O. (2023). Determinación del efecto de </a:t>
+            </a:r>
+            <a:r>
+              <a:rPr lang="es-PE" dirty="0" err="1">
+                <a:latin typeface="Times New Roman" panose="02020603050405020304" pitchFamily="18" charset="0"/>
+                <a:cs typeface="Times New Roman" panose="02020603050405020304" pitchFamily="18" charset="0"/>
+              </a:rPr>
+              <a:t>Metarhizium</a:t>
+            </a:r>
+            <a:r>
+              <a:rPr lang="es-PE" dirty="0">
+                <a:latin typeface="Times New Roman" panose="02020603050405020304" pitchFamily="18" charset="0"/>
+                <a:cs typeface="Times New Roman" panose="02020603050405020304" pitchFamily="18" charset="0"/>
+              </a:rPr>
+              <a:t> </a:t>
+            </a:r>
+            <a:r>
+              <a:rPr lang="es-PE" dirty="0" err="1">
+                <a:latin typeface="Times New Roman" panose="02020603050405020304" pitchFamily="18" charset="0"/>
+                <a:cs typeface="Times New Roman" panose="02020603050405020304" pitchFamily="18" charset="0"/>
+              </a:rPr>
+              <a:t>anisopliae</a:t>
+            </a:r>
+            <a:r>
+              <a:rPr lang="es-PE" dirty="0">
+                <a:latin typeface="Times New Roman" panose="02020603050405020304" pitchFamily="18" charset="0"/>
+                <a:cs typeface="Times New Roman" panose="02020603050405020304" pitchFamily="18" charset="0"/>
+              </a:rPr>
+              <a:t> para el control de adultos de </a:t>
+            </a:r>
+            <a:r>
+              <a:rPr lang="es-PE" dirty="0" err="1">
+                <a:latin typeface="Times New Roman" panose="02020603050405020304" pitchFamily="18" charset="0"/>
+                <a:cs typeface="Times New Roman" panose="02020603050405020304" pitchFamily="18" charset="0"/>
+              </a:rPr>
+              <a:t>Cryptocephalus</a:t>
+            </a:r>
+            <a:r>
+              <a:rPr lang="es-PE" dirty="0">
+                <a:latin typeface="Times New Roman" panose="02020603050405020304" pitchFamily="18" charset="0"/>
+                <a:cs typeface="Times New Roman" panose="02020603050405020304" pitchFamily="18" charset="0"/>
+              </a:rPr>
+              <a:t> </a:t>
+            </a:r>
+            <a:r>
+              <a:rPr lang="es-PE" dirty="0" err="1">
+                <a:latin typeface="Times New Roman" panose="02020603050405020304" pitchFamily="18" charset="0"/>
+                <a:cs typeface="Times New Roman" panose="02020603050405020304" pitchFamily="18" charset="0"/>
+              </a:rPr>
+              <a:t>sp</a:t>
+            </a:r>
+            <a:r>
+              <a:rPr lang="es-PE" dirty="0">
+                <a:latin typeface="Times New Roman" panose="02020603050405020304" pitchFamily="18" charset="0"/>
+                <a:cs typeface="Times New Roman" panose="02020603050405020304" pitchFamily="18" charset="0"/>
+              </a:rPr>
+              <a:t>. En condiciones de laboratorio. </a:t>
+            </a:r>
+            <a:r>
+              <a:rPr lang="es-PE" dirty="0">
+                <a:latin typeface="Times New Roman" panose="02020603050405020304" pitchFamily="18" charset="0"/>
+                <a:cs typeface="Times New Roman" panose="02020603050405020304" pitchFamily="18" charset="0"/>
+                <a:hlinkClick r:id="rId2"/>
+              </a:rPr>
+              <a:t>https://hdl.handle.net/20.500.14414/17611</a:t>
+            </a:r>
+            <a:endParaRPr lang="es-PE" dirty="0">
+              <a:latin typeface="Times New Roman" panose="02020603050405020304" pitchFamily="18" charset="0"/>
+              <a:cs typeface="Times New Roman" panose="02020603050405020304" pitchFamily="18" charset="0"/>
+            </a:endParaRPr>
+          </a:p>
+          <a:p>
+            <a:pPr indent="-457200">
+              <a:lnSpc>
+                <a:spcPct val="150000"/>
+              </a:lnSpc>
+            </a:pPr>
+            <a:endParaRPr lang="es-PE" dirty="0">
+              <a:latin typeface="Times New Roman" panose="02020603050405020304" pitchFamily="18" charset="0"/>
+              <a:cs typeface="Times New Roman" panose="02020603050405020304" pitchFamily="18" charset="0"/>
+            </a:endParaRPr>
+          </a:p>
+          <a:p>
+            <a:pPr indent="-457200">
+              <a:lnSpc>
+                <a:spcPct val="150000"/>
+              </a:lnSpc>
+            </a:pPr>
+            <a:r>
+              <a:rPr lang="es-PE" dirty="0" err="1">
+                <a:latin typeface="Times New Roman" panose="02020603050405020304" pitchFamily="18" charset="0"/>
+                <a:cs typeface="Times New Roman" panose="02020603050405020304" pitchFamily="18" charset="0"/>
+              </a:rPr>
+              <a:t>Aw</a:t>
+            </a:r>
+            <a:r>
+              <a:rPr lang="es-PE" dirty="0">
+                <a:latin typeface="Times New Roman" panose="02020603050405020304" pitchFamily="18" charset="0"/>
+                <a:cs typeface="Times New Roman" panose="02020603050405020304" pitchFamily="18" charset="0"/>
+              </a:rPr>
+              <a:t>, K. M. S., &amp; </a:t>
+            </a:r>
+            <a:r>
+              <a:rPr lang="es-PE" dirty="0" err="1">
+                <a:latin typeface="Times New Roman" panose="02020603050405020304" pitchFamily="18" charset="0"/>
+                <a:cs typeface="Times New Roman" panose="02020603050405020304" pitchFamily="18" charset="0"/>
+              </a:rPr>
+              <a:t>Hue</a:t>
+            </a:r>
+            <a:r>
+              <a:rPr lang="es-PE" dirty="0">
+                <a:latin typeface="Times New Roman" panose="02020603050405020304" pitchFamily="18" charset="0"/>
+                <a:cs typeface="Times New Roman" panose="02020603050405020304" pitchFamily="18" charset="0"/>
+              </a:rPr>
+              <a:t>, S. M. (2017). </a:t>
+            </a:r>
+            <a:r>
+              <a:rPr lang="es-PE" dirty="0" err="1">
+                <a:latin typeface="Times New Roman" panose="02020603050405020304" pitchFamily="18" charset="0"/>
+                <a:cs typeface="Times New Roman" panose="02020603050405020304" pitchFamily="18" charset="0"/>
+              </a:rPr>
+              <a:t>Mode</a:t>
+            </a:r>
+            <a:r>
+              <a:rPr lang="es-PE" dirty="0">
+                <a:latin typeface="Times New Roman" panose="02020603050405020304" pitchFamily="18" charset="0"/>
+                <a:cs typeface="Times New Roman" panose="02020603050405020304" pitchFamily="18" charset="0"/>
+              </a:rPr>
+              <a:t> </a:t>
+            </a:r>
+            <a:r>
+              <a:rPr lang="es-PE" dirty="0" err="1">
+                <a:latin typeface="Times New Roman" panose="02020603050405020304" pitchFamily="18" charset="0"/>
+                <a:cs typeface="Times New Roman" panose="02020603050405020304" pitchFamily="18" charset="0"/>
+              </a:rPr>
+              <a:t>of</a:t>
+            </a:r>
+            <a:r>
+              <a:rPr lang="es-PE" dirty="0">
+                <a:latin typeface="Times New Roman" panose="02020603050405020304" pitchFamily="18" charset="0"/>
+                <a:cs typeface="Times New Roman" panose="02020603050405020304" pitchFamily="18" charset="0"/>
+              </a:rPr>
+              <a:t> </a:t>
+            </a:r>
+            <a:r>
+              <a:rPr lang="es-PE" dirty="0" err="1">
+                <a:latin typeface="Times New Roman" panose="02020603050405020304" pitchFamily="18" charset="0"/>
+                <a:cs typeface="Times New Roman" panose="02020603050405020304" pitchFamily="18" charset="0"/>
+              </a:rPr>
+              <a:t>Infection</a:t>
+            </a:r>
+            <a:r>
+              <a:rPr lang="es-PE" dirty="0">
+                <a:latin typeface="Times New Roman" panose="02020603050405020304" pitchFamily="18" charset="0"/>
+                <a:cs typeface="Times New Roman" panose="02020603050405020304" pitchFamily="18" charset="0"/>
+              </a:rPr>
+              <a:t> </a:t>
+            </a:r>
+            <a:r>
+              <a:rPr lang="es-PE" dirty="0" err="1">
+                <a:latin typeface="Times New Roman" panose="02020603050405020304" pitchFamily="18" charset="0"/>
+                <a:cs typeface="Times New Roman" panose="02020603050405020304" pitchFamily="18" charset="0"/>
+              </a:rPr>
+              <a:t>of</a:t>
+            </a:r>
+            <a:r>
+              <a:rPr lang="es-PE" dirty="0">
+                <a:latin typeface="Times New Roman" panose="02020603050405020304" pitchFamily="18" charset="0"/>
+                <a:cs typeface="Times New Roman" panose="02020603050405020304" pitchFamily="18" charset="0"/>
+              </a:rPr>
+              <a:t> </a:t>
+            </a:r>
+            <a:r>
+              <a:rPr lang="es-PE" dirty="0" err="1">
+                <a:latin typeface="Times New Roman" panose="02020603050405020304" pitchFamily="18" charset="0"/>
+                <a:cs typeface="Times New Roman" panose="02020603050405020304" pitchFamily="18" charset="0"/>
+              </a:rPr>
+              <a:t>Metarhizium</a:t>
+            </a:r>
+            <a:r>
+              <a:rPr lang="es-PE" dirty="0">
+                <a:latin typeface="Times New Roman" panose="02020603050405020304" pitchFamily="18" charset="0"/>
+                <a:cs typeface="Times New Roman" panose="02020603050405020304" pitchFamily="18" charset="0"/>
+              </a:rPr>
+              <a:t> </a:t>
+            </a:r>
+            <a:r>
+              <a:rPr lang="es-PE" dirty="0" err="1">
+                <a:latin typeface="Times New Roman" panose="02020603050405020304" pitchFamily="18" charset="0"/>
+                <a:cs typeface="Times New Roman" panose="02020603050405020304" pitchFamily="18" charset="0"/>
+              </a:rPr>
+              <a:t>spp</a:t>
+            </a:r>
+            <a:r>
+              <a:rPr lang="es-PE" dirty="0">
+                <a:latin typeface="Times New Roman" panose="02020603050405020304" pitchFamily="18" charset="0"/>
+                <a:cs typeface="Times New Roman" panose="02020603050405020304" pitchFamily="18" charset="0"/>
+              </a:rPr>
+              <a:t>. </a:t>
+            </a:r>
+            <a:r>
+              <a:rPr lang="es-PE" dirty="0" err="1">
+                <a:latin typeface="Times New Roman" panose="02020603050405020304" pitchFamily="18" charset="0"/>
+                <a:cs typeface="Times New Roman" panose="02020603050405020304" pitchFamily="18" charset="0"/>
+              </a:rPr>
+              <a:t>Fungus</a:t>
+            </a:r>
+            <a:r>
+              <a:rPr lang="es-PE" dirty="0">
+                <a:latin typeface="Times New Roman" panose="02020603050405020304" pitchFamily="18" charset="0"/>
+                <a:cs typeface="Times New Roman" panose="02020603050405020304" pitchFamily="18" charset="0"/>
+              </a:rPr>
+              <a:t> and </a:t>
+            </a:r>
+            <a:r>
+              <a:rPr lang="es-PE" dirty="0" err="1">
+                <a:latin typeface="Times New Roman" panose="02020603050405020304" pitchFamily="18" charset="0"/>
+                <a:cs typeface="Times New Roman" panose="02020603050405020304" pitchFamily="18" charset="0"/>
+              </a:rPr>
+              <a:t>Their</a:t>
+            </a:r>
+            <a:r>
+              <a:rPr lang="es-PE" dirty="0">
+                <a:latin typeface="Times New Roman" panose="02020603050405020304" pitchFamily="18" charset="0"/>
+                <a:cs typeface="Times New Roman" panose="02020603050405020304" pitchFamily="18" charset="0"/>
+              </a:rPr>
+              <a:t> </a:t>
+            </a:r>
+            <a:r>
+              <a:rPr lang="es-PE" dirty="0" err="1">
+                <a:latin typeface="Times New Roman" panose="02020603050405020304" pitchFamily="18" charset="0"/>
+                <a:cs typeface="Times New Roman" panose="02020603050405020304" pitchFamily="18" charset="0"/>
+              </a:rPr>
+              <a:t>Potential</a:t>
+            </a:r>
+            <a:r>
+              <a:rPr lang="es-PE" dirty="0">
+                <a:latin typeface="Times New Roman" panose="02020603050405020304" pitchFamily="18" charset="0"/>
+                <a:cs typeface="Times New Roman" panose="02020603050405020304" pitchFamily="18" charset="0"/>
+              </a:rPr>
+              <a:t> as </a:t>
+            </a:r>
+            <a:r>
+              <a:rPr lang="es-PE" dirty="0" err="1">
+                <a:latin typeface="Times New Roman" panose="02020603050405020304" pitchFamily="18" charset="0"/>
+                <a:cs typeface="Times New Roman" panose="02020603050405020304" pitchFamily="18" charset="0"/>
+              </a:rPr>
+              <a:t>Biological</a:t>
+            </a:r>
+            <a:r>
+              <a:rPr lang="es-PE" dirty="0">
+                <a:latin typeface="Times New Roman" panose="02020603050405020304" pitchFamily="18" charset="0"/>
+                <a:cs typeface="Times New Roman" panose="02020603050405020304" pitchFamily="18" charset="0"/>
+              </a:rPr>
+              <a:t> Control </a:t>
+            </a:r>
+            <a:r>
+              <a:rPr lang="es-PE" dirty="0" err="1">
+                <a:latin typeface="Times New Roman" panose="02020603050405020304" pitchFamily="18" charset="0"/>
+                <a:cs typeface="Times New Roman" panose="02020603050405020304" pitchFamily="18" charset="0"/>
+              </a:rPr>
+              <a:t>Agents</a:t>
+            </a:r>
+            <a:r>
+              <a:rPr lang="es-PE" dirty="0">
+                <a:latin typeface="Times New Roman" panose="02020603050405020304" pitchFamily="18" charset="0"/>
+                <a:cs typeface="Times New Roman" panose="02020603050405020304" pitchFamily="18" charset="0"/>
+              </a:rPr>
+              <a:t>. </a:t>
+            </a:r>
+            <a:r>
+              <a:rPr lang="es-PE" dirty="0" err="1">
+                <a:latin typeface="Times New Roman" panose="02020603050405020304" pitchFamily="18" charset="0"/>
+                <a:cs typeface="Times New Roman" panose="02020603050405020304" pitchFamily="18" charset="0"/>
+              </a:rPr>
+              <a:t>Journal</a:t>
+            </a:r>
+            <a:r>
+              <a:rPr lang="es-PE" dirty="0">
+                <a:latin typeface="Times New Roman" panose="02020603050405020304" pitchFamily="18" charset="0"/>
+                <a:cs typeface="Times New Roman" panose="02020603050405020304" pitchFamily="18" charset="0"/>
+              </a:rPr>
+              <a:t> </a:t>
+            </a:r>
+            <a:r>
+              <a:rPr lang="es-PE" dirty="0" err="1">
+                <a:latin typeface="Times New Roman" panose="02020603050405020304" pitchFamily="18" charset="0"/>
+                <a:cs typeface="Times New Roman" panose="02020603050405020304" pitchFamily="18" charset="0"/>
+              </a:rPr>
+              <a:t>of</a:t>
+            </a:r>
+            <a:r>
+              <a:rPr lang="es-PE" dirty="0">
+                <a:latin typeface="Times New Roman" panose="02020603050405020304" pitchFamily="18" charset="0"/>
+                <a:cs typeface="Times New Roman" panose="02020603050405020304" pitchFamily="18" charset="0"/>
+              </a:rPr>
+              <a:t> </a:t>
+            </a:r>
+            <a:r>
+              <a:rPr lang="es-PE" dirty="0" err="1">
+                <a:latin typeface="Times New Roman" panose="02020603050405020304" pitchFamily="18" charset="0"/>
+                <a:cs typeface="Times New Roman" panose="02020603050405020304" pitchFamily="18" charset="0"/>
+              </a:rPr>
+              <a:t>Fungi</a:t>
+            </a:r>
+            <a:r>
+              <a:rPr lang="es-PE" dirty="0">
+                <a:latin typeface="Times New Roman" panose="02020603050405020304" pitchFamily="18" charset="0"/>
+                <a:cs typeface="Times New Roman" panose="02020603050405020304" pitchFamily="18" charset="0"/>
+              </a:rPr>
+              <a:t>, 3(2), </a:t>
+            </a:r>
+            <a:r>
+              <a:rPr lang="es-PE" dirty="0" err="1">
+                <a:latin typeface="Times New Roman" panose="02020603050405020304" pitchFamily="18" charset="0"/>
+                <a:cs typeface="Times New Roman" panose="02020603050405020304" pitchFamily="18" charset="0"/>
+              </a:rPr>
+              <a:t>Article</a:t>
+            </a:r>
+            <a:r>
+              <a:rPr lang="es-PE" dirty="0">
+                <a:latin typeface="Times New Roman" panose="02020603050405020304" pitchFamily="18" charset="0"/>
+                <a:cs typeface="Times New Roman" panose="02020603050405020304" pitchFamily="18" charset="0"/>
+              </a:rPr>
+              <a:t> 2. https://doi.org/10.3390/jof3020030</a:t>
+            </a:r>
+          </a:p>
+          <a:p>
+            <a:pPr indent="-457200">
+              <a:lnSpc>
+                <a:spcPct val="150000"/>
+              </a:lnSpc>
+            </a:pPr>
+            <a:r>
+              <a:rPr lang="es-PE" dirty="0">
+                <a:latin typeface="Times New Roman" panose="02020603050405020304" pitchFamily="18" charset="0"/>
+                <a:cs typeface="Times New Roman" panose="02020603050405020304" pitchFamily="18" charset="0"/>
+              </a:rPr>
+              <a:t>Baró, Y., Schuster, C., Gato, Y., Márquez, M. E., &amp; </a:t>
+            </a:r>
+            <a:r>
+              <a:rPr lang="es-PE" dirty="0" err="1">
+                <a:latin typeface="Times New Roman" panose="02020603050405020304" pitchFamily="18" charset="0"/>
+                <a:cs typeface="Times New Roman" panose="02020603050405020304" pitchFamily="18" charset="0"/>
+              </a:rPr>
+              <a:t>Leclerque</a:t>
+            </a:r>
+            <a:r>
+              <a:rPr lang="es-PE" dirty="0">
+                <a:latin typeface="Times New Roman" panose="02020603050405020304" pitchFamily="18" charset="0"/>
+                <a:cs typeface="Times New Roman" panose="02020603050405020304" pitchFamily="18" charset="0"/>
+              </a:rPr>
+              <a:t>, A. (2022). </a:t>
+            </a:r>
+            <a:r>
+              <a:rPr lang="es-PE" dirty="0" err="1">
+                <a:latin typeface="Times New Roman" panose="02020603050405020304" pitchFamily="18" charset="0"/>
+                <a:cs typeface="Times New Roman" panose="02020603050405020304" pitchFamily="18" charset="0"/>
+              </a:rPr>
+              <a:t>Characterization</a:t>
+            </a:r>
+            <a:r>
+              <a:rPr lang="es-PE" dirty="0">
+                <a:latin typeface="Times New Roman" panose="02020603050405020304" pitchFamily="18" charset="0"/>
+                <a:cs typeface="Times New Roman" panose="02020603050405020304" pitchFamily="18" charset="0"/>
+              </a:rPr>
+              <a:t>, </a:t>
+            </a:r>
+            <a:r>
+              <a:rPr lang="es-PE" dirty="0" err="1">
+                <a:latin typeface="Times New Roman" panose="02020603050405020304" pitchFamily="18" charset="0"/>
+                <a:cs typeface="Times New Roman" panose="02020603050405020304" pitchFamily="18" charset="0"/>
+              </a:rPr>
+              <a:t>identification</a:t>
+            </a:r>
+            <a:r>
+              <a:rPr lang="es-PE" dirty="0">
+                <a:latin typeface="Times New Roman" panose="02020603050405020304" pitchFamily="18" charset="0"/>
+                <a:cs typeface="Times New Roman" panose="02020603050405020304" pitchFamily="18" charset="0"/>
+              </a:rPr>
+              <a:t> and </a:t>
+            </a:r>
+            <a:r>
+              <a:rPr lang="es-PE" dirty="0" err="1">
+                <a:latin typeface="Times New Roman" panose="02020603050405020304" pitchFamily="18" charset="0"/>
+                <a:cs typeface="Times New Roman" panose="02020603050405020304" pitchFamily="18" charset="0"/>
+              </a:rPr>
+              <a:t>virulence</a:t>
+            </a:r>
+            <a:r>
+              <a:rPr lang="es-PE" dirty="0">
+                <a:latin typeface="Times New Roman" panose="02020603050405020304" pitchFamily="18" charset="0"/>
+                <a:cs typeface="Times New Roman" panose="02020603050405020304" pitchFamily="18" charset="0"/>
+              </a:rPr>
+              <a:t> </a:t>
+            </a:r>
+            <a:r>
+              <a:rPr lang="es-PE" dirty="0" err="1">
+                <a:latin typeface="Times New Roman" panose="02020603050405020304" pitchFamily="18" charset="0"/>
+                <a:cs typeface="Times New Roman" panose="02020603050405020304" pitchFamily="18" charset="0"/>
+              </a:rPr>
+              <a:t>of</a:t>
+            </a:r>
+            <a:r>
+              <a:rPr lang="es-PE" dirty="0">
+                <a:latin typeface="Times New Roman" panose="02020603050405020304" pitchFamily="18" charset="0"/>
+                <a:cs typeface="Times New Roman" panose="02020603050405020304" pitchFamily="18" charset="0"/>
+              </a:rPr>
+              <a:t> </a:t>
+            </a:r>
+            <a:r>
+              <a:rPr lang="es-PE" dirty="0" err="1">
+                <a:latin typeface="Times New Roman" panose="02020603050405020304" pitchFamily="18" charset="0"/>
+                <a:cs typeface="Times New Roman" panose="02020603050405020304" pitchFamily="18" charset="0"/>
+              </a:rPr>
+              <a:t>Metarhizium</a:t>
+            </a:r>
+            <a:r>
+              <a:rPr lang="es-PE" dirty="0">
+                <a:latin typeface="Times New Roman" panose="02020603050405020304" pitchFamily="18" charset="0"/>
+                <a:cs typeface="Times New Roman" panose="02020603050405020304" pitchFamily="18" charset="0"/>
+              </a:rPr>
+              <a:t> </a:t>
+            </a:r>
+            <a:r>
+              <a:rPr lang="es-PE" dirty="0" err="1">
+                <a:latin typeface="Times New Roman" panose="02020603050405020304" pitchFamily="18" charset="0"/>
+                <a:cs typeface="Times New Roman" panose="02020603050405020304" pitchFamily="18" charset="0"/>
+              </a:rPr>
+              <a:t>species</a:t>
+            </a:r>
+            <a:r>
+              <a:rPr lang="es-PE" dirty="0">
+                <a:latin typeface="Times New Roman" panose="02020603050405020304" pitchFamily="18" charset="0"/>
+                <a:cs typeface="Times New Roman" panose="02020603050405020304" pitchFamily="18" charset="0"/>
+              </a:rPr>
+              <a:t> </a:t>
+            </a:r>
+            <a:r>
+              <a:rPr lang="es-PE" dirty="0" err="1">
+                <a:latin typeface="Times New Roman" panose="02020603050405020304" pitchFamily="18" charset="0"/>
+                <a:cs typeface="Times New Roman" panose="02020603050405020304" pitchFamily="18" charset="0"/>
+              </a:rPr>
+              <a:t>from</a:t>
+            </a:r>
+            <a:r>
+              <a:rPr lang="es-PE" dirty="0">
+                <a:latin typeface="Times New Roman" panose="02020603050405020304" pitchFamily="18" charset="0"/>
+                <a:cs typeface="Times New Roman" panose="02020603050405020304" pitchFamily="18" charset="0"/>
+              </a:rPr>
+              <a:t> Cuba </a:t>
+            </a:r>
+            <a:r>
+              <a:rPr lang="es-PE" dirty="0" err="1">
+                <a:latin typeface="Times New Roman" panose="02020603050405020304" pitchFamily="18" charset="0"/>
+                <a:cs typeface="Times New Roman" panose="02020603050405020304" pitchFamily="18" charset="0"/>
+              </a:rPr>
+              <a:t>to</a:t>
+            </a:r>
+            <a:r>
+              <a:rPr lang="es-PE" dirty="0">
+                <a:latin typeface="Times New Roman" panose="02020603050405020304" pitchFamily="18" charset="0"/>
+                <a:cs typeface="Times New Roman" panose="02020603050405020304" pitchFamily="18" charset="0"/>
+              </a:rPr>
+              <a:t> control </a:t>
+            </a:r>
+            <a:r>
+              <a:rPr lang="es-PE" dirty="0" err="1">
+                <a:latin typeface="Times New Roman" panose="02020603050405020304" pitchFamily="18" charset="0"/>
+                <a:cs typeface="Times New Roman" panose="02020603050405020304" pitchFamily="18" charset="0"/>
+              </a:rPr>
+              <a:t>the</a:t>
+            </a:r>
+            <a:r>
+              <a:rPr lang="es-PE" dirty="0">
+                <a:latin typeface="Times New Roman" panose="02020603050405020304" pitchFamily="18" charset="0"/>
+                <a:cs typeface="Times New Roman" panose="02020603050405020304" pitchFamily="18" charset="0"/>
+              </a:rPr>
+              <a:t> </a:t>
+            </a:r>
+            <a:r>
+              <a:rPr lang="es-PE" dirty="0" err="1">
+                <a:latin typeface="Times New Roman" panose="02020603050405020304" pitchFamily="18" charset="0"/>
+                <a:cs typeface="Times New Roman" panose="02020603050405020304" pitchFamily="18" charset="0"/>
+              </a:rPr>
+              <a:t>sweet</a:t>
+            </a:r>
+            <a:r>
+              <a:rPr lang="es-PE" dirty="0">
+                <a:latin typeface="Times New Roman" panose="02020603050405020304" pitchFamily="18" charset="0"/>
+                <a:cs typeface="Times New Roman" panose="02020603050405020304" pitchFamily="18" charset="0"/>
+              </a:rPr>
+              <a:t> </a:t>
+            </a:r>
+            <a:r>
+              <a:rPr lang="es-PE" dirty="0" err="1">
+                <a:latin typeface="Times New Roman" panose="02020603050405020304" pitchFamily="18" charset="0"/>
+                <a:cs typeface="Times New Roman" panose="02020603050405020304" pitchFamily="18" charset="0"/>
+              </a:rPr>
+              <a:t>potato</a:t>
+            </a:r>
+            <a:r>
+              <a:rPr lang="es-PE" dirty="0">
+                <a:latin typeface="Times New Roman" panose="02020603050405020304" pitchFamily="18" charset="0"/>
+                <a:cs typeface="Times New Roman" panose="02020603050405020304" pitchFamily="18" charset="0"/>
+              </a:rPr>
+              <a:t> </a:t>
+            </a:r>
+            <a:r>
+              <a:rPr lang="es-PE" dirty="0" err="1">
+                <a:latin typeface="Times New Roman" panose="02020603050405020304" pitchFamily="18" charset="0"/>
+                <a:cs typeface="Times New Roman" panose="02020603050405020304" pitchFamily="18" charset="0"/>
+              </a:rPr>
+              <a:t>weevil</a:t>
+            </a:r>
+            <a:r>
+              <a:rPr lang="es-PE" dirty="0">
+                <a:latin typeface="Times New Roman" panose="02020603050405020304" pitchFamily="18" charset="0"/>
+                <a:cs typeface="Times New Roman" panose="02020603050405020304" pitchFamily="18" charset="0"/>
+              </a:rPr>
+              <a:t>, </a:t>
+            </a:r>
+            <a:r>
+              <a:rPr lang="es-PE" dirty="0" err="1">
+                <a:latin typeface="Times New Roman" panose="02020603050405020304" pitchFamily="18" charset="0"/>
+                <a:cs typeface="Times New Roman" panose="02020603050405020304" pitchFamily="18" charset="0"/>
+              </a:rPr>
+              <a:t>Cylas</a:t>
+            </a:r>
+            <a:r>
+              <a:rPr lang="es-PE" dirty="0">
+                <a:latin typeface="Times New Roman" panose="02020603050405020304" pitchFamily="18" charset="0"/>
+                <a:cs typeface="Times New Roman" panose="02020603050405020304" pitchFamily="18" charset="0"/>
+              </a:rPr>
+              <a:t> </a:t>
+            </a:r>
+            <a:r>
+              <a:rPr lang="es-PE" dirty="0" err="1">
+                <a:latin typeface="Times New Roman" panose="02020603050405020304" pitchFamily="18" charset="0"/>
+                <a:cs typeface="Times New Roman" panose="02020603050405020304" pitchFamily="18" charset="0"/>
+              </a:rPr>
+              <a:t>formicarius</a:t>
+            </a:r>
+            <a:r>
+              <a:rPr lang="es-PE" dirty="0">
+                <a:latin typeface="Times New Roman" panose="02020603050405020304" pitchFamily="18" charset="0"/>
+                <a:cs typeface="Times New Roman" panose="02020603050405020304" pitchFamily="18" charset="0"/>
+              </a:rPr>
+              <a:t> Fabricius (</a:t>
+            </a:r>
+            <a:r>
+              <a:rPr lang="es-PE" dirty="0" err="1">
+                <a:latin typeface="Times New Roman" panose="02020603050405020304" pitchFamily="18" charset="0"/>
+                <a:cs typeface="Times New Roman" panose="02020603050405020304" pitchFamily="18" charset="0"/>
+              </a:rPr>
+              <a:t>Coleoptera</a:t>
+            </a:r>
+            <a:r>
+              <a:rPr lang="es-PE" dirty="0">
+                <a:latin typeface="Times New Roman" panose="02020603050405020304" pitchFamily="18" charset="0"/>
+                <a:cs typeface="Times New Roman" panose="02020603050405020304" pitchFamily="18" charset="0"/>
+              </a:rPr>
+              <a:t>: </a:t>
+            </a:r>
+            <a:r>
+              <a:rPr lang="es-PE" dirty="0" err="1">
+                <a:latin typeface="Times New Roman" panose="02020603050405020304" pitchFamily="18" charset="0"/>
+                <a:cs typeface="Times New Roman" panose="02020603050405020304" pitchFamily="18" charset="0"/>
+              </a:rPr>
+              <a:t>Brentidae</a:t>
+            </a:r>
+            <a:r>
+              <a:rPr lang="es-PE" dirty="0">
+                <a:latin typeface="Times New Roman" panose="02020603050405020304" pitchFamily="18" charset="0"/>
+                <a:cs typeface="Times New Roman" panose="02020603050405020304" pitchFamily="18" charset="0"/>
+              </a:rPr>
+              <a:t>). </a:t>
+            </a:r>
+            <a:r>
+              <a:rPr lang="es-PE" dirty="0" err="1">
+                <a:latin typeface="Times New Roman" panose="02020603050405020304" pitchFamily="18" charset="0"/>
+                <a:cs typeface="Times New Roman" panose="02020603050405020304" pitchFamily="18" charset="0"/>
+              </a:rPr>
+              <a:t>Journal</a:t>
+            </a:r>
+            <a:r>
+              <a:rPr lang="es-PE" dirty="0">
+                <a:latin typeface="Times New Roman" panose="02020603050405020304" pitchFamily="18" charset="0"/>
+                <a:cs typeface="Times New Roman" panose="02020603050405020304" pitchFamily="18" charset="0"/>
+              </a:rPr>
+              <a:t> </a:t>
+            </a:r>
+            <a:r>
+              <a:rPr lang="es-PE" dirty="0" err="1">
+                <a:latin typeface="Times New Roman" panose="02020603050405020304" pitchFamily="18" charset="0"/>
+                <a:cs typeface="Times New Roman" panose="02020603050405020304" pitchFamily="18" charset="0"/>
+              </a:rPr>
+              <a:t>of</a:t>
+            </a:r>
+            <a:r>
+              <a:rPr lang="es-PE" dirty="0">
+                <a:latin typeface="Times New Roman" panose="02020603050405020304" pitchFamily="18" charset="0"/>
+                <a:cs typeface="Times New Roman" panose="02020603050405020304" pitchFamily="18" charset="0"/>
+              </a:rPr>
+              <a:t> </a:t>
+            </a:r>
+            <a:r>
+              <a:rPr lang="es-PE" dirty="0" err="1">
+                <a:latin typeface="Times New Roman" panose="02020603050405020304" pitchFamily="18" charset="0"/>
+                <a:cs typeface="Times New Roman" panose="02020603050405020304" pitchFamily="18" charset="0"/>
+              </a:rPr>
+              <a:t>Applied</a:t>
+            </a:r>
+            <a:r>
+              <a:rPr lang="es-PE" dirty="0">
+                <a:latin typeface="Times New Roman" panose="02020603050405020304" pitchFamily="18" charset="0"/>
+                <a:cs typeface="Times New Roman" panose="02020603050405020304" pitchFamily="18" charset="0"/>
+              </a:rPr>
+              <a:t> </a:t>
+            </a:r>
+            <a:r>
+              <a:rPr lang="es-PE" dirty="0" err="1">
+                <a:latin typeface="Times New Roman" panose="02020603050405020304" pitchFamily="18" charset="0"/>
+                <a:cs typeface="Times New Roman" panose="02020603050405020304" pitchFamily="18" charset="0"/>
+              </a:rPr>
+              <a:t>Microbiology</a:t>
+            </a:r>
+            <a:r>
+              <a:rPr lang="es-PE" dirty="0">
+                <a:latin typeface="Times New Roman" panose="02020603050405020304" pitchFamily="18" charset="0"/>
+                <a:cs typeface="Times New Roman" panose="02020603050405020304" pitchFamily="18" charset="0"/>
+              </a:rPr>
+              <a:t>, 132(5), 3705-3716. </a:t>
+            </a:r>
+            <a:r>
+              <a:rPr lang="es-PE" dirty="0">
+                <a:latin typeface="Times New Roman" panose="02020603050405020304" pitchFamily="18" charset="0"/>
+                <a:cs typeface="Times New Roman" panose="02020603050405020304" pitchFamily="18" charset="0"/>
+                <a:hlinkClick r:id="rId3"/>
+              </a:rPr>
+              <a:t>https://doi.org/10.1111/jam.15460</a:t>
+            </a:r>
+            <a:endParaRPr lang="es-PE" dirty="0">
+              <a:latin typeface="Times New Roman" panose="02020603050405020304" pitchFamily="18" charset="0"/>
+              <a:cs typeface="Times New Roman" panose="02020603050405020304" pitchFamily="18" charset="0"/>
+            </a:endParaRPr>
+          </a:p>
+          <a:p>
+            <a:pPr indent="-457200">
+              <a:lnSpc>
+                <a:spcPct val="150000"/>
+              </a:lnSpc>
+            </a:pPr>
+            <a:endParaRPr lang="es-PE" dirty="0">
+              <a:latin typeface="Times New Roman" panose="02020603050405020304" pitchFamily="18" charset="0"/>
+              <a:cs typeface="Times New Roman" panose="02020603050405020304" pitchFamily="18" charset="0"/>
+            </a:endParaRPr>
+          </a:p>
+          <a:p>
+            <a:pPr indent="-457200">
+              <a:lnSpc>
+                <a:spcPct val="150000"/>
+              </a:lnSpc>
+            </a:pPr>
+            <a:r>
+              <a:rPr lang="es-PE" dirty="0" err="1">
+                <a:latin typeface="Times New Roman" panose="02020603050405020304" pitchFamily="18" charset="0"/>
+                <a:cs typeface="Times New Roman" panose="02020603050405020304" pitchFamily="18" charset="0"/>
+              </a:rPr>
+              <a:t>Chuquibala</a:t>
+            </a:r>
+            <a:r>
+              <a:rPr lang="es-PE" dirty="0">
+                <a:latin typeface="Times New Roman" panose="02020603050405020304" pitchFamily="18" charset="0"/>
+                <a:cs typeface="Times New Roman" panose="02020603050405020304" pitchFamily="18" charset="0"/>
+              </a:rPr>
+              <a:t>-Checan, B., Torres-de la Cruz, M., Leiva, S., </a:t>
+            </a:r>
+            <a:r>
+              <a:rPr lang="es-PE" dirty="0" err="1">
+                <a:latin typeface="Times New Roman" panose="02020603050405020304" pitchFamily="18" charset="0"/>
+                <a:cs typeface="Times New Roman" panose="02020603050405020304" pitchFamily="18" charset="0"/>
+              </a:rPr>
+              <a:t>Hernandez</a:t>
+            </a:r>
+            <a:r>
+              <a:rPr lang="es-PE" dirty="0">
+                <a:latin typeface="Times New Roman" panose="02020603050405020304" pitchFamily="18" charset="0"/>
+                <a:cs typeface="Times New Roman" panose="02020603050405020304" pitchFamily="18" charset="0"/>
+              </a:rPr>
+              <a:t>-Diaz, E., Rubio, K., </a:t>
+            </a:r>
+            <a:r>
+              <a:rPr lang="es-PE" dirty="0" err="1">
+                <a:latin typeface="Times New Roman" panose="02020603050405020304" pitchFamily="18" charset="0"/>
+                <a:cs typeface="Times New Roman" panose="02020603050405020304" pitchFamily="18" charset="0"/>
+              </a:rPr>
+              <a:t>Goñas</a:t>
+            </a:r>
+            <a:r>
+              <a:rPr lang="es-PE" dirty="0">
+                <a:latin typeface="Times New Roman" panose="02020603050405020304" pitchFamily="18" charset="0"/>
+                <a:cs typeface="Times New Roman" panose="02020603050405020304" pitchFamily="18" charset="0"/>
+              </a:rPr>
+              <a:t>, M., Arce-Inga, M., &amp; Oliva-Cruz, M. (2023). In Vitro </a:t>
+            </a:r>
+            <a:r>
+              <a:rPr lang="es-PE" dirty="0" err="1">
+                <a:latin typeface="Times New Roman" panose="02020603050405020304" pitchFamily="18" charset="0"/>
+                <a:cs typeface="Times New Roman" panose="02020603050405020304" pitchFamily="18" charset="0"/>
+              </a:rPr>
+              <a:t>Biological</a:t>
+            </a:r>
+            <a:r>
+              <a:rPr lang="es-PE" dirty="0">
+                <a:latin typeface="Times New Roman" panose="02020603050405020304" pitchFamily="18" charset="0"/>
+                <a:cs typeface="Times New Roman" panose="02020603050405020304" pitchFamily="18" charset="0"/>
+              </a:rPr>
+              <a:t> </a:t>
+            </a:r>
+            <a:r>
+              <a:rPr lang="es-PE" dirty="0" err="1">
+                <a:latin typeface="Times New Roman" panose="02020603050405020304" pitchFamily="18" charset="0"/>
+                <a:cs typeface="Times New Roman" panose="02020603050405020304" pitchFamily="18" charset="0"/>
+              </a:rPr>
+              <a:t>Activity</a:t>
+            </a:r>
+            <a:r>
+              <a:rPr lang="es-PE" dirty="0">
+                <a:latin typeface="Times New Roman" panose="02020603050405020304" pitchFamily="18" charset="0"/>
+                <a:cs typeface="Times New Roman" panose="02020603050405020304" pitchFamily="18" charset="0"/>
+              </a:rPr>
+              <a:t> </a:t>
+            </a:r>
+            <a:r>
+              <a:rPr lang="es-PE" dirty="0" err="1">
+                <a:latin typeface="Times New Roman" panose="02020603050405020304" pitchFamily="18" charset="0"/>
+                <a:cs typeface="Times New Roman" panose="02020603050405020304" pitchFamily="18" charset="0"/>
+              </a:rPr>
+              <a:t>of</a:t>
+            </a:r>
+            <a:r>
+              <a:rPr lang="es-PE" dirty="0">
+                <a:latin typeface="Times New Roman" panose="02020603050405020304" pitchFamily="18" charset="0"/>
+                <a:cs typeface="Times New Roman" panose="02020603050405020304" pitchFamily="18" charset="0"/>
+              </a:rPr>
+              <a:t> </a:t>
+            </a:r>
+            <a:r>
+              <a:rPr lang="es-PE" dirty="0" err="1">
+                <a:latin typeface="Times New Roman" panose="02020603050405020304" pitchFamily="18" charset="0"/>
+                <a:cs typeface="Times New Roman" panose="02020603050405020304" pitchFamily="18" charset="0"/>
+              </a:rPr>
+              <a:t>Beauveria</a:t>
+            </a:r>
+            <a:r>
+              <a:rPr lang="es-PE" dirty="0">
+                <a:latin typeface="Times New Roman" panose="02020603050405020304" pitchFamily="18" charset="0"/>
+                <a:cs typeface="Times New Roman" panose="02020603050405020304" pitchFamily="18" charset="0"/>
+              </a:rPr>
+              <a:t> </a:t>
+            </a:r>
+            <a:r>
+              <a:rPr lang="es-PE" dirty="0" err="1">
+                <a:latin typeface="Times New Roman" panose="02020603050405020304" pitchFamily="18" charset="0"/>
+                <a:cs typeface="Times New Roman" panose="02020603050405020304" pitchFamily="18" charset="0"/>
+              </a:rPr>
+              <a:t>bassiana</a:t>
+            </a:r>
+            <a:r>
+              <a:rPr lang="es-PE" dirty="0">
+                <a:latin typeface="Times New Roman" panose="02020603050405020304" pitchFamily="18" charset="0"/>
+                <a:cs typeface="Times New Roman" panose="02020603050405020304" pitchFamily="18" charset="0"/>
+              </a:rPr>
+              <a:t>, </a:t>
+            </a:r>
+            <a:r>
+              <a:rPr lang="es-PE" dirty="0" err="1">
+                <a:latin typeface="Times New Roman" panose="02020603050405020304" pitchFamily="18" charset="0"/>
+                <a:cs typeface="Times New Roman" panose="02020603050405020304" pitchFamily="18" charset="0"/>
+              </a:rPr>
+              <a:t>Beauveria</a:t>
+            </a:r>
+            <a:r>
+              <a:rPr lang="es-PE" dirty="0">
+                <a:latin typeface="Times New Roman" panose="02020603050405020304" pitchFamily="18" charset="0"/>
+                <a:cs typeface="Times New Roman" panose="02020603050405020304" pitchFamily="18" charset="0"/>
+              </a:rPr>
+              <a:t> </a:t>
+            </a:r>
+            <a:r>
+              <a:rPr lang="es-PE" dirty="0" err="1">
+                <a:latin typeface="Times New Roman" panose="02020603050405020304" pitchFamily="18" charset="0"/>
+                <a:cs typeface="Times New Roman" panose="02020603050405020304" pitchFamily="18" charset="0"/>
+              </a:rPr>
+              <a:t>peruviensis</a:t>
+            </a:r>
+            <a:r>
+              <a:rPr lang="es-PE" dirty="0">
+                <a:latin typeface="Times New Roman" panose="02020603050405020304" pitchFamily="18" charset="0"/>
+                <a:cs typeface="Times New Roman" panose="02020603050405020304" pitchFamily="18" charset="0"/>
+              </a:rPr>
+              <a:t>, and </a:t>
+            </a:r>
+            <a:r>
+              <a:rPr lang="es-PE" dirty="0" err="1">
+                <a:latin typeface="Times New Roman" panose="02020603050405020304" pitchFamily="18" charset="0"/>
+                <a:cs typeface="Times New Roman" panose="02020603050405020304" pitchFamily="18" charset="0"/>
+              </a:rPr>
+              <a:t>Metarhizium</a:t>
+            </a:r>
+            <a:r>
+              <a:rPr lang="es-PE" dirty="0">
+                <a:latin typeface="Times New Roman" panose="02020603050405020304" pitchFamily="18" charset="0"/>
+                <a:cs typeface="Times New Roman" panose="02020603050405020304" pitchFamily="18" charset="0"/>
+              </a:rPr>
+              <a:t> </a:t>
+            </a:r>
+            <a:r>
+              <a:rPr lang="es-PE" dirty="0" err="1">
+                <a:latin typeface="Times New Roman" panose="02020603050405020304" pitchFamily="18" charset="0"/>
+                <a:cs typeface="Times New Roman" panose="02020603050405020304" pitchFamily="18" charset="0"/>
+              </a:rPr>
+              <a:t>sp</a:t>
+            </a:r>
+            <a:r>
+              <a:rPr lang="es-PE" dirty="0">
+                <a:latin typeface="Times New Roman" panose="02020603050405020304" pitchFamily="18" charset="0"/>
+                <a:cs typeface="Times New Roman" panose="02020603050405020304" pitchFamily="18" charset="0"/>
+              </a:rPr>
+              <a:t>. </a:t>
+            </a:r>
+            <a:r>
+              <a:rPr lang="es-PE" dirty="0" err="1">
+                <a:latin typeface="Times New Roman" panose="02020603050405020304" pitchFamily="18" charset="0"/>
+                <a:cs typeface="Times New Roman" panose="02020603050405020304" pitchFamily="18" charset="0"/>
+              </a:rPr>
+              <a:t>against</a:t>
+            </a:r>
+            <a:r>
+              <a:rPr lang="es-PE" dirty="0">
+                <a:latin typeface="Times New Roman" panose="02020603050405020304" pitchFamily="18" charset="0"/>
+                <a:cs typeface="Times New Roman" panose="02020603050405020304" pitchFamily="18" charset="0"/>
+              </a:rPr>
+              <a:t> </a:t>
+            </a:r>
+            <a:r>
+              <a:rPr lang="es-PE" dirty="0" err="1">
+                <a:latin typeface="Times New Roman" panose="02020603050405020304" pitchFamily="18" charset="0"/>
+                <a:cs typeface="Times New Roman" panose="02020603050405020304" pitchFamily="18" charset="0"/>
+              </a:rPr>
+              <a:t>Hypothenemus</a:t>
+            </a:r>
+            <a:r>
+              <a:rPr lang="es-PE" dirty="0">
+                <a:latin typeface="Times New Roman" panose="02020603050405020304" pitchFamily="18" charset="0"/>
+                <a:cs typeface="Times New Roman" panose="02020603050405020304" pitchFamily="18" charset="0"/>
+              </a:rPr>
+              <a:t> </a:t>
+            </a:r>
+            <a:r>
+              <a:rPr lang="es-PE" dirty="0" err="1">
+                <a:latin typeface="Times New Roman" panose="02020603050405020304" pitchFamily="18" charset="0"/>
+                <a:cs typeface="Times New Roman" panose="02020603050405020304" pitchFamily="18" charset="0"/>
+              </a:rPr>
+              <a:t>hampei</a:t>
+            </a:r>
+            <a:r>
+              <a:rPr lang="es-PE" dirty="0">
+                <a:latin typeface="Times New Roman" panose="02020603050405020304" pitchFamily="18" charset="0"/>
+                <a:cs typeface="Times New Roman" panose="02020603050405020304" pitchFamily="18" charset="0"/>
+              </a:rPr>
+              <a:t> (</a:t>
+            </a:r>
+            <a:r>
+              <a:rPr lang="es-PE" dirty="0" err="1">
+                <a:latin typeface="Times New Roman" panose="02020603050405020304" pitchFamily="18" charset="0"/>
+                <a:cs typeface="Times New Roman" panose="02020603050405020304" pitchFamily="18" charset="0"/>
+              </a:rPr>
+              <a:t>Coleoptera</a:t>
+            </a:r>
+            <a:r>
+              <a:rPr lang="es-PE" dirty="0">
+                <a:latin typeface="Times New Roman" panose="02020603050405020304" pitchFamily="18" charset="0"/>
+                <a:cs typeface="Times New Roman" panose="02020603050405020304" pitchFamily="18" charset="0"/>
+              </a:rPr>
+              <a:t>: </a:t>
+            </a:r>
+            <a:r>
+              <a:rPr lang="es-PE" dirty="0" err="1">
+                <a:latin typeface="Times New Roman" panose="02020603050405020304" pitchFamily="18" charset="0"/>
+                <a:cs typeface="Times New Roman" panose="02020603050405020304" pitchFamily="18" charset="0"/>
+              </a:rPr>
+              <a:t>Curculionidae</a:t>
+            </a:r>
+            <a:r>
+              <a:rPr lang="es-PE" dirty="0">
+                <a:latin typeface="Times New Roman" panose="02020603050405020304" pitchFamily="18" charset="0"/>
+                <a:cs typeface="Times New Roman" panose="02020603050405020304" pitchFamily="18" charset="0"/>
+              </a:rPr>
+              <a:t>). International </a:t>
+            </a:r>
+            <a:r>
+              <a:rPr lang="es-PE" dirty="0" err="1">
+                <a:latin typeface="Times New Roman" panose="02020603050405020304" pitchFamily="18" charset="0"/>
+                <a:cs typeface="Times New Roman" panose="02020603050405020304" pitchFamily="18" charset="0"/>
+              </a:rPr>
+              <a:t>Journal</a:t>
+            </a:r>
+            <a:r>
+              <a:rPr lang="es-PE" dirty="0">
+                <a:latin typeface="Times New Roman" panose="02020603050405020304" pitchFamily="18" charset="0"/>
+                <a:cs typeface="Times New Roman" panose="02020603050405020304" pitchFamily="18" charset="0"/>
+              </a:rPr>
+              <a:t> </a:t>
+            </a:r>
+            <a:r>
+              <a:rPr lang="es-PE" dirty="0" err="1">
+                <a:latin typeface="Times New Roman" panose="02020603050405020304" pitchFamily="18" charset="0"/>
+                <a:cs typeface="Times New Roman" panose="02020603050405020304" pitchFamily="18" charset="0"/>
+              </a:rPr>
+              <a:t>of</a:t>
+            </a:r>
+            <a:r>
+              <a:rPr lang="es-PE" dirty="0">
+                <a:latin typeface="Times New Roman" panose="02020603050405020304" pitchFamily="18" charset="0"/>
+                <a:cs typeface="Times New Roman" panose="02020603050405020304" pitchFamily="18" charset="0"/>
+              </a:rPr>
+              <a:t> </a:t>
+            </a:r>
+            <a:r>
+              <a:rPr lang="es-PE" dirty="0" err="1">
+                <a:latin typeface="Times New Roman" panose="02020603050405020304" pitchFamily="18" charset="0"/>
+                <a:cs typeface="Times New Roman" panose="02020603050405020304" pitchFamily="18" charset="0"/>
+              </a:rPr>
+              <a:t>Agronomy</a:t>
+            </a:r>
+            <a:r>
+              <a:rPr lang="es-PE" dirty="0">
+                <a:latin typeface="Times New Roman" panose="02020603050405020304" pitchFamily="18" charset="0"/>
+                <a:cs typeface="Times New Roman" panose="02020603050405020304" pitchFamily="18" charset="0"/>
+              </a:rPr>
+              <a:t>, 2023(1), 4982399. </a:t>
+            </a:r>
+            <a:r>
+              <a:rPr lang="es-PE" dirty="0">
+                <a:latin typeface="Times New Roman" panose="02020603050405020304" pitchFamily="18" charset="0"/>
+                <a:cs typeface="Times New Roman" panose="02020603050405020304" pitchFamily="18" charset="0"/>
+                <a:hlinkClick r:id="rId4"/>
+              </a:rPr>
+              <a:t>https://doi.org/10.1155/2023/4982399</a:t>
+            </a:r>
+            <a:endParaRPr lang="es-PE" dirty="0">
+              <a:latin typeface="Times New Roman" panose="02020603050405020304" pitchFamily="18" charset="0"/>
+              <a:cs typeface="Times New Roman" panose="02020603050405020304" pitchFamily="18" charset="0"/>
+            </a:endParaRPr>
+          </a:p>
+          <a:p>
+            <a:pPr indent="-457200">
+              <a:lnSpc>
+                <a:spcPct val="150000"/>
+              </a:lnSpc>
+            </a:pPr>
+            <a:endParaRPr lang="es-PE" dirty="0">
+              <a:latin typeface="Times New Roman" panose="02020603050405020304" pitchFamily="18" charset="0"/>
+              <a:cs typeface="Times New Roman" panose="02020603050405020304" pitchFamily="18" charset="0"/>
+            </a:endParaRPr>
+          </a:p>
+          <a:p>
+            <a:pPr indent="-457200">
+              <a:lnSpc>
+                <a:spcPct val="150000"/>
+              </a:lnSpc>
+            </a:pPr>
+            <a:r>
+              <a:rPr lang="es-PE" dirty="0">
+                <a:latin typeface="Times New Roman" panose="02020603050405020304" pitchFamily="18" charset="0"/>
+                <a:cs typeface="Times New Roman" panose="02020603050405020304" pitchFamily="18" charset="0"/>
+              </a:rPr>
+              <a:t>Gerónimo-Torres, J. D. C., Torres-de-la-Cruz, M., Cruz, M. P., </a:t>
+            </a:r>
+            <a:r>
+              <a:rPr lang="es-PE" dirty="0" err="1">
+                <a:latin typeface="Times New Roman" panose="02020603050405020304" pitchFamily="18" charset="0"/>
+                <a:cs typeface="Times New Roman" panose="02020603050405020304" pitchFamily="18" charset="0"/>
+              </a:rPr>
+              <a:t>De-la-Cruz-Pérez</a:t>
+            </a:r>
+            <a:r>
+              <a:rPr lang="es-PE" dirty="0">
+                <a:latin typeface="Times New Roman" panose="02020603050405020304" pitchFamily="18" charset="0"/>
+                <a:cs typeface="Times New Roman" panose="02020603050405020304" pitchFamily="18" charset="0"/>
+              </a:rPr>
+              <a:t>, A., Ortiz-</a:t>
+            </a:r>
+            <a:r>
+              <a:rPr lang="es-PE" dirty="0" err="1">
+                <a:latin typeface="Times New Roman" panose="02020603050405020304" pitchFamily="18" charset="0"/>
+                <a:cs typeface="Times New Roman" panose="02020603050405020304" pitchFamily="18" charset="0"/>
+              </a:rPr>
+              <a:t>garcía</a:t>
+            </a:r>
+            <a:r>
+              <a:rPr lang="es-PE" dirty="0">
+                <a:latin typeface="Times New Roman" panose="02020603050405020304" pitchFamily="18" charset="0"/>
+                <a:cs typeface="Times New Roman" panose="02020603050405020304" pitchFamily="18" charset="0"/>
+              </a:rPr>
+              <a:t>, C. F., &amp; </a:t>
+            </a:r>
+            <a:r>
+              <a:rPr lang="es-PE" dirty="0" err="1">
+                <a:latin typeface="Times New Roman" panose="02020603050405020304" pitchFamily="18" charset="0"/>
+                <a:cs typeface="Times New Roman" panose="02020603050405020304" pitchFamily="18" charset="0"/>
+              </a:rPr>
+              <a:t>Cappello</a:t>
+            </a:r>
+            <a:r>
+              <a:rPr lang="es-PE" dirty="0">
+                <a:latin typeface="Times New Roman" panose="02020603050405020304" pitchFamily="18" charset="0"/>
+                <a:cs typeface="Times New Roman" panose="02020603050405020304" pitchFamily="18" charset="0"/>
+              </a:rPr>
+              <a:t>-García, S. (2016). Caracterización de aislamientos nativos de </a:t>
+            </a:r>
+            <a:r>
+              <a:rPr lang="es-PE" dirty="0" err="1">
+                <a:latin typeface="Times New Roman" panose="02020603050405020304" pitchFamily="18" charset="0"/>
+                <a:cs typeface="Times New Roman" panose="02020603050405020304" pitchFamily="18" charset="0"/>
+              </a:rPr>
+              <a:t>Beauveria</a:t>
+            </a:r>
+            <a:r>
+              <a:rPr lang="es-PE" dirty="0">
+                <a:latin typeface="Times New Roman" panose="02020603050405020304" pitchFamily="18" charset="0"/>
+                <a:cs typeface="Times New Roman" panose="02020603050405020304" pitchFamily="18" charset="0"/>
+              </a:rPr>
+              <a:t> </a:t>
+            </a:r>
+            <a:r>
+              <a:rPr lang="es-PE" dirty="0" err="1">
+                <a:latin typeface="Times New Roman" panose="02020603050405020304" pitchFamily="18" charset="0"/>
+                <a:cs typeface="Times New Roman" panose="02020603050405020304" pitchFamily="18" charset="0"/>
+              </a:rPr>
+              <a:t>bassiana</a:t>
+            </a:r>
+            <a:r>
+              <a:rPr lang="es-PE" dirty="0">
+                <a:latin typeface="Times New Roman" panose="02020603050405020304" pitchFamily="18" charset="0"/>
+                <a:cs typeface="Times New Roman" panose="02020603050405020304" pitchFamily="18" charset="0"/>
+              </a:rPr>
+              <a:t> y su patogenicidad hacia </a:t>
+            </a:r>
+            <a:r>
+              <a:rPr lang="es-PE" dirty="0" err="1">
+                <a:latin typeface="Times New Roman" panose="02020603050405020304" pitchFamily="18" charset="0"/>
+                <a:cs typeface="Times New Roman" panose="02020603050405020304" pitchFamily="18" charset="0"/>
+              </a:rPr>
+              <a:t>Hypothenemus</a:t>
+            </a:r>
+            <a:r>
+              <a:rPr lang="es-PE" dirty="0">
+                <a:latin typeface="Times New Roman" panose="02020603050405020304" pitchFamily="18" charset="0"/>
+                <a:cs typeface="Times New Roman" panose="02020603050405020304" pitchFamily="18" charset="0"/>
+              </a:rPr>
+              <a:t> </a:t>
+            </a:r>
+            <a:r>
+              <a:rPr lang="es-PE" dirty="0" err="1">
+                <a:latin typeface="Times New Roman" panose="02020603050405020304" pitchFamily="18" charset="0"/>
+                <a:cs typeface="Times New Roman" panose="02020603050405020304" pitchFamily="18" charset="0"/>
+              </a:rPr>
+              <a:t>hampei</a:t>
+            </a:r>
+            <a:r>
+              <a:rPr lang="es-PE" dirty="0">
+                <a:latin typeface="Times New Roman" panose="02020603050405020304" pitchFamily="18" charset="0"/>
+                <a:cs typeface="Times New Roman" panose="02020603050405020304" pitchFamily="18" charset="0"/>
+              </a:rPr>
+              <a:t>, en Tabasco, México. Revista Colombiana de Entomología, 42(1), 28-35.</a:t>
+            </a:r>
+          </a:p>
+          <a:p>
+            <a:pPr indent="-457200">
+              <a:lnSpc>
+                <a:spcPct val="150000"/>
+              </a:lnSpc>
+            </a:pPr>
+            <a:br>
+              <a:rPr lang="es-PE" dirty="0"/>
+            </a:br>
+            <a:endParaRPr lang="es-PE" dirty="0"/>
+          </a:p>
+        </p:txBody>
+      </p:sp>
+    </p:spTree>
+    <p:extLst>
+      <p:ext uri="{BB962C8B-B14F-4D97-AF65-F5344CB8AC3E}">
+        <p14:creationId xmlns:p14="http://schemas.microsoft.com/office/powerpoint/2010/main" val="2176882519"/>
+      </p:ext>
+    </p:extLst>
+  </p:cSld>
+  <p:clrMapOvr>
+    <a:masterClrMapping/>
+  </p:clrMapOvr>
+</p:sld>
+</file>
+
+<file path=ppt/slides/slide12.xml><?xml version="1.0" encoding="utf-8"?>
+<p:sld xmlns:a="http://schemas.openxmlformats.org/drawingml/2006/main" xmlns:r="http://schemas.openxmlformats.org/officeDocument/2006/relationships" xmlns:p="http://schemas.openxmlformats.org/presentationml/2006/main">
+  <p:cSld>
+    <p:spTree>
+      <p:nvGrpSpPr>
+        <p:cNvPr id="1" name="">
+          <a:extLst>
+            <a:ext uri="{FF2B5EF4-FFF2-40B4-BE49-F238E27FC236}">
               <a16:creationId xmlns:a16="http://schemas.microsoft.com/office/drawing/2014/main" id="{ECBEF12E-36D7-810F-B619-E9DA4AEF3B96}"/>
             </a:ext>
           </a:extLst>
@@ -14943,7 +17104,7 @@
 </p:sld>
 </file>
 
-<file path=ppt/slides/slide11.xml><?xml version="1.0" encoding="utf-8"?>
+<file path=ppt/slides/slide13.xml><?xml version="1.0" encoding="utf-8"?>
 <p:sld xmlns:a="http://schemas.openxmlformats.org/drawingml/2006/main" xmlns:r="http://schemas.openxmlformats.org/officeDocument/2006/relationships" xmlns:p="http://schemas.openxmlformats.org/presentationml/2006/main">
   <p:cSld>
     <p:spTree>
@@ -18705,6 +20866,720 @@
 </file>
 
 <file path=ppt/slides/slide7.xml><?xml version="1.0" encoding="utf-8"?>
+<p:sld xmlns:a="http://schemas.openxmlformats.org/drawingml/2006/main" xmlns:r="http://schemas.openxmlformats.org/officeDocument/2006/relationships" xmlns:p="http://schemas.openxmlformats.org/presentationml/2006/main">
+  <p:cSld>
+    <p:spTree>
+      <p:nvGrpSpPr>
+        <p:cNvPr id="1" name="">
+          <a:extLst>
+            <a:ext uri="{FF2B5EF4-FFF2-40B4-BE49-F238E27FC236}">
+              <a16:creationId xmlns:a16="http://schemas.microsoft.com/office/drawing/2014/main" id="{100DC2ED-5BDE-C35B-A57E-0AC6E18BC4F4}"/>
+            </a:ext>
+          </a:extLst>
+        </p:cNvPr>
+        <p:cNvGrpSpPr/>
+        <p:nvPr/>
+      </p:nvGrpSpPr>
+      <p:grpSpPr>
+        <a:xfrm>
+          <a:off x="0" y="0"/>
+          <a:ext cx="0" cy="0"/>
+          <a:chOff x="0" y="0"/>
+          <a:chExt cx="0" cy="0"/>
+        </a:xfrm>
+      </p:grpSpPr>
+      <p:sp>
+        <p:nvSpPr>
+          <p:cNvPr id="5" name="Google Shape;64;p8">
+            <a:extLst>
+              <a:ext uri="{FF2B5EF4-FFF2-40B4-BE49-F238E27FC236}">
+                <a16:creationId xmlns:a16="http://schemas.microsoft.com/office/drawing/2014/main" id="{D58F5059-F2B3-9A86-5AC0-B1ECB31AE2E4}"/>
+              </a:ext>
+            </a:extLst>
+          </p:cNvPr>
+          <p:cNvSpPr txBox="1">
+            <a:spLocks/>
+          </p:cNvSpPr>
+          <p:nvPr/>
+        </p:nvSpPr>
+        <p:spPr>
+          <a:xfrm>
+            <a:off x="2711088" y="840043"/>
+            <a:ext cx="5455012" cy="444342"/>
+          </a:xfrm>
+          <a:prstGeom prst="rect">
+            <a:avLst/>
+          </a:prstGeom>
+          <a:noFill/>
+          <a:ln>
+            <a:noFill/>
+          </a:ln>
+        </p:spPr>
+        <p:txBody>
+          <a:bodyPr spcFirstLastPara="1" wrap="square" lIns="0" tIns="13325" rIns="0" bIns="0" anchor="t" anchorCtr="0">
+            <a:spAutoFit/>
+          </a:bodyPr>
+          <a:lstStyle>
+            <a:defPPr marR="0" lvl="0" algn="l" rtl="0">
+              <a:lnSpc>
+                <a:spcPct val="100000"/>
+              </a:lnSpc>
+              <a:spcBef>
+                <a:spcPts val="0"/>
+              </a:spcBef>
+              <a:spcAft>
+                <a:spcPts val="0"/>
+              </a:spcAft>
+            </a:defPPr>
+            <a:lvl1pPr marR="0" lvl="0" algn="l" rtl="0">
+              <a:lnSpc>
+                <a:spcPct val="100000"/>
+              </a:lnSpc>
+              <a:spcBef>
+                <a:spcPts val="0"/>
+              </a:spcBef>
+              <a:spcAft>
+                <a:spcPts val="0"/>
+              </a:spcAft>
+              <a:buClr>
+                <a:srgbClr val="000000"/>
+              </a:buClr>
+              <a:buSzPts val="1400"/>
+              <a:buFont typeface="Arial"/>
+              <a:buNone/>
+              <a:defRPr sz="3150" b="1" i="0" u="none" strike="noStrike" cap="none">
+                <a:solidFill>
+                  <a:schemeClr val="lt1"/>
+                </a:solidFill>
+                <a:latin typeface="Times New Roman"/>
+                <a:ea typeface="Times New Roman"/>
+                <a:cs typeface="Times New Roman"/>
+                <a:sym typeface="Times New Roman"/>
+              </a:defRPr>
+            </a:lvl1pPr>
+            <a:lvl2pPr marR="0" lvl="1" algn="l" rtl="0">
+              <a:lnSpc>
+                <a:spcPct val="100000"/>
+              </a:lnSpc>
+              <a:spcBef>
+                <a:spcPts val="0"/>
+              </a:spcBef>
+              <a:spcAft>
+                <a:spcPts val="0"/>
+              </a:spcAft>
+              <a:buClr>
+                <a:srgbClr val="000000"/>
+              </a:buClr>
+              <a:buSzPts val="1400"/>
+              <a:buFont typeface="Arial"/>
+              <a:buNone/>
+              <a:defRPr sz="1800" b="0" i="0" u="none" strike="noStrike" cap="none">
+                <a:solidFill>
+                  <a:srgbClr val="000000"/>
+                </a:solidFill>
+                <a:latin typeface="Arial"/>
+                <a:ea typeface="Arial"/>
+                <a:cs typeface="Arial"/>
+                <a:sym typeface="Arial"/>
+              </a:defRPr>
+            </a:lvl2pPr>
+            <a:lvl3pPr marR="0" lvl="2" algn="l" rtl="0">
+              <a:lnSpc>
+                <a:spcPct val="100000"/>
+              </a:lnSpc>
+              <a:spcBef>
+                <a:spcPts val="0"/>
+              </a:spcBef>
+              <a:spcAft>
+                <a:spcPts val="0"/>
+              </a:spcAft>
+              <a:buClr>
+                <a:srgbClr val="000000"/>
+              </a:buClr>
+              <a:buSzPts val="1400"/>
+              <a:buFont typeface="Arial"/>
+              <a:buNone/>
+              <a:defRPr sz="1800" b="0" i="0" u="none" strike="noStrike" cap="none">
+                <a:solidFill>
+                  <a:srgbClr val="000000"/>
+                </a:solidFill>
+                <a:latin typeface="Arial"/>
+                <a:ea typeface="Arial"/>
+                <a:cs typeface="Arial"/>
+                <a:sym typeface="Arial"/>
+              </a:defRPr>
+            </a:lvl3pPr>
+            <a:lvl4pPr marR="0" lvl="3" algn="l" rtl="0">
+              <a:lnSpc>
+                <a:spcPct val="100000"/>
+              </a:lnSpc>
+              <a:spcBef>
+                <a:spcPts val="0"/>
+              </a:spcBef>
+              <a:spcAft>
+                <a:spcPts val="0"/>
+              </a:spcAft>
+              <a:buClr>
+                <a:srgbClr val="000000"/>
+              </a:buClr>
+              <a:buSzPts val="1400"/>
+              <a:buFont typeface="Arial"/>
+              <a:buNone/>
+              <a:defRPr sz="1800" b="0" i="0" u="none" strike="noStrike" cap="none">
+                <a:solidFill>
+                  <a:srgbClr val="000000"/>
+                </a:solidFill>
+                <a:latin typeface="Arial"/>
+                <a:ea typeface="Arial"/>
+                <a:cs typeface="Arial"/>
+                <a:sym typeface="Arial"/>
+              </a:defRPr>
+            </a:lvl4pPr>
+            <a:lvl5pPr marR="0" lvl="4" algn="l" rtl="0">
+              <a:lnSpc>
+                <a:spcPct val="100000"/>
+              </a:lnSpc>
+              <a:spcBef>
+                <a:spcPts val="0"/>
+              </a:spcBef>
+              <a:spcAft>
+                <a:spcPts val="0"/>
+              </a:spcAft>
+              <a:buClr>
+                <a:srgbClr val="000000"/>
+              </a:buClr>
+              <a:buSzPts val="1400"/>
+              <a:buFont typeface="Arial"/>
+              <a:buNone/>
+              <a:defRPr sz="1800" b="0" i="0" u="none" strike="noStrike" cap="none">
+                <a:solidFill>
+                  <a:srgbClr val="000000"/>
+                </a:solidFill>
+                <a:latin typeface="Arial"/>
+                <a:ea typeface="Arial"/>
+                <a:cs typeface="Arial"/>
+                <a:sym typeface="Arial"/>
+              </a:defRPr>
+            </a:lvl5pPr>
+            <a:lvl6pPr marR="0" lvl="5" algn="l" rtl="0">
+              <a:lnSpc>
+                <a:spcPct val="100000"/>
+              </a:lnSpc>
+              <a:spcBef>
+                <a:spcPts val="0"/>
+              </a:spcBef>
+              <a:spcAft>
+                <a:spcPts val="0"/>
+              </a:spcAft>
+              <a:buClr>
+                <a:srgbClr val="000000"/>
+              </a:buClr>
+              <a:buSzPts val="1400"/>
+              <a:buFont typeface="Arial"/>
+              <a:buNone/>
+              <a:defRPr sz="1800" b="0" i="0" u="none" strike="noStrike" cap="none">
+                <a:solidFill>
+                  <a:srgbClr val="000000"/>
+                </a:solidFill>
+                <a:latin typeface="Arial"/>
+                <a:ea typeface="Arial"/>
+                <a:cs typeface="Arial"/>
+                <a:sym typeface="Arial"/>
+              </a:defRPr>
+            </a:lvl6pPr>
+            <a:lvl7pPr marR="0" lvl="6" algn="l" rtl="0">
+              <a:lnSpc>
+                <a:spcPct val="100000"/>
+              </a:lnSpc>
+              <a:spcBef>
+                <a:spcPts val="0"/>
+              </a:spcBef>
+              <a:spcAft>
+                <a:spcPts val="0"/>
+              </a:spcAft>
+              <a:buClr>
+                <a:srgbClr val="000000"/>
+              </a:buClr>
+              <a:buSzPts val="1400"/>
+              <a:buFont typeface="Arial"/>
+              <a:buNone/>
+              <a:defRPr sz="1800" b="0" i="0" u="none" strike="noStrike" cap="none">
+                <a:solidFill>
+                  <a:srgbClr val="000000"/>
+                </a:solidFill>
+                <a:latin typeface="Arial"/>
+                <a:ea typeface="Arial"/>
+                <a:cs typeface="Arial"/>
+                <a:sym typeface="Arial"/>
+              </a:defRPr>
+            </a:lvl7pPr>
+            <a:lvl8pPr marR="0" lvl="7" algn="l" rtl="0">
+              <a:lnSpc>
+                <a:spcPct val="100000"/>
+              </a:lnSpc>
+              <a:spcBef>
+                <a:spcPts val="0"/>
+              </a:spcBef>
+              <a:spcAft>
+                <a:spcPts val="0"/>
+              </a:spcAft>
+              <a:buClr>
+                <a:srgbClr val="000000"/>
+              </a:buClr>
+              <a:buSzPts val="1400"/>
+              <a:buFont typeface="Arial"/>
+              <a:buNone/>
+              <a:defRPr sz="1800" b="0" i="0" u="none" strike="noStrike" cap="none">
+                <a:solidFill>
+                  <a:srgbClr val="000000"/>
+                </a:solidFill>
+                <a:latin typeface="Arial"/>
+                <a:ea typeface="Arial"/>
+                <a:cs typeface="Arial"/>
+                <a:sym typeface="Arial"/>
+              </a:defRPr>
+            </a:lvl8pPr>
+            <a:lvl9pPr marR="0" lvl="8" algn="l" rtl="0">
+              <a:lnSpc>
+                <a:spcPct val="100000"/>
+              </a:lnSpc>
+              <a:spcBef>
+                <a:spcPts val="0"/>
+              </a:spcBef>
+              <a:spcAft>
+                <a:spcPts val="0"/>
+              </a:spcAft>
+              <a:buClr>
+                <a:srgbClr val="000000"/>
+              </a:buClr>
+              <a:buSzPts val="1400"/>
+              <a:buFont typeface="Arial"/>
+              <a:buNone/>
+              <a:defRPr sz="1800" b="0" i="0" u="none" strike="noStrike" cap="none">
+                <a:solidFill>
+                  <a:srgbClr val="000000"/>
+                </a:solidFill>
+                <a:latin typeface="Arial"/>
+                <a:ea typeface="Arial"/>
+                <a:cs typeface="Arial"/>
+                <a:sym typeface="Arial"/>
+              </a:defRPr>
+            </a:lvl9pPr>
+          </a:lstStyle>
+          <a:p>
+            <a:r>
+              <a:rPr lang="es-MX" sz="2800" dirty="0">
+                <a:solidFill>
+                  <a:schemeClr val="bg1"/>
+                </a:solidFill>
+                <a:latin typeface="TimesNewRomanPS-BoldMT"/>
+              </a:rPr>
+              <a:t>Operacionalización de variables</a:t>
+            </a:r>
+          </a:p>
+        </p:txBody>
+      </p:sp>
+      <p:pic>
+        <p:nvPicPr>
+          <p:cNvPr id="3" name="Imagen 2">
+            <a:extLst>
+              <a:ext uri="{FF2B5EF4-FFF2-40B4-BE49-F238E27FC236}">
+                <a16:creationId xmlns:a16="http://schemas.microsoft.com/office/drawing/2014/main" id="{6D9EDFF8-45DE-DA7B-5A58-FD60A7A5560E}"/>
+              </a:ext>
+            </a:extLst>
+          </p:cNvPr>
+          <p:cNvPicPr>
+            <a:picLocks noChangeAspect="1"/>
+          </p:cNvPicPr>
+          <p:nvPr/>
+        </p:nvPicPr>
+        <p:blipFill>
+          <a:blip r:embed="rId2"/>
+          <a:stretch>
+            <a:fillRect/>
+          </a:stretch>
+        </p:blipFill>
+        <p:spPr>
+          <a:xfrm>
+            <a:off x="1817598" y="1565933"/>
+            <a:ext cx="7058204" cy="4430984"/>
+          </a:xfrm>
+          <a:prstGeom prst="rect">
+            <a:avLst/>
+          </a:prstGeom>
+        </p:spPr>
+      </p:pic>
+    </p:spTree>
+    <p:extLst>
+      <p:ext uri="{BB962C8B-B14F-4D97-AF65-F5344CB8AC3E}">
+        <p14:creationId xmlns:p14="http://schemas.microsoft.com/office/powerpoint/2010/main" val="3785323036"/>
+      </p:ext>
+    </p:extLst>
+  </p:cSld>
+  <p:clrMapOvr>
+    <a:masterClrMapping/>
+  </p:clrMapOvr>
+</p:sld>
+</file>
+
+<file path=ppt/slides/slide8.xml><?xml version="1.0" encoding="utf-8"?>
+<p:sld xmlns:a="http://schemas.openxmlformats.org/drawingml/2006/main" xmlns:r="http://schemas.openxmlformats.org/officeDocument/2006/relationships" xmlns:p="http://schemas.openxmlformats.org/presentationml/2006/main">
+  <p:cSld>
+    <p:spTree>
+      <p:nvGrpSpPr>
+        <p:cNvPr id="1" name="">
+          <a:extLst>
+            <a:ext uri="{FF2B5EF4-FFF2-40B4-BE49-F238E27FC236}">
+              <a16:creationId xmlns:a16="http://schemas.microsoft.com/office/drawing/2014/main" id="{9B00AC7D-81AD-6EE7-39C0-FFC51A016910}"/>
+            </a:ext>
+          </a:extLst>
+        </p:cNvPr>
+        <p:cNvGrpSpPr/>
+        <p:nvPr/>
+      </p:nvGrpSpPr>
+      <p:grpSpPr>
+        <a:xfrm>
+          <a:off x="0" y="0"/>
+          <a:ext cx="0" cy="0"/>
+          <a:chOff x="0" y="0"/>
+          <a:chExt cx="0" cy="0"/>
+        </a:xfrm>
+      </p:grpSpPr>
+      <p:sp>
+        <p:nvSpPr>
+          <p:cNvPr id="5" name="Google Shape;64;p8">
+            <a:extLst>
+              <a:ext uri="{FF2B5EF4-FFF2-40B4-BE49-F238E27FC236}">
+                <a16:creationId xmlns:a16="http://schemas.microsoft.com/office/drawing/2014/main" id="{6401D38D-D790-7F5B-BE8F-74DC2F66E629}"/>
+              </a:ext>
+            </a:extLst>
+          </p:cNvPr>
+          <p:cNvSpPr txBox="1">
+            <a:spLocks/>
+          </p:cNvSpPr>
+          <p:nvPr/>
+        </p:nvSpPr>
+        <p:spPr>
+          <a:xfrm>
+            <a:off x="2711088" y="840043"/>
+            <a:ext cx="5455012" cy="444342"/>
+          </a:xfrm>
+          <a:prstGeom prst="rect">
+            <a:avLst/>
+          </a:prstGeom>
+          <a:noFill/>
+          <a:ln>
+            <a:noFill/>
+          </a:ln>
+        </p:spPr>
+        <p:txBody>
+          <a:bodyPr spcFirstLastPara="1" wrap="square" lIns="0" tIns="13325" rIns="0" bIns="0" anchor="t" anchorCtr="0">
+            <a:spAutoFit/>
+          </a:bodyPr>
+          <a:lstStyle>
+            <a:defPPr marR="0" lvl="0" algn="l" rtl="0">
+              <a:lnSpc>
+                <a:spcPct val="100000"/>
+              </a:lnSpc>
+              <a:spcBef>
+                <a:spcPts val="0"/>
+              </a:spcBef>
+              <a:spcAft>
+                <a:spcPts val="0"/>
+              </a:spcAft>
+            </a:defPPr>
+            <a:lvl1pPr marR="0" lvl="0" algn="l" rtl="0">
+              <a:lnSpc>
+                <a:spcPct val="100000"/>
+              </a:lnSpc>
+              <a:spcBef>
+                <a:spcPts val="0"/>
+              </a:spcBef>
+              <a:spcAft>
+                <a:spcPts val="0"/>
+              </a:spcAft>
+              <a:buClr>
+                <a:srgbClr val="000000"/>
+              </a:buClr>
+              <a:buSzPts val="1400"/>
+              <a:buFont typeface="Arial"/>
+              <a:buNone/>
+              <a:defRPr sz="3150" b="1" i="0" u="none" strike="noStrike" cap="none">
+                <a:solidFill>
+                  <a:schemeClr val="lt1"/>
+                </a:solidFill>
+                <a:latin typeface="Times New Roman"/>
+                <a:ea typeface="Times New Roman"/>
+                <a:cs typeface="Times New Roman"/>
+                <a:sym typeface="Times New Roman"/>
+              </a:defRPr>
+            </a:lvl1pPr>
+            <a:lvl2pPr marR="0" lvl="1" algn="l" rtl="0">
+              <a:lnSpc>
+                <a:spcPct val="100000"/>
+              </a:lnSpc>
+              <a:spcBef>
+                <a:spcPts val="0"/>
+              </a:spcBef>
+              <a:spcAft>
+                <a:spcPts val="0"/>
+              </a:spcAft>
+              <a:buClr>
+                <a:srgbClr val="000000"/>
+              </a:buClr>
+              <a:buSzPts val="1400"/>
+              <a:buFont typeface="Arial"/>
+              <a:buNone/>
+              <a:defRPr sz="1800" b="0" i="0" u="none" strike="noStrike" cap="none">
+                <a:solidFill>
+                  <a:srgbClr val="000000"/>
+                </a:solidFill>
+                <a:latin typeface="Arial"/>
+                <a:ea typeface="Arial"/>
+                <a:cs typeface="Arial"/>
+                <a:sym typeface="Arial"/>
+              </a:defRPr>
+            </a:lvl2pPr>
+            <a:lvl3pPr marR="0" lvl="2" algn="l" rtl="0">
+              <a:lnSpc>
+                <a:spcPct val="100000"/>
+              </a:lnSpc>
+              <a:spcBef>
+                <a:spcPts val="0"/>
+              </a:spcBef>
+              <a:spcAft>
+                <a:spcPts val="0"/>
+              </a:spcAft>
+              <a:buClr>
+                <a:srgbClr val="000000"/>
+              </a:buClr>
+              <a:buSzPts val="1400"/>
+              <a:buFont typeface="Arial"/>
+              <a:buNone/>
+              <a:defRPr sz="1800" b="0" i="0" u="none" strike="noStrike" cap="none">
+                <a:solidFill>
+                  <a:srgbClr val="000000"/>
+                </a:solidFill>
+                <a:latin typeface="Arial"/>
+                <a:ea typeface="Arial"/>
+                <a:cs typeface="Arial"/>
+                <a:sym typeface="Arial"/>
+              </a:defRPr>
+            </a:lvl3pPr>
+            <a:lvl4pPr marR="0" lvl="3" algn="l" rtl="0">
+              <a:lnSpc>
+                <a:spcPct val="100000"/>
+              </a:lnSpc>
+              <a:spcBef>
+                <a:spcPts val="0"/>
+              </a:spcBef>
+              <a:spcAft>
+                <a:spcPts val="0"/>
+              </a:spcAft>
+              <a:buClr>
+                <a:srgbClr val="000000"/>
+              </a:buClr>
+              <a:buSzPts val="1400"/>
+              <a:buFont typeface="Arial"/>
+              <a:buNone/>
+              <a:defRPr sz="1800" b="0" i="0" u="none" strike="noStrike" cap="none">
+                <a:solidFill>
+                  <a:srgbClr val="000000"/>
+                </a:solidFill>
+                <a:latin typeface="Arial"/>
+                <a:ea typeface="Arial"/>
+                <a:cs typeface="Arial"/>
+                <a:sym typeface="Arial"/>
+              </a:defRPr>
+            </a:lvl4pPr>
+            <a:lvl5pPr marR="0" lvl="4" algn="l" rtl="0">
+              <a:lnSpc>
+                <a:spcPct val="100000"/>
+              </a:lnSpc>
+              <a:spcBef>
+                <a:spcPts val="0"/>
+              </a:spcBef>
+              <a:spcAft>
+                <a:spcPts val="0"/>
+              </a:spcAft>
+              <a:buClr>
+                <a:srgbClr val="000000"/>
+              </a:buClr>
+              <a:buSzPts val="1400"/>
+              <a:buFont typeface="Arial"/>
+              <a:buNone/>
+              <a:defRPr sz="1800" b="0" i="0" u="none" strike="noStrike" cap="none">
+                <a:solidFill>
+                  <a:srgbClr val="000000"/>
+                </a:solidFill>
+                <a:latin typeface="Arial"/>
+                <a:ea typeface="Arial"/>
+                <a:cs typeface="Arial"/>
+                <a:sym typeface="Arial"/>
+              </a:defRPr>
+            </a:lvl5pPr>
+            <a:lvl6pPr marR="0" lvl="5" algn="l" rtl="0">
+              <a:lnSpc>
+                <a:spcPct val="100000"/>
+              </a:lnSpc>
+              <a:spcBef>
+                <a:spcPts val="0"/>
+              </a:spcBef>
+              <a:spcAft>
+                <a:spcPts val="0"/>
+              </a:spcAft>
+              <a:buClr>
+                <a:srgbClr val="000000"/>
+              </a:buClr>
+              <a:buSzPts val="1400"/>
+              <a:buFont typeface="Arial"/>
+              <a:buNone/>
+              <a:defRPr sz="1800" b="0" i="0" u="none" strike="noStrike" cap="none">
+                <a:solidFill>
+                  <a:srgbClr val="000000"/>
+                </a:solidFill>
+                <a:latin typeface="Arial"/>
+                <a:ea typeface="Arial"/>
+                <a:cs typeface="Arial"/>
+                <a:sym typeface="Arial"/>
+              </a:defRPr>
+            </a:lvl6pPr>
+            <a:lvl7pPr marR="0" lvl="6" algn="l" rtl="0">
+              <a:lnSpc>
+                <a:spcPct val="100000"/>
+              </a:lnSpc>
+              <a:spcBef>
+                <a:spcPts val="0"/>
+              </a:spcBef>
+              <a:spcAft>
+                <a:spcPts val="0"/>
+              </a:spcAft>
+              <a:buClr>
+                <a:srgbClr val="000000"/>
+              </a:buClr>
+              <a:buSzPts val="1400"/>
+              <a:buFont typeface="Arial"/>
+              <a:buNone/>
+              <a:defRPr sz="1800" b="0" i="0" u="none" strike="noStrike" cap="none">
+                <a:solidFill>
+                  <a:srgbClr val="000000"/>
+                </a:solidFill>
+                <a:latin typeface="Arial"/>
+                <a:ea typeface="Arial"/>
+                <a:cs typeface="Arial"/>
+                <a:sym typeface="Arial"/>
+              </a:defRPr>
+            </a:lvl7pPr>
+            <a:lvl8pPr marR="0" lvl="7" algn="l" rtl="0">
+              <a:lnSpc>
+                <a:spcPct val="100000"/>
+              </a:lnSpc>
+              <a:spcBef>
+                <a:spcPts val="0"/>
+              </a:spcBef>
+              <a:spcAft>
+                <a:spcPts val="0"/>
+              </a:spcAft>
+              <a:buClr>
+                <a:srgbClr val="000000"/>
+              </a:buClr>
+              <a:buSzPts val="1400"/>
+              <a:buFont typeface="Arial"/>
+              <a:buNone/>
+              <a:defRPr sz="1800" b="0" i="0" u="none" strike="noStrike" cap="none">
+                <a:solidFill>
+                  <a:srgbClr val="000000"/>
+                </a:solidFill>
+                <a:latin typeface="Arial"/>
+                <a:ea typeface="Arial"/>
+                <a:cs typeface="Arial"/>
+                <a:sym typeface="Arial"/>
+              </a:defRPr>
+            </a:lvl8pPr>
+            <a:lvl9pPr marR="0" lvl="8" algn="l" rtl="0">
+              <a:lnSpc>
+                <a:spcPct val="100000"/>
+              </a:lnSpc>
+              <a:spcBef>
+                <a:spcPts val="0"/>
+              </a:spcBef>
+              <a:spcAft>
+                <a:spcPts val="0"/>
+              </a:spcAft>
+              <a:buClr>
+                <a:srgbClr val="000000"/>
+              </a:buClr>
+              <a:buSzPts val="1400"/>
+              <a:buFont typeface="Arial"/>
+              <a:buNone/>
+              <a:defRPr sz="1800" b="0" i="0" u="none" strike="noStrike" cap="none">
+                <a:solidFill>
+                  <a:srgbClr val="000000"/>
+                </a:solidFill>
+                <a:latin typeface="Arial"/>
+                <a:ea typeface="Arial"/>
+                <a:cs typeface="Arial"/>
+                <a:sym typeface="Arial"/>
+              </a:defRPr>
+            </a:lvl9pPr>
+          </a:lstStyle>
+          <a:p>
+            <a:r>
+              <a:rPr lang="es-MX" sz="2800" dirty="0">
+                <a:solidFill>
+                  <a:schemeClr val="bg1"/>
+                </a:solidFill>
+                <a:latin typeface="TimesNewRomanPS-BoldMT"/>
+              </a:rPr>
+              <a:t>Operacionalización de variables</a:t>
+            </a:r>
+          </a:p>
+        </p:txBody>
+      </p:sp>
+      <p:pic>
+        <p:nvPicPr>
+          <p:cNvPr id="2" name="Imagen 1">
+            <a:extLst>
+              <a:ext uri="{FF2B5EF4-FFF2-40B4-BE49-F238E27FC236}">
+                <a16:creationId xmlns:a16="http://schemas.microsoft.com/office/drawing/2014/main" id="{10324C73-D760-236E-378B-1DAC06330B76}"/>
+              </a:ext>
+            </a:extLst>
+          </p:cNvPr>
+          <p:cNvPicPr>
+            <a:picLocks noChangeAspect="1"/>
+          </p:cNvPicPr>
+          <p:nvPr/>
+        </p:nvPicPr>
+        <p:blipFill>
+          <a:blip r:embed="rId2"/>
+          <a:stretch>
+            <a:fillRect/>
+          </a:stretch>
+        </p:blipFill>
+        <p:spPr>
+          <a:xfrm>
+            <a:off x="1689101" y="1568183"/>
+            <a:ext cx="6540499" cy="4188319"/>
+          </a:xfrm>
+          <a:prstGeom prst="rect">
+            <a:avLst/>
+          </a:prstGeom>
+        </p:spPr>
+      </p:pic>
+    </p:spTree>
+    <p:extLst>
+      <p:ext uri="{BB962C8B-B14F-4D97-AF65-F5344CB8AC3E}">
+        <p14:creationId xmlns:p14="http://schemas.microsoft.com/office/powerpoint/2010/main" val="1489367386"/>
+      </p:ext>
+    </p:extLst>
+  </p:cSld>
+  <p:clrMapOvr>
+    <a:masterClrMapping/>
+  </p:clrMapOvr>
+</p:sld>
+</file>
+
+<file path=ppt/slides/slide9.xml><?xml version="1.0" encoding="utf-8"?>
 <p:sld xmlns:a="http://schemas.openxmlformats.org/drawingml/2006/main" xmlns:r="http://schemas.openxmlformats.org/officeDocument/2006/relationships" xmlns:p="http://schemas.openxmlformats.org/presentationml/2006/main">
   <p:cSld>
     <p:spTree>
@@ -19694,2165 +22569,6 @@
 </p:sld>
 </file>
 
-<file path=ppt/slides/slide8.xml><?xml version="1.0" encoding="utf-8"?>
-<p:sld xmlns:a="http://schemas.openxmlformats.org/drawingml/2006/main" xmlns:r="http://schemas.openxmlformats.org/officeDocument/2006/relationships" xmlns:p="http://schemas.openxmlformats.org/presentationml/2006/main">
-  <p:cSld>
-    <p:spTree>
-      <p:nvGrpSpPr>
-        <p:cNvPr id="1" name="">
-          <a:extLst>
-            <a:ext uri="{FF2B5EF4-FFF2-40B4-BE49-F238E27FC236}">
-              <a16:creationId xmlns:a16="http://schemas.microsoft.com/office/drawing/2014/main" id="{58378244-2460-9143-8232-E1BBD43881DF}"/>
-            </a:ext>
-          </a:extLst>
-        </p:cNvPr>
-        <p:cNvGrpSpPr/>
-        <p:nvPr/>
-      </p:nvGrpSpPr>
-      <p:grpSpPr>
-        <a:xfrm>
-          <a:off x="0" y="0"/>
-          <a:ext cx="0" cy="0"/>
-          <a:chOff x="0" y="0"/>
-          <a:chExt cx="0" cy="0"/>
-        </a:xfrm>
-      </p:grpSpPr>
-      <p:sp>
-        <p:nvSpPr>
-          <p:cNvPr id="5" name="Google Shape;64;p8">
-            <a:extLst>
-              <a:ext uri="{FF2B5EF4-FFF2-40B4-BE49-F238E27FC236}">
-                <a16:creationId xmlns:a16="http://schemas.microsoft.com/office/drawing/2014/main" id="{59561CCD-A111-FC6F-5D51-E76EE83D6C67}"/>
-              </a:ext>
-            </a:extLst>
-          </p:cNvPr>
-          <p:cNvSpPr txBox="1">
-            <a:spLocks/>
-          </p:cNvSpPr>
-          <p:nvPr/>
-        </p:nvSpPr>
-        <p:spPr>
-          <a:xfrm>
-            <a:off x="4365444" y="838437"/>
-            <a:ext cx="5061312" cy="444342"/>
-          </a:xfrm>
-          <a:prstGeom prst="rect">
-            <a:avLst/>
-          </a:prstGeom>
-          <a:noFill/>
-          <a:ln>
-            <a:noFill/>
-          </a:ln>
-        </p:spPr>
-        <p:txBody>
-          <a:bodyPr spcFirstLastPara="1" wrap="square" lIns="0" tIns="13325" rIns="0" bIns="0" anchor="t" anchorCtr="0">
-            <a:spAutoFit/>
-          </a:bodyPr>
-          <a:lstStyle>
-            <a:defPPr marR="0" lvl="0" algn="l" rtl="0">
-              <a:lnSpc>
-                <a:spcPct val="100000"/>
-              </a:lnSpc>
-              <a:spcBef>
-                <a:spcPts val="0"/>
-              </a:spcBef>
-              <a:spcAft>
-                <a:spcPts val="0"/>
-              </a:spcAft>
-            </a:defPPr>
-            <a:lvl1pPr marR="0" lvl="0" algn="l" rtl="0">
-              <a:lnSpc>
-                <a:spcPct val="100000"/>
-              </a:lnSpc>
-              <a:spcBef>
-                <a:spcPts val="0"/>
-              </a:spcBef>
-              <a:spcAft>
-                <a:spcPts val="0"/>
-              </a:spcAft>
-              <a:buClr>
-                <a:srgbClr val="000000"/>
-              </a:buClr>
-              <a:buSzPts val="1400"/>
-              <a:buFont typeface="Arial"/>
-              <a:buNone/>
-              <a:defRPr sz="3150" b="1" i="0" u="none" strike="noStrike" cap="none">
-                <a:solidFill>
-                  <a:schemeClr val="lt1"/>
-                </a:solidFill>
-                <a:latin typeface="Times New Roman"/>
-                <a:ea typeface="Times New Roman"/>
-                <a:cs typeface="Times New Roman"/>
-                <a:sym typeface="Times New Roman"/>
-              </a:defRPr>
-            </a:lvl1pPr>
-            <a:lvl2pPr marR="0" lvl="1" algn="l" rtl="0">
-              <a:lnSpc>
-                <a:spcPct val="100000"/>
-              </a:lnSpc>
-              <a:spcBef>
-                <a:spcPts val="0"/>
-              </a:spcBef>
-              <a:spcAft>
-                <a:spcPts val="0"/>
-              </a:spcAft>
-              <a:buClr>
-                <a:srgbClr val="000000"/>
-              </a:buClr>
-              <a:buSzPts val="1400"/>
-              <a:buFont typeface="Arial"/>
-              <a:buNone/>
-              <a:defRPr sz="1800" b="0" i="0" u="none" strike="noStrike" cap="none">
-                <a:solidFill>
-                  <a:srgbClr val="000000"/>
-                </a:solidFill>
-                <a:latin typeface="Arial"/>
-                <a:ea typeface="Arial"/>
-                <a:cs typeface="Arial"/>
-                <a:sym typeface="Arial"/>
-              </a:defRPr>
-            </a:lvl2pPr>
-            <a:lvl3pPr marR="0" lvl="2" algn="l" rtl="0">
-              <a:lnSpc>
-                <a:spcPct val="100000"/>
-              </a:lnSpc>
-              <a:spcBef>
-                <a:spcPts val="0"/>
-              </a:spcBef>
-              <a:spcAft>
-                <a:spcPts val="0"/>
-              </a:spcAft>
-              <a:buClr>
-                <a:srgbClr val="000000"/>
-              </a:buClr>
-              <a:buSzPts val="1400"/>
-              <a:buFont typeface="Arial"/>
-              <a:buNone/>
-              <a:defRPr sz="1800" b="0" i="0" u="none" strike="noStrike" cap="none">
-                <a:solidFill>
-                  <a:srgbClr val="000000"/>
-                </a:solidFill>
-                <a:latin typeface="Arial"/>
-                <a:ea typeface="Arial"/>
-                <a:cs typeface="Arial"/>
-                <a:sym typeface="Arial"/>
-              </a:defRPr>
-            </a:lvl3pPr>
-            <a:lvl4pPr marR="0" lvl="3" algn="l" rtl="0">
-              <a:lnSpc>
-                <a:spcPct val="100000"/>
-              </a:lnSpc>
-              <a:spcBef>
-                <a:spcPts val="0"/>
-              </a:spcBef>
-              <a:spcAft>
-                <a:spcPts val="0"/>
-              </a:spcAft>
-              <a:buClr>
-                <a:srgbClr val="000000"/>
-              </a:buClr>
-              <a:buSzPts val="1400"/>
-              <a:buFont typeface="Arial"/>
-              <a:buNone/>
-              <a:defRPr sz="1800" b="0" i="0" u="none" strike="noStrike" cap="none">
-                <a:solidFill>
-                  <a:srgbClr val="000000"/>
-                </a:solidFill>
-                <a:latin typeface="Arial"/>
-                <a:ea typeface="Arial"/>
-                <a:cs typeface="Arial"/>
-                <a:sym typeface="Arial"/>
-              </a:defRPr>
-            </a:lvl4pPr>
-            <a:lvl5pPr marR="0" lvl="4" algn="l" rtl="0">
-              <a:lnSpc>
-                <a:spcPct val="100000"/>
-              </a:lnSpc>
-              <a:spcBef>
-                <a:spcPts val="0"/>
-              </a:spcBef>
-              <a:spcAft>
-                <a:spcPts val="0"/>
-              </a:spcAft>
-              <a:buClr>
-                <a:srgbClr val="000000"/>
-              </a:buClr>
-              <a:buSzPts val="1400"/>
-              <a:buFont typeface="Arial"/>
-              <a:buNone/>
-              <a:defRPr sz="1800" b="0" i="0" u="none" strike="noStrike" cap="none">
-                <a:solidFill>
-                  <a:srgbClr val="000000"/>
-                </a:solidFill>
-                <a:latin typeface="Arial"/>
-                <a:ea typeface="Arial"/>
-                <a:cs typeface="Arial"/>
-                <a:sym typeface="Arial"/>
-              </a:defRPr>
-            </a:lvl5pPr>
-            <a:lvl6pPr marR="0" lvl="5" algn="l" rtl="0">
-              <a:lnSpc>
-                <a:spcPct val="100000"/>
-              </a:lnSpc>
-              <a:spcBef>
-                <a:spcPts val="0"/>
-              </a:spcBef>
-              <a:spcAft>
-                <a:spcPts val="0"/>
-              </a:spcAft>
-              <a:buClr>
-                <a:srgbClr val="000000"/>
-              </a:buClr>
-              <a:buSzPts val="1400"/>
-              <a:buFont typeface="Arial"/>
-              <a:buNone/>
-              <a:defRPr sz="1800" b="0" i="0" u="none" strike="noStrike" cap="none">
-                <a:solidFill>
-                  <a:srgbClr val="000000"/>
-                </a:solidFill>
-                <a:latin typeface="Arial"/>
-                <a:ea typeface="Arial"/>
-                <a:cs typeface="Arial"/>
-                <a:sym typeface="Arial"/>
-              </a:defRPr>
-            </a:lvl6pPr>
-            <a:lvl7pPr marR="0" lvl="6" algn="l" rtl="0">
-              <a:lnSpc>
-                <a:spcPct val="100000"/>
-              </a:lnSpc>
-              <a:spcBef>
-                <a:spcPts val="0"/>
-              </a:spcBef>
-              <a:spcAft>
-                <a:spcPts val="0"/>
-              </a:spcAft>
-              <a:buClr>
-                <a:srgbClr val="000000"/>
-              </a:buClr>
-              <a:buSzPts val="1400"/>
-              <a:buFont typeface="Arial"/>
-              <a:buNone/>
-              <a:defRPr sz="1800" b="0" i="0" u="none" strike="noStrike" cap="none">
-                <a:solidFill>
-                  <a:srgbClr val="000000"/>
-                </a:solidFill>
-                <a:latin typeface="Arial"/>
-                <a:ea typeface="Arial"/>
-                <a:cs typeface="Arial"/>
-                <a:sym typeface="Arial"/>
-              </a:defRPr>
-            </a:lvl7pPr>
-            <a:lvl8pPr marR="0" lvl="7" algn="l" rtl="0">
-              <a:lnSpc>
-                <a:spcPct val="100000"/>
-              </a:lnSpc>
-              <a:spcBef>
-                <a:spcPts val="0"/>
-              </a:spcBef>
-              <a:spcAft>
-                <a:spcPts val="0"/>
-              </a:spcAft>
-              <a:buClr>
-                <a:srgbClr val="000000"/>
-              </a:buClr>
-              <a:buSzPts val="1400"/>
-              <a:buFont typeface="Arial"/>
-              <a:buNone/>
-              <a:defRPr sz="1800" b="0" i="0" u="none" strike="noStrike" cap="none">
-                <a:solidFill>
-                  <a:srgbClr val="000000"/>
-                </a:solidFill>
-                <a:latin typeface="Arial"/>
-                <a:ea typeface="Arial"/>
-                <a:cs typeface="Arial"/>
-                <a:sym typeface="Arial"/>
-              </a:defRPr>
-            </a:lvl8pPr>
-            <a:lvl9pPr marR="0" lvl="8" algn="l" rtl="0">
-              <a:lnSpc>
-                <a:spcPct val="100000"/>
-              </a:lnSpc>
-              <a:spcBef>
-                <a:spcPts val="0"/>
-              </a:spcBef>
-              <a:spcAft>
-                <a:spcPts val="0"/>
-              </a:spcAft>
-              <a:buClr>
-                <a:srgbClr val="000000"/>
-              </a:buClr>
-              <a:buSzPts val="1400"/>
-              <a:buFont typeface="Arial"/>
-              <a:buNone/>
-              <a:defRPr sz="1800" b="0" i="0" u="none" strike="noStrike" cap="none">
-                <a:solidFill>
-                  <a:srgbClr val="000000"/>
-                </a:solidFill>
-                <a:latin typeface="Arial"/>
-                <a:ea typeface="Arial"/>
-                <a:cs typeface="Arial"/>
-                <a:sym typeface="Arial"/>
-              </a:defRPr>
-            </a:lvl9pPr>
-          </a:lstStyle>
-          <a:p>
-            <a:r>
-              <a:rPr lang="es-MX" sz="2800" dirty="0">
-                <a:solidFill>
-                  <a:schemeClr val="bg1"/>
-                </a:solidFill>
-                <a:latin typeface="TimesNewRomanPS-BoldMT"/>
-              </a:rPr>
-              <a:t>Métodos propuestos</a:t>
-            </a:r>
-          </a:p>
-        </p:txBody>
-      </p:sp>
-      <p:graphicFrame>
-        <p:nvGraphicFramePr>
-          <p:cNvPr id="10" name="Tabla 9">
-            <a:extLst>
-              <a:ext uri="{FF2B5EF4-FFF2-40B4-BE49-F238E27FC236}">
-                <a16:creationId xmlns:a16="http://schemas.microsoft.com/office/drawing/2014/main" id="{88DCA0B4-4A51-BC2B-7A76-DF427EF734DB}"/>
-              </a:ext>
-            </a:extLst>
-          </p:cNvPr>
-          <p:cNvGraphicFramePr>
-            <a:graphicFrameLocks noGrp="1"/>
-          </p:cNvGraphicFramePr>
-          <p:nvPr>
-            <p:extLst>
-              <p:ext uri="{D42A27DB-BD31-4B8C-83A1-F6EECF244321}">
-                <p14:modId xmlns:p14="http://schemas.microsoft.com/office/powerpoint/2010/main" val="2506482992"/>
-              </p:ext>
-            </p:extLst>
-          </p:nvPr>
-        </p:nvGraphicFramePr>
-        <p:xfrm>
-          <a:off x="518160" y="2274513"/>
-          <a:ext cx="9657080" cy="3013824"/>
-        </p:xfrm>
-        <a:graphic>
-          <a:graphicData uri="http://schemas.openxmlformats.org/drawingml/2006/table">
-            <a:tbl>
-              <a:tblPr firstRow="1" bandRow="1">
-                <a:tableStyleId>{5202B0CA-FC54-4496-8BCA-5EF66A818D29}</a:tableStyleId>
-              </a:tblPr>
-              <a:tblGrid>
-                <a:gridCol w="2472268">
-                  <a:extLst>
-                    <a:ext uri="{9D8B030D-6E8A-4147-A177-3AD203B41FA5}">
-                      <a16:colId xmlns:a16="http://schemas.microsoft.com/office/drawing/2014/main" val="521138003"/>
-                    </a:ext>
-                  </a:extLst>
-                </a:gridCol>
-                <a:gridCol w="7184812">
-                  <a:extLst>
-                    <a:ext uri="{9D8B030D-6E8A-4147-A177-3AD203B41FA5}">
-                      <a16:colId xmlns:a16="http://schemas.microsoft.com/office/drawing/2014/main" val="1720936488"/>
-                    </a:ext>
-                  </a:extLst>
-                </a:gridCol>
-              </a:tblGrid>
-              <a:tr h="528931">
-                <a:tc>
-                  <a:txBody>
-                    <a:bodyPr/>
-                    <a:lstStyle/>
-                    <a:p>
-                      <a:pPr algn="ctr"/>
-                      <a:r>
-                        <a:rPr lang="es-PE" sz="2000" dirty="0">
-                          <a:latin typeface="Times New Roman" panose="02020603050405020304" pitchFamily="18" charset="0"/>
-                          <a:cs typeface="Times New Roman" panose="02020603050405020304" pitchFamily="18" charset="0"/>
-                        </a:rPr>
-                        <a:t>Actividad </a:t>
-                      </a:r>
-                    </a:p>
-                  </a:txBody>
-                  <a:tcPr/>
-                </a:tc>
-                <a:tc>
-                  <a:txBody>
-                    <a:bodyPr/>
-                    <a:lstStyle/>
-                    <a:p>
-                      <a:pPr algn="ctr"/>
-                      <a:r>
-                        <a:rPr lang="es-PE" sz="2000" dirty="0">
-                          <a:latin typeface="Times New Roman" panose="02020603050405020304" pitchFamily="18" charset="0"/>
-                          <a:cs typeface="Times New Roman" panose="02020603050405020304" pitchFamily="18" charset="0"/>
-                        </a:rPr>
-                        <a:t>Descripción</a:t>
-                      </a:r>
-                    </a:p>
-                  </a:txBody>
-                  <a:tcPr/>
-                </a:tc>
-                <a:extLst>
-                  <a:ext uri="{0D108BD9-81ED-4DB2-BD59-A6C34878D82A}">
-                    <a16:rowId xmlns:a16="http://schemas.microsoft.com/office/drawing/2014/main" val="2925334713"/>
-                  </a:ext>
-                </a:extLst>
-              </a:tr>
-              <a:tr h="831543">
-                <a:tc>
-                  <a:txBody>
-                    <a:bodyPr/>
-                    <a:lstStyle/>
-                    <a:p>
-                      <a:pPr marR="0" algn="l" rtl="0">
-                        <a:lnSpc>
-                          <a:spcPct val="100000"/>
-                        </a:lnSpc>
-                        <a:spcBef>
-                          <a:spcPts val="0"/>
-                        </a:spcBef>
-                        <a:spcAft>
-                          <a:spcPts val="0"/>
-                        </a:spcAft>
-                        <a:buClr>
-                          <a:srgbClr val="000000"/>
-                        </a:buClr>
-                        <a:buFont typeface="Arial"/>
-                      </a:pPr>
-                      <a:r>
-                        <a:rPr lang="es-PE" sz="1800" b="1" i="0" u="none" strike="noStrike" cap="none" dirty="0">
-                          <a:solidFill>
-                            <a:schemeClr val="dk1"/>
-                          </a:solidFill>
-                          <a:effectLst/>
-                          <a:latin typeface="Times New Roman" panose="02020603050405020304" pitchFamily="18" charset="0"/>
-                          <a:ea typeface="+mn-ea"/>
-                          <a:cs typeface="Times New Roman" panose="02020603050405020304" pitchFamily="18" charset="0"/>
-                          <a:sym typeface="Arial"/>
-                        </a:rPr>
-                        <a:t>Evaluación de patogenicidad</a:t>
-                      </a:r>
-                    </a:p>
-                  </a:txBody>
-                  <a:tcPr/>
-                </a:tc>
-                <a:tc>
-                  <a:txBody>
-                    <a:bodyPr/>
-                    <a:lstStyle/>
-                    <a:p>
-                      <a:pPr algn="just">
-                        <a:lnSpc>
-                          <a:spcPct val="150000"/>
-                        </a:lnSpc>
-                      </a:pPr>
-                      <a:r>
-                        <a:rPr lang="es-MX" sz="1400" b="0" i="0" u="none" strike="noStrike" cap="none" dirty="0">
-                          <a:solidFill>
-                            <a:schemeClr val="dk1"/>
-                          </a:solidFill>
-                          <a:effectLst/>
-                          <a:latin typeface="Times New Roman" panose="02020603050405020304" pitchFamily="18" charset="0"/>
-                          <a:ea typeface="+mn-ea"/>
-                          <a:cs typeface="Times New Roman" panose="02020603050405020304" pitchFamily="18" charset="0"/>
-                          <a:sym typeface="Arial"/>
-                        </a:rPr>
-                        <a:t>10 adultos de </a:t>
-                      </a:r>
-                      <a:r>
-                        <a:rPr lang="es-MX" sz="1400" b="0" i="1" u="none" strike="noStrike" cap="none" dirty="0">
-                          <a:solidFill>
-                            <a:schemeClr val="dk1"/>
-                          </a:solidFill>
-                          <a:effectLst/>
-                          <a:latin typeface="Times New Roman" panose="02020603050405020304" pitchFamily="18" charset="0"/>
-                          <a:ea typeface="+mn-ea"/>
-                          <a:cs typeface="Times New Roman" panose="02020603050405020304" pitchFamily="18" charset="0"/>
-                          <a:sym typeface="Arial"/>
-                        </a:rPr>
-                        <a:t>M</a:t>
-                      </a:r>
-                      <a:r>
-                        <a:rPr lang="es-MX" sz="1400" b="0" i="0" u="none" strike="noStrike" cap="none" dirty="0">
-                          <a:solidFill>
-                            <a:schemeClr val="dk1"/>
-                          </a:solidFill>
-                          <a:effectLst/>
-                          <a:latin typeface="Times New Roman" panose="02020603050405020304" pitchFamily="18" charset="0"/>
-                          <a:ea typeface="+mn-ea"/>
-                          <a:cs typeface="Times New Roman" panose="02020603050405020304" pitchFamily="18" charset="0"/>
-                          <a:sym typeface="Arial"/>
-                        </a:rPr>
-                        <a:t>. </a:t>
-                      </a:r>
-                      <a:r>
-                        <a:rPr lang="es-MX" sz="1400" b="0" i="1" u="none" strike="noStrike" cap="none" dirty="0" err="1">
-                          <a:solidFill>
-                            <a:schemeClr val="dk1"/>
-                          </a:solidFill>
-                          <a:effectLst/>
-                          <a:latin typeface="Times New Roman" panose="02020603050405020304" pitchFamily="18" charset="0"/>
-                          <a:ea typeface="+mn-ea"/>
-                          <a:cs typeface="Times New Roman" panose="02020603050405020304" pitchFamily="18" charset="0"/>
-                          <a:sym typeface="Arial"/>
-                        </a:rPr>
-                        <a:t>hemipterus</a:t>
-                      </a:r>
-                      <a:r>
-                        <a:rPr lang="es-MX" sz="1400" b="0" i="0" u="none" strike="noStrike" cap="none" dirty="0">
-                          <a:solidFill>
-                            <a:schemeClr val="dk1"/>
-                          </a:solidFill>
-                          <a:effectLst/>
-                          <a:latin typeface="Times New Roman" panose="02020603050405020304" pitchFamily="18" charset="0"/>
-                          <a:ea typeface="+mn-ea"/>
-                          <a:cs typeface="Times New Roman" panose="02020603050405020304" pitchFamily="18" charset="0"/>
-                          <a:sym typeface="Arial"/>
-                        </a:rPr>
-                        <a:t> serán sumergidos durante un minuto en una suspensión conidial de de 1 x 10⁷ conidios por mililitro, complementada con </a:t>
-                      </a:r>
-                      <a:r>
-                        <a:rPr lang="es-MX" sz="1400" b="0" i="0" u="none" strike="noStrike" cap="none" dirty="0" err="1">
-                          <a:solidFill>
-                            <a:schemeClr val="dk1"/>
-                          </a:solidFill>
-                          <a:effectLst/>
-                          <a:latin typeface="Times New Roman" panose="02020603050405020304" pitchFamily="18" charset="0"/>
-                          <a:ea typeface="+mn-ea"/>
-                          <a:cs typeface="Times New Roman" panose="02020603050405020304" pitchFamily="18" charset="0"/>
-                          <a:sym typeface="Arial"/>
-                        </a:rPr>
-                        <a:t>Tween</a:t>
-                      </a:r>
-                      <a:r>
-                        <a:rPr lang="es-MX" sz="1400" b="0" i="0" u="none" strike="noStrike" cap="none" dirty="0">
-                          <a:solidFill>
-                            <a:schemeClr val="dk1"/>
-                          </a:solidFill>
-                          <a:effectLst/>
-                          <a:latin typeface="Times New Roman" panose="02020603050405020304" pitchFamily="18" charset="0"/>
-                          <a:ea typeface="+mn-ea"/>
-                          <a:cs typeface="Times New Roman" panose="02020603050405020304" pitchFamily="18" charset="0"/>
-                          <a:sym typeface="Arial"/>
-                        </a:rPr>
-                        <a:t> 80 al 0,1 %. </a:t>
-                      </a:r>
-                      <a:endParaRPr lang="es-PE" sz="1400" b="0" i="0" u="none" strike="noStrike" cap="none" dirty="0">
-                        <a:solidFill>
-                          <a:schemeClr val="dk1"/>
-                        </a:solidFill>
-                        <a:effectLst/>
-                        <a:latin typeface="Times New Roman" panose="02020603050405020304" pitchFamily="18" charset="0"/>
-                        <a:ea typeface="+mn-ea"/>
-                        <a:cs typeface="Times New Roman" panose="02020603050405020304" pitchFamily="18" charset="0"/>
-                        <a:sym typeface="Arial"/>
-                      </a:endParaRPr>
-                    </a:p>
-                  </a:txBody>
-                  <a:tcPr/>
-                </a:tc>
-                <a:extLst>
-                  <a:ext uri="{0D108BD9-81ED-4DB2-BD59-A6C34878D82A}">
-                    <a16:rowId xmlns:a16="http://schemas.microsoft.com/office/drawing/2014/main" val="217625775"/>
-                  </a:ext>
-                </a:extLst>
-              </a:tr>
-              <a:tr h="1194334">
-                <a:tc>
-                  <a:txBody>
-                    <a:bodyPr/>
-                    <a:lstStyle/>
-                    <a:p>
-                      <a:pPr marR="0" algn="l" rtl="0">
-                        <a:lnSpc>
-                          <a:spcPct val="100000"/>
-                        </a:lnSpc>
-                        <a:spcBef>
-                          <a:spcPts val="0"/>
-                        </a:spcBef>
-                        <a:spcAft>
-                          <a:spcPts val="0"/>
-                        </a:spcAft>
-                        <a:buClr>
-                          <a:srgbClr val="000000"/>
-                        </a:buClr>
-                        <a:buFont typeface="Arial"/>
-                      </a:pPr>
-                      <a:r>
-                        <a:rPr lang="es-MX" sz="1800" b="1" i="0" u="none" strike="noStrike" cap="none" dirty="0">
-                          <a:solidFill>
-                            <a:schemeClr val="dk1"/>
-                          </a:solidFill>
-                          <a:effectLst/>
-                          <a:latin typeface="Times New Roman" panose="02020603050405020304" pitchFamily="18" charset="0"/>
-                          <a:ea typeface="+mn-ea"/>
-                          <a:cs typeface="Times New Roman" panose="02020603050405020304" pitchFamily="18" charset="0"/>
-                          <a:sym typeface="Arial"/>
-                        </a:rPr>
-                        <a:t>Producción de conidios en arroz</a:t>
-                      </a:r>
-                      <a:endParaRPr lang="es-PE" sz="1800" b="1" i="0" u="none" strike="noStrike" cap="none" dirty="0">
-                        <a:solidFill>
-                          <a:schemeClr val="dk1"/>
-                        </a:solidFill>
-                        <a:effectLst/>
-                        <a:latin typeface="Times New Roman" panose="02020603050405020304" pitchFamily="18" charset="0"/>
-                        <a:ea typeface="+mn-ea"/>
-                        <a:cs typeface="Times New Roman" panose="02020603050405020304" pitchFamily="18" charset="0"/>
-                        <a:sym typeface="Arial"/>
-                      </a:endParaRPr>
-                    </a:p>
-                  </a:txBody>
-                  <a:tcPr/>
-                </a:tc>
-                <a:tc>
-                  <a:txBody>
-                    <a:bodyPr/>
-                    <a:lstStyle/>
-                    <a:p>
-                      <a:pPr algn="just">
-                        <a:lnSpc>
-                          <a:spcPct val="150000"/>
-                        </a:lnSpc>
-                      </a:pPr>
-                      <a:r>
-                        <a:rPr lang="es-MX" sz="1400" b="0" i="0" u="none" strike="noStrike" cap="none" dirty="0">
-                          <a:solidFill>
-                            <a:schemeClr val="dk1"/>
-                          </a:solidFill>
-                          <a:effectLst/>
-                          <a:latin typeface="Times New Roman" panose="02020603050405020304" pitchFamily="18" charset="0"/>
-                          <a:ea typeface="+mn-ea"/>
-                          <a:cs typeface="Times New Roman" panose="02020603050405020304" pitchFamily="18" charset="0"/>
-                          <a:sym typeface="Arial"/>
-                        </a:rPr>
-                        <a:t>Metodología utilizada por Torres et al. (2016), Se emplearán 50 gramos de arroz depositados en bolsas de </a:t>
-                      </a:r>
-                      <a:r>
-                        <a:rPr lang="es-MX" sz="1400" b="0" i="0" u="none" strike="noStrike" cap="none" dirty="0" err="1">
-                          <a:solidFill>
-                            <a:schemeClr val="dk1"/>
-                          </a:solidFill>
-                          <a:effectLst/>
-                          <a:latin typeface="Times New Roman" panose="02020603050405020304" pitchFamily="18" charset="0"/>
-                          <a:ea typeface="+mn-ea"/>
-                          <a:cs typeface="Times New Roman" panose="02020603050405020304" pitchFamily="18" charset="0"/>
-                          <a:sym typeface="Arial"/>
-                        </a:rPr>
-                        <a:t>polipapel</a:t>
-                      </a:r>
-                      <a:r>
-                        <a:rPr lang="es-MX" sz="1400" b="0" i="0" u="none" strike="noStrike" cap="none" dirty="0">
-                          <a:solidFill>
-                            <a:schemeClr val="dk1"/>
-                          </a:solidFill>
-                          <a:effectLst/>
-                          <a:latin typeface="Times New Roman" panose="02020603050405020304" pitchFamily="18" charset="0"/>
-                          <a:ea typeface="+mn-ea"/>
-                          <a:cs typeface="Times New Roman" panose="02020603050405020304" pitchFamily="18" charset="0"/>
-                          <a:sym typeface="Arial"/>
-                        </a:rPr>
-                        <a:t>, humedecidos con 12 mililitros de agua destilada, y esterilizados a 121 °C durante 20 minutos. Posterior, las bolsas serán inoculadas con 5 mililitros de suspensión con 1 x 10⁶ conidios por mililitro, e incubadas durante 15 días a una temperatura constante de 25 ± 1 °C y bajo un fotoperiodo de 12 horas luz y 12 horas oscuridad.</a:t>
-                      </a:r>
-                      <a:endParaRPr lang="es-PE" sz="1400" b="0" i="0" u="none" strike="noStrike" cap="none" dirty="0">
-                        <a:solidFill>
-                          <a:schemeClr val="dk1"/>
-                        </a:solidFill>
-                        <a:effectLst/>
-                        <a:latin typeface="Times New Roman" panose="02020603050405020304" pitchFamily="18" charset="0"/>
-                        <a:ea typeface="+mn-ea"/>
-                        <a:cs typeface="Times New Roman" panose="02020603050405020304" pitchFamily="18" charset="0"/>
-                        <a:sym typeface="Arial"/>
-                      </a:endParaRPr>
-                    </a:p>
-                  </a:txBody>
-                  <a:tcPr/>
-                </a:tc>
-                <a:extLst>
-                  <a:ext uri="{0D108BD9-81ED-4DB2-BD59-A6C34878D82A}">
-                    <a16:rowId xmlns:a16="http://schemas.microsoft.com/office/drawing/2014/main" val="469007191"/>
-                  </a:ext>
-                </a:extLst>
-              </a:tr>
-            </a:tbl>
-          </a:graphicData>
-        </a:graphic>
-      </p:graphicFrame>
-    </p:spTree>
-    <p:extLst>
-      <p:ext uri="{BB962C8B-B14F-4D97-AF65-F5344CB8AC3E}">
-        <p14:creationId xmlns:p14="http://schemas.microsoft.com/office/powerpoint/2010/main" val="3666577282"/>
-      </p:ext>
-    </p:extLst>
-  </p:cSld>
-  <p:clrMapOvr>
-    <a:masterClrMapping/>
-  </p:clrMapOvr>
-</p:sld>
-</file>
-
-<file path=ppt/slides/slide9.xml><?xml version="1.0" encoding="utf-8"?>
-<p:sld xmlns:a="http://schemas.openxmlformats.org/drawingml/2006/main" xmlns:r="http://schemas.openxmlformats.org/officeDocument/2006/relationships" xmlns:p="http://schemas.openxmlformats.org/presentationml/2006/main">
-  <p:cSld>
-    <p:spTree>
-      <p:nvGrpSpPr>
-        <p:cNvPr id="1" name="">
-          <a:extLst>
-            <a:ext uri="{FF2B5EF4-FFF2-40B4-BE49-F238E27FC236}">
-              <a16:creationId xmlns:a16="http://schemas.microsoft.com/office/drawing/2014/main" id="{0B26082B-809C-81BB-DAAF-E3D93385A7C1}"/>
-            </a:ext>
-          </a:extLst>
-        </p:cNvPr>
-        <p:cNvGrpSpPr/>
-        <p:nvPr/>
-      </p:nvGrpSpPr>
-      <p:grpSpPr>
-        <a:xfrm>
-          <a:off x="0" y="0"/>
-          <a:ext cx="0" cy="0"/>
-          <a:chOff x="0" y="0"/>
-          <a:chExt cx="0" cy="0"/>
-        </a:xfrm>
-      </p:grpSpPr>
-      <p:sp>
-        <p:nvSpPr>
-          <p:cNvPr id="5" name="Google Shape;64;p8">
-            <a:extLst>
-              <a:ext uri="{FF2B5EF4-FFF2-40B4-BE49-F238E27FC236}">
-                <a16:creationId xmlns:a16="http://schemas.microsoft.com/office/drawing/2014/main" id="{1A8782ED-6115-1971-8734-DF4047C69220}"/>
-              </a:ext>
-            </a:extLst>
-          </p:cNvPr>
-          <p:cNvSpPr txBox="1">
-            <a:spLocks/>
-          </p:cNvSpPr>
-          <p:nvPr/>
-        </p:nvSpPr>
-        <p:spPr>
-          <a:xfrm>
-            <a:off x="4365444" y="838437"/>
-            <a:ext cx="5061312" cy="444342"/>
-          </a:xfrm>
-          <a:prstGeom prst="rect">
-            <a:avLst/>
-          </a:prstGeom>
-          <a:noFill/>
-          <a:ln>
-            <a:noFill/>
-          </a:ln>
-        </p:spPr>
-        <p:txBody>
-          <a:bodyPr spcFirstLastPara="1" wrap="square" lIns="0" tIns="13325" rIns="0" bIns="0" anchor="t" anchorCtr="0">
-            <a:spAutoFit/>
-          </a:bodyPr>
-          <a:lstStyle>
-            <a:defPPr marR="0" lvl="0" algn="l" rtl="0">
-              <a:lnSpc>
-                <a:spcPct val="100000"/>
-              </a:lnSpc>
-              <a:spcBef>
-                <a:spcPts val="0"/>
-              </a:spcBef>
-              <a:spcAft>
-                <a:spcPts val="0"/>
-              </a:spcAft>
-            </a:defPPr>
-            <a:lvl1pPr marR="0" lvl="0" algn="l" rtl="0">
-              <a:lnSpc>
-                <a:spcPct val="100000"/>
-              </a:lnSpc>
-              <a:spcBef>
-                <a:spcPts val="0"/>
-              </a:spcBef>
-              <a:spcAft>
-                <a:spcPts val="0"/>
-              </a:spcAft>
-              <a:buClr>
-                <a:srgbClr val="000000"/>
-              </a:buClr>
-              <a:buSzPts val="1400"/>
-              <a:buFont typeface="Arial"/>
-              <a:buNone/>
-              <a:defRPr sz="3150" b="1" i="0" u="none" strike="noStrike" cap="none">
-                <a:solidFill>
-                  <a:schemeClr val="lt1"/>
-                </a:solidFill>
-                <a:latin typeface="Times New Roman"/>
-                <a:ea typeface="Times New Roman"/>
-                <a:cs typeface="Times New Roman"/>
-                <a:sym typeface="Times New Roman"/>
-              </a:defRPr>
-            </a:lvl1pPr>
-            <a:lvl2pPr marR="0" lvl="1" algn="l" rtl="0">
-              <a:lnSpc>
-                <a:spcPct val="100000"/>
-              </a:lnSpc>
-              <a:spcBef>
-                <a:spcPts val="0"/>
-              </a:spcBef>
-              <a:spcAft>
-                <a:spcPts val="0"/>
-              </a:spcAft>
-              <a:buClr>
-                <a:srgbClr val="000000"/>
-              </a:buClr>
-              <a:buSzPts val="1400"/>
-              <a:buFont typeface="Arial"/>
-              <a:buNone/>
-              <a:defRPr sz="1800" b="0" i="0" u="none" strike="noStrike" cap="none">
-                <a:solidFill>
-                  <a:srgbClr val="000000"/>
-                </a:solidFill>
-                <a:latin typeface="Arial"/>
-                <a:ea typeface="Arial"/>
-                <a:cs typeface="Arial"/>
-                <a:sym typeface="Arial"/>
-              </a:defRPr>
-            </a:lvl2pPr>
-            <a:lvl3pPr marR="0" lvl="2" algn="l" rtl="0">
-              <a:lnSpc>
-                <a:spcPct val="100000"/>
-              </a:lnSpc>
-              <a:spcBef>
-                <a:spcPts val="0"/>
-              </a:spcBef>
-              <a:spcAft>
-                <a:spcPts val="0"/>
-              </a:spcAft>
-              <a:buClr>
-                <a:srgbClr val="000000"/>
-              </a:buClr>
-              <a:buSzPts val="1400"/>
-              <a:buFont typeface="Arial"/>
-              <a:buNone/>
-              <a:defRPr sz="1800" b="0" i="0" u="none" strike="noStrike" cap="none">
-                <a:solidFill>
-                  <a:srgbClr val="000000"/>
-                </a:solidFill>
-                <a:latin typeface="Arial"/>
-                <a:ea typeface="Arial"/>
-                <a:cs typeface="Arial"/>
-                <a:sym typeface="Arial"/>
-              </a:defRPr>
-            </a:lvl3pPr>
-            <a:lvl4pPr marR="0" lvl="3" algn="l" rtl="0">
-              <a:lnSpc>
-                <a:spcPct val="100000"/>
-              </a:lnSpc>
-              <a:spcBef>
-                <a:spcPts val="0"/>
-              </a:spcBef>
-              <a:spcAft>
-                <a:spcPts val="0"/>
-              </a:spcAft>
-              <a:buClr>
-                <a:srgbClr val="000000"/>
-              </a:buClr>
-              <a:buSzPts val="1400"/>
-              <a:buFont typeface="Arial"/>
-              <a:buNone/>
-              <a:defRPr sz="1800" b="0" i="0" u="none" strike="noStrike" cap="none">
-                <a:solidFill>
-                  <a:srgbClr val="000000"/>
-                </a:solidFill>
-                <a:latin typeface="Arial"/>
-                <a:ea typeface="Arial"/>
-                <a:cs typeface="Arial"/>
-                <a:sym typeface="Arial"/>
-              </a:defRPr>
-            </a:lvl4pPr>
-            <a:lvl5pPr marR="0" lvl="4" algn="l" rtl="0">
-              <a:lnSpc>
-                <a:spcPct val="100000"/>
-              </a:lnSpc>
-              <a:spcBef>
-                <a:spcPts val="0"/>
-              </a:spcBef>
-              <a:spcAft>
-                <a:spcPts val="0"/>
-              </a:spcAft>
-              <a:buClr>
-                <a:srgbClr val="000000"/>
-              </a:buClr>
-              <a:buSzPts val="1400"/>
-              <a:buFont typeface="Arial"/>
-              <a:buNone/>
-              <a:defRPr sz="1800" b="0" i="0" u="none" strike="noStrike" cap="none">
-                <a:solidFill>
-                  <a:srgbClr val="000000"/>
-                </a:solidFill>
-                <a:latin typeface="Arial"/>
-                <a:ea typeface="Arial"/>
-                <a:cs typeface="Arial"/>
-                <a:sym typeface="Arial"/>
-              </a:defRPr>
-            </a:lvl5pPr>
-            <a:lvl6pPr marR="0" lvl="5" algn="l" rtl="0">
-              <a:lnSpc>
-                <a:spcPct val="100000"/>
-              </a:lnSpc>
-              <a:spcBef>
-                <a:spcPts val="0"/>
-              </a:spcBef>
-              <a:spcAft>
-                <a:spcPts val="0"/>
-              </a:spcAft>
-              <a:buClr>
-                <a:srgbClr val="000000"/>
-              </a:buClr>
-              <a:buSzPts val="1400"/>
-              <a:buFont typeface="Arial"/>
-              <a:buNone/>
-              <a:defRPr sz="1800" b="0" i="0" u="none" strike="noStrike" cap="none">
-                <a:solidFill>
-                  <a:srgbClr val="000000"/>
-                </a:solidFill>
-                <a:latin typeface="Arial"/>
-                <a:ea typeface="Arial"/>
-                <a:cs typeface="Arial"/>
-                <a:sym typeface="Arial"/>
-              </a:defRPr>
-            </a:lvl6pPr>
-            <a:lvl7pPr marR="0" lvl="6" algn="l" rtl="0">
-              <a:lnSpc>
-                <a:spcPct val="100000"/>
-              </a:lnSpc>
-              <a:spcBef>
-                <a:spcPts val="0"/>
-              </a:spcBef>
-              <a:spcAft>
-                <a:spcPts val="0"/>
-              </a:spcAft>
-              <a:buClr>
-                <a:srgbClr val="000000"/>
-              </a:buClr>
-              <a:buSzPts val="1400"/>
-              <a:buFont typeface="Arial"/>
-              <a:buNone/>
-              <a:defRPr sz="1800" b="0" i="0" u="none" strike="noStrike" cap="none">
-                <a:solidFill>
-                  <a:srgbClr val="000000"/>
-                </a:solidFill>
-                <a:latin typeface="Arial"/>
-                <a:ea typeface="Arial"/>
-                <a:cs typeface="Arial"/>
-                <a:sym typeface="Arial"/>
-              </a:defRPr>
-            </a:lvl7pPr>
-            <a:lvl8pPr marR="0" lvl="7" algn="l" rtl="0">
-              <a:lnSpc>
-                <a:spcPct val="100000"/>
-              </a:lnSpc>
-              <a:spcBef>
-                <a:spcPts val="0"/>
-              </a:spcBef>
-              <a:spcAft>
-                <a:spcPts val="0"/>
-              </a:spcAft>
-              <a:buClr>
-                <a:srgbClr val="000000"/>
-              </a:buClr>
-              <a:buSzPts val="1400"/>
-              <a:buFont typeface="Arial"/>
-              <a:buNone/>
-              <a:defRPr sz="1800" b="0" i="0" u="none" strike="noStrike" cap="none">
-                <a:solidFill>
-                  <a:srgbClr val="000000"/>
-                </a:solidFill>
-                <a:latin typeface="Arial"/>
-                <a:ea typeface="Arial"/>
-                <a:cs typeface="Arial"/>
-                <a:sym typeface="Arial"/>
-              </a:defRPr>
-            </a:lvl8pPr>
-            <a:lvl9pPr marR="0" lvl="8" algn="l" rtl="0">
-              <a:lnSpc>
-                <a:spcPct val="100000"/>
-              </a:lnSpc>
-              <a:spcBef>
-                <a:spcPts val="0"/>
-              </a:spcBef>
-              <a:spcAft>
-                <a:spcPts val="0"/>
-              </a:spcAft>
-              <a:buClr>
-                <a:srgbClr val="000000"/>
-              </a:buClr>
-              <a:buSzPts val="1400"/>
-              <a:buFont typeface="Arial"/>
-              <a:buNone/>
-              <a:defRPr sz="1800" b="0" i="0" u="none" strike="noStrike" cap="none">
-                <a:solidFill>
-                  <a:srgbClr val="000000"/>
-                </a:solidFill>
-                <a:latin typeface="Arial"/>
-                <a:ea typeface="Arial"/>
-                <a:cs typeface="Arial"/>
-                <a:sym typeface="Arial"/>
-              </a:defRPr>
-            </a:lvl9pPr>
-          </a:lstStyle>
-          <a:p>
-            <a:r>
-              <a:rPr lang="es-MX" sz="2800" dirty="0">
-                <a:solidFill>
-                  <a:schemeClr val="bg1"/>
-                </a:solidFill>
-                <a:latin typeface="TimesNewRomanPS-BoldMT"/>
-              </a:rPr>
-              <a:t>Referencias</a:t>
-            </a:r>
-          </a:p>
-        </p:txBody>
-      </p:sp>
-      <p:sp>
-        <p:nvSpPr>
-          <p:cNvPr id="2" name="CuadroTexto 1">
-            <a:extLst>
-              <a:ext uri="{FF2B5EF4-FFF2-40B4-BE49-F238E27FC236}">
-                <a16:creationId xmlns:a16="http://schemas.microsoft.com/office/drawing/2014/main" id="{FBFE8A56-7ABD-95F0-220D-966357247E6C}"/>
-              </a:ext>
-            </a:extLst>
-          </p:cNvPr>
-          <p:cNvSpPr txBox="1"/>
-          <p:nvPr/>
-        </p:nvSpPr>
-        <p:spPr>
-          <a:xfrm>
-            <a:off x="431800" y="1498600"/>
-            <a:ext cx="10160000" cy="5869364"/>
-          </a:xfrm>
-          <a:prstGeom prst="rect">
-            <a:avLst/>
-          </a:prstGeom>
-          <a:noFill/>
-        </p:spPr>
-        <p:txBody>
-          <a:bodyPr wrap="square" rtlCol="0">
-            <a:spAutoFit/>
-          </a:bodyPr>
-          <a:lstStyle/>
-          <a:p>
-            <a:pPr indent="-457200">
-              <a:lnSpc>
-                <a:spcPct val="150000"/>
-              </a:lnSpc>
-            </a:pPr>
-            <a:r>
-              <a:rPr lang="es-PE" dirty="0" err="1">
-                <a:latin typeface="Times New Roman" panose="02020603050405020304" pitchFamily="18" charset="0"/>
-                <a:cs typeface="Times New Roman" panose="02020603050405020304" pitchFamily="18" charset="0"/>
-              </a:rPr>
-              <a:t>Algarate</a:t>
-            </a:r>
-            <a:r>
-              <a:rPr lang="es-PE" dirty="0">
-                <a:latin typeface="Times New Roman" panose="02020603050405020304" pitchFamily="18" charset="0"/>
-                <a:cs typeface="Times New Roman" panose="02020603050405020304" pitchFamily="18" charset="0"/>
-              </a:rPr>
-              <a:t>, D. C., &amp; Marianella, O. (2023). Determinación del efecto de </a:t>
-            </a:r>
-            <a:r>
-              <a:rPr lang="es-PE" dirty="0" err="1">
-                <a:latin typeface="Times New Roman" panose="02020603050405020304" pitchFamily="18" charset="0"/>
-                <a:cs typeface="Times New Roman" panose="02020603050405020304" pitchFamily="18" charset="0"/>
-              </a:rPr>
-              <a:t>Metarhizium</a:t>
-            </a:r>
-            <a:r>
-              <a:rPr lang="es-PE" dirty="0">
-                <a:latin typeface="Times New Roman" panose="02020603050405020304" pitchFamily="18" charset="0"/>
-                <a:cs typeface="Times New Roman" panose="02020603050405020304" pitchFamily="18" charset="0"/>
-              </a:rPr>
-              <a:t> </a:t>
-            </a:r>
-            <a:r>
-              <a:rPr lang="es-PE" dirty="0" err="1">
-                <a:latin typeface="Times New Roman" panose="02020603050405020304" pitchFamily="18" charset="0"/>
-                <a:cs typeface="Times New Roman" panose="02020603050405020304" pitchFamily="18" charset="0"/>
-              </a:rPr>
-              <a:t>anisopliae</a:t>
-            </a:r>
-            <a:r>
-              <a:rPr lang="es-PE" dirty="0">
-                <a:latin typeface="Times New Roman" panose="02020603050405020304" pitchFamily="18" charset="0"/>
-                <a:cs typeface="Times New Roman" panose="02020603050405020304" pitchFamily="18" charset="0"/>
-              </a:rPr>
-              <a:t> para el control de adultos de </a:t>
-            </a:r>
-            <a:r>
-              <a:rPr lang="es-PE" dirty="0" err="1">
-                <a:latin typeface="Times New Roman" panose="02020603050405020304" pitchFamily="18" charset="0"/>
-                <a:cs typeface="Times New Roman" panose="02020603050405020304" pitchFamily="18" charset="0"/>
-              </a:rPr>
-              <a:t>Cryptocephalus</a:t>
-            </a:r>
-            <a:r>
-              <a:rPr lang="es-PE" dirty="0">
-                <a:latin typeface="Times New Roman" panose="02020603050405020304" pitchFamily="18" charset="0"/>
-                <a:cs typeface="Times New Roman" panose="02020603050405020304" pitchFamily="18" charset="0"/>
-              </a:rPr>
-              <a:t> </a:t>
-            </a:r>
-            <a:r>
-              <a:rPr lang="es-PE" dirty="0" err="1">
-                <a:latin typeface="Times New Roman" panose="02020603050405020304" pitchFamily="18" charset="0"/>
-                <a:cs typeface="Times New Roman" panose="02020603050405020304" pitchFamily="18" charset="0"/>
-              </a:rPr>
-              <a:t>sp</a:t>
-            </a:r>
-            <a:r>
-              <a:rPr lang="es-PE" dirty="0">
-                <a:latin typeface="Times New Roman" panose="02020603050405020304" pitchFamily="18" charset="0"/>
-                <a:cs typeface="Times New Roman" panose="02020603050405020304" pitchFamily="18" charset="0"/>
-              </a:rPr>
-              <a:t>. En condiciones de laboratorio. </a:t>
-            </a:r>
-            <a:r>
-              <a:rPr lang="es-PE" dirty="0">
-                <a:latin typeface="Times New Roman" panose="02020603050405020304" pitchFamily="18" charset="0"/>
-                <a:cs typeface="Times New Roman" panose="02020603050405020304" pitchFamily="18" charset="0"/>
-                <a:hlinkClick r:id="rId2"/>
-              </a:rPr>
-              <a:t>https://hdl.handle.net/20.500.14414/17611</a:t>
-            </a:r>
-            <a:endParaRPr lang="es-PE" dirty="0">
-              <a:latin typeface="Times New Roman" panose="02020603050405020304" pitchFamily="18" charset="0"/>
-              <a:cs typeface="Times New Roman" panose="02020603050405020304" pitchFamily="18" charset="0"/>
-            </a:endParaRPr>
-          </a:p>
-          <a:p>
-            <a:pPr indent="-457200">
-              <a:lnSpc>
-                <a:spcPct val="150000"/>
-              </a:lnSpc>
-            </a:pPr>
-            <a:endParaRPr lang="es-PE" dirty="0">
-              <a:latin typeface="Times New Roman" panose="02020603050405020304" pitchFamily="18" charset="0"/>
-              <a:cs typeface="Times New Roman" panose="02020603050405020304" pitchFamily="18" charset="0"/>
-            </a:endParaRPr>
-          </a:p>
-          <a:p>
-            <a:pPr indent="-457200">
-              <a:lnSpc>
-                <a:spcPct val="150000"/>
-              </a:lnSpc>
-            </a:pPr>
-            <a:r>
-              <a:rPr lang="es-PE" dirty="0" err="1">
-                <a:latin typeface="Times New Roman" panose="02020603050405020304" pitchFamily="18" charset="0"/>
-                <a:cs typeface="Times New Roman" panose="02020603050405020304" pitchFamily="18" charset="0"/>
-              </a:rPr>
-              <a:t>Aw</a:t>
-            </a:r>
-            <a:r>
-              <a:rPr lang="es-PE" dirty="0">
-                <a:latin typeface="Times New Roman" panose="02020603050405020304" pitchFamily="18" charset="0"/>
-                <a:cs typeface="Times New Roman" panose="02020603050405020304" pitchFamily="18" charset="0"/>
-              </a:rPr>
-              <a:t>, K. M. S., &amp; </a:t>
-            </a:r>
-            <a:r>
-              <a:rPr lang="es-PE" dirty="0" err="1">
-                <a:latin typeface="Times New Roman" panose="02020603050405020304" pitchFamily="18" charset="0"/>
-                <a:cs typeface="Times New Roman" panose="02020603050405020304" pitchFamily="18" charset="0"/>
-              </a:rPr>
-              <a:t>Hue</a:t>
-            </a:r>
-            <a:r>
-              <a:rPr lang="es-PE" dirty="0">
-                <a:latin typeface="Times New Roman" panose="02020603050405020304" pitchFamily="18" charset="0"/>
-                <a:cs typeface="Times New Roman" panose="02020603050405020304" pitchFamily="18" charset="0"/>
-              </a:rPr>
-              <a:t>, S. M. (2017). </a:t>
-            </a:r>
-            <a:r>
-              <a:rPr lang="es-PE" dirty="0" err="1">
-                <a:latin typeface="Times New Roman" panose="02020603050405020304" pitchFamily="18" charset="0"/>
-                <a:cs typeface="Times New Roman" panose="02020603050405020304" pitchFamily="18" charset="0"/>
-              </a:rPr>
-              <a:t>Mode</a:t>
-            </a:r>
-            <a:r>
-              <a:rPr lang="es-PE" dirty="0">
-                <a:latin typeface="Times New Roman" panose="02020603050405020304" pitchFamily="18" charset="0"/>
-                <a:cs typeface="Times New Roman" panose="02020603050405020304" pitchFamily="18" charset="0"/>
-              </a:rPr>
-              <a:t> </a:t>
-            </a:r>
-            <a:r>
-              <a:rPr lang="es-PE" dirty="0" err="1">
-                <a:latin typeface="Times New Roman" panose="02020603050405020304" pitchFamily="18" charset="0"/>
-                <a:cs typeface="Times New Roman" panose="02020603050405020304" pitchFamily="18" charset="0"/>
-              </a:rPr>
-              <a:t>of</a:t>
-            </a:r>
-            <a:r>
-              <a:rPr lang="es-PE" dirty="0">
-                <a:latin typeface="Times New Roman" panose="02020603050405020304" pitchFamily="18" charset="0"/>
-                <a:cs typeface="Times New Roman" panose="02020603050405020304" pitchFamily="18" charset="0"/>
-              </a:rPr>
-              <a:t> </a:t>
-            </a:r>
-            <a:r>
-              <a:rPr lang="es-PE" dirty="0" err="1">
-                <a:latin typeface="Times New Roman" panose="02020603050405020304" pitchFamily="18" charset="0"/>
-                <a:cs typeface="Times New Roman" panose="02020603050405020304" pitchFamily="18" charset="0"/>
-              </a:rPr>
-              <a:t>Infection</a:t>
-            </a:r>
-            <a:r>
-              <a:rPr lang="es-PE" dirty="0">
-                <a:latin typeface="Times New Roman" panose="02020603050405020304" pitchFamily="18" charset="0"/>
-                <a:cs typeface="Times New Roman" panose="02020603050405020304" pitchFamily="18" charset="0"/>
-              </a:rPr>
-              <a:t> </a:t>
-            </a:r>
-            <a:r>
-              <a:rPr lang="es-PE" dirty="0" err="1">
-                <a:latin typeface="Times New Roman" panose="02020603050405020304" pitchFamily="18" charset="0"/>
-                <a:cs typeface="Times New Roman" panose="02020603050405020304" pitchFamily="18" charset="0"/>
-              </a:rPr>
-              <a:t>of</a:t>
-            </a:r>
-            <a:r>
-              <a:rPr lang="es-PE" dirty="0">
-                <a:latin typeface="Times New Roman" panose="02020603050405020304" pitchFamily="18" charset="0"/>
-                <a:cs typeface="Times New Roman" panose="02020603050405020304" pitchFamily="18" charset="0"/>
-              </a:rPr>
-              <a:t> </a:t>
-            </a:r>
-            <a:r>
-              <a:rPr lang="es-PE" dirty="0" err="1">
-                <a:latin typeface="Times New Roman" panose="02020603050405020304" pitchFamily="18" charset="0"/>
-                <a:cs typeface="Times New Roman" panose="02020603050405020304" pitchFamily="18" charset="0"/>
-              </a:rPr>
-              <a:t>Metarhizium</a:t>
-            </a:r>
-            <a:r>
-              <a:rPr lang="es-PE" dirty="0">
-                <a:latin typeface="Times New Roman" panose="02020603050405020304" pitchFamily="18" charset="0"/>
-                <a:cs typeface="Times New Roman" panose="02020603050405020304" pitchFamily="18" charset="0"/>
-              </a:rPr>
-              <a:t> </a:t>
-            </a:r>
-            <a:r>
-              <a:rPr lang="es-PE" dirty="0" err="1">
-                <a:latin typeface="Times New Roman" panose="02020603050405020304" pitchFamily="18" charset="0"/>
-                <a:cs typeface="Times New Roman" panose="02020603050405020304" pitchFamily="18" charset="0"/>
-              </a:rPr>
-              <a:t>spp</a:t>
-            </a:r>
-            <a:r>
-              <a:rPr lang="es-PE" dirty="0">
-                <a:latin typeface="Times New Roman" panose="02020603050405020304" pitchFamily="18" charset="0"/>
-                <a:cs typeface="Times New Roman" panose="02020603050405020304" pitchFamily="18" charset="0"/>
-              </a:rPr>
-              <a:t>. </a:t>
-            </a:r>
-            <a:r>
-              <a:rPr lang="es-PE" dirty="0" err="1">
-                <a:latin typeface="Times New Roman" panose="02020603050405020304" pitchFamily="18" charset="0"/>
-                <a:cs typeface="Times New Roman" panose="02020603050405020304" pitchFamily="18" charset="0"/>
-              </a:rPr>
-              <a:t>Fungus</a:t>
-            </a:r>
-            <a:r>
-              <a:rPr lang="es-PE" dirty="0">
-                <a:latin typeface="Times New Roman" panose="02020603050405020304" pitchFamily="18" charset="0"/>
-                <a:cs typeface="Times New Roman" panose="02020603050405020304" pitchFamily="18" charset="0"/>
-              </a:rPr>
-              <a:t> and </a:t>
-            </a:r>
-            <a:r>
-              <a:rPr lang="es-PE" dirty="0" err="1">
-                <a:latin typeface="Times New Roman" panose="02020603050405020304" pitchFamily="18" charset="0"/>
-                <a:cs typeface="Times New Roman" panose="02020603050405020304" pitchFamily="18" charset="0"/>
-              </a:rPr>
-              <a:t>Their</a:t>
-            </a:r>
-            <a:r>
-              <a:rPr lang="es-PE" dirty="0">
-                <a:latin typeface="Times New Roman" panose="02020603050405020304" pitchFamily="18" charset="0"/>
-                <a:cs typeface="Times New Roman" panose="02020603050405020304" pitchFamily="18" charset="0"/>
-              </a:rPr>
-              <a:t> </a:t>
-            </a:r>
-            <a:r>
-              <a:rPr lang="es-PE" dirty="0" err="1">
-                <a:latin typeface="Times New Roman" panose="02020603050405020304" pitchFamily="18" charset="0"/>
-                <a:cs typeface="Times New Roman" panose="02020603050405020304" pitchFamily="18" charset="0"/>
-              </a:rPr>
-              <a:t>Potential</a:t>
-            </a:r>
-            <a:r>
-              <a:rPr lang="es-PE" dirty="0">
-                <a:latin typeface="Times New Roman" panose="02020603050405020304" pitchFamily="18" charset="0"/>
-                <a:cs typeface="Times New Roman" panose="02020603050405020304" pitchFamily="18" charset="0"/>
-              </a:rPr>
-              <a:t> as </a:t>
-            </a:r>
-            <a:r>
-              <a:rPr lang="es-PE" dirty="0" err="1">
-                <a:latin typeface="Times New Roman" panose="02020603050405020304" pitchFamily="18" charset="0"/>
-                <a:cs typeface="Times New Roman" panose="02020603050405020304" pitchFamily="18" charset="0"/>
-              </a:rPr>
-              <a:t>Biological</a:t>
-            </a:r>
-            <a:r>
-              <a:rPr lang="es-PE" dirty="0">
-                <a:latin typeface="Times New Roman" panose="02020603050405020304" pitchFamily="18" charset="0"/>
-                <a:cs typeface="Times New Roman" panose="02020603050405020304" pitchFamily="18" charset="0"/>
-              </a:rPr>
-              <a:t> Control </a:t>
-            </a:r>
-            <a:r>
-              <a:rPr lang="es-PE" dirty="0" err="1">
-                <a:latin typeface="Times New Roman" panose="02020603050405020304" pitchFamily="18" charset="0"/>
-                <a:cs typeface="Times New Roman" panose="02020603050405020304" pitchFamily="18" charset="0"/>
-              </a:rPr>
-              <a:t>Agents</a:t>
-            </a:r>
-            <a:r>
-              <a:rPr lang="es-PE" dirty="0">
-                <a:latin typeface="Times New Roman" panose="02020603050405020304" pitchFamily="18" charset="0"/>
-                <a:cs typeface="Times New Roman" panose="02020603050405020304" pitchFamily="18" charset="0"/>
-              </a:rPr>
-              <a:t>. </a:t>
-            </a:r>
-            <a:r>
-              <a:rPr lang="es-PE" dirty="0" err="1">
-                <a:latin typeface="Times New Roman" panose="02020603050405020304" pitchFamily="18" charset="0"/>
-                <a:cs typeface="Times New Roman" panose="02020603050405020304" pitchFamily="18" charset="0"/>
-              </a:rPr>
-              <a:t>Journal</a:t>
-            </a:r>
-            <a:r>
-              <a:rPr lang="es-PE" dirty="0">
-                <a:latin typeface="Times New Roman" panose="02020603050405020304" pitchFamily="18" charset="0"/>
-                <a:cs typeface="Times New Roman" panose="02020603050405020304" pitchFamily="18" charset="0"/>
-              </a:rPr>
-              <a:t> </a:t>
-            </a:r>
-            <a:r>
-              <a:rPr lang="es-PE" dirty="0" err="1">
-                <a:latin typeface="Times New Roman" panose="02020603050405020304" pitchFamily="18" charset="0"/>
-                <a:cs typeface="Times New Roman" panose="02020603050405020304" pitchFamily="18" charset="0"/>
-              </a:rPr>
-              <a:t>of</a:t>
-            </a:r>
-            <a:r>
-              <a:rPr lang="es-PE" dirty="0">
-                <a:latin typeface="Times New Roman" panose="02020603050405020304" pitchFamily="18" charset="0"/>
-                <a:cs typeface="Times New Roman" panose="02020603050405020304" pitchFamily="18" charset="0"/>
-              </a:rPr>
-              <a:t> </a:t>
-            </a:r>
-            <a:r>
-              <a:rPr lang="es-PE" dirty="0" err="1">
-                <a:latin typeface="Times New Roman" panose="02020603050405020304" pitchFamily="18" charset="0"/>
-                <a:cs typeface="Times New Roman" panose="02020603050405020304" pitchFamily="18" charset="0"/>
-              </a:rPr>
-              <a:t>Fungi</a:t>
-            </a:r>
-            <a:r>
-              <a:rPr lang="es-PE" dirty="0">
-                <a:latin typeface="Times New Roman" panose="02020603050405020304" pitchFamily="18" charset="0"/>
-                <a:cs typeface="Times New Roman" panose="02020603050405020304" pitchFamily="18" charset="0"/>
-              </a:rPr>
-              <a:t>, 3(2), </a:t>
-            </a:r>
-            <a:r>
-              <a:rPr lang="es-PE" dirty="0" err="1">
-                <a:latin typeface="Times New Roman" panose="02020603050405020304" pitchFamily="18" charset="0"/>
-                <a:cs typeface="Times New Roman" panose="02020603050405020304" pitchFamily="18" charset="0"/>
-              </a:rPr>
-              <a:t>Article</a:t>
-            </a:r>
-            <a:r>
-              <a:rPr lang="es-PE" dirty="0">
-                <a:latin typeface="Times New Roman" panose="02020603050405020304" pitchFamily="18" charset="0"/>
-                <a:cs typeface="Times New Roman" panose="02020603050405020304" pitchFamily="18" charset="0"/>
-              </a:rPr>
-              <a:t> 2. https://doi.org/10.3390/jof3020030</a:t>
-            </a:r>
-          </a:p>
-          <a:p>
-            <a:pPr indent="-457200">
-              <a:lnSpc>
-                <a:spcPct val="150000"/>
-              </a:lnSpc>
-            </a:pPr>
-            <a:r>
-              <a:rPr lang="es-PE" dirty="0">
-                <a:latin typeface="Times New Roman" panose="02020603050405020304" pitchFamily="18" charset="0"/>
-                <a:cs typeface="Times New Roman" panose="02020603050405020304" pitchFamily="18" charset="0"/>
-              </a:rPr>
-              <a:t>Baró, Y., Schuster, C., Gato, Y., Márquez, M. E., &amp; </a:t>
-            </a:r>
-            <a:r>
-              <a:rPr lang="es-PE" dirty="0" err="1">
-                <a:latin typeface="Times New Roman" panose="02020603050405020304" pitchFamily="18" charset="0"/>
-                <a:cs typeface="Times New Roman" panose="02020603050405020304" pitchFamily="18" charset="0"/>
-              </a:rPr>
-              <a:t>Leclerque</a:t>
-            </a:r>
-            <a:r>
-              <a:rPr lang="es-PE" dirty="0">
-                <a:latin typeface="Times New Roman" panose="02020603050405020304" pitchFamily="18" charset="0"/>
-                <a:cs typeface="Times New Roman" panose="02020603050405020304" pitchFamily="18" charset="0"/>
-              </a:rPr>
-              <a:t>, A. (2022). </a:t>
-            </a:r>
-            <a:r>
-              <a:rPr lang="es-PE" dirty="0" err="1">
-                <a:latin typeface="Times New Roman" panose="02020603050405020304" pitchFamily="18" charset="0"/>
-                <a:cs typeface="Times New Roman" panose="02020603050405020304" pitchFamily="18" charset="0"/>
-              </a:rPr>
-              <a:t>Characterization</a:t>
-            </a:r>
-            <a:r>
-              <a:rPr lang="es-PE" dirty="0">
-                <a:latin typeface="Times New Roman" panose="02020603050405020304" pitchFamily="18" charset="0"/>
-                <a:cs typeface="Times New Roman" panose="02020603050405020304" pitchFamily="18" charset="0"/>
-              </a:rPr>
-              <a:t>, </a:t>
-            </a:r>
-            <a:r>
-              <a:rPr lang="es-PE" dirty="0" err="1">
-                <a:latin typeface="Times New Roman" panose="02020603050405020304" pitchFamily="18" charset="0"/>
-                <a:cs typeface="Times New Roman" panose="02020603050405020304" pitchFamily="18" charset="0"/>
-              </a:rPr>
-              <a:t>identification</a:t>
-            </a:r>
-            <a:r>
-              <a:rPr lang="es-PE" dirty="0">
-                <a:latin typeface="Times New Roman" panose="02020603050405020304" pitchFamily="18" charset="0"/>
-                <a:cs typeface="Times New Roman" panose="02020603050405020304" pitchFamily="18" charset="0"/>
-              </a:rPr>
-              <a:t> and </a:t>
-            </a:r>
-            <a:r>
-              <a:rPr lang="es-PE" dirty="0" err="1">
-                <a:latin typeface="Times New Roman" panose="02020603050405020304" pitchFamily="18" charset="0"/>
-                <a:cs typeface="Times New Roman" panose="02020603050405020304" pitchFamily="18" charset="0"/>
-              </a:rPr>
-              <a:t>virulence</a:t>
-            </a:r>
-            <a:r>
-              <a:rPr lang="es-PE" dirty="0">
-                <a:latin typeface="Times New Roman" panose="02020603050405020304" pitchFamily="18" charset="0"/>
-                <a:cs typeface="Times New Roman" panose="02020603050405020304" pitchFamily="18" charset="0"/>
-              </a:rPr>
-              <a:t> </a:t>
-            </a:r>
-            <a:r>
-              <a:rPr lang="es-PE" dirty="0" err="1">
-                <a:latin typeface="Times New Roman" panose="02020603050405020304" pitchFamily="18" charset="0"/>
-                <a:cs typeface="Times New Roman" panose="02020603050405020304" pitchFamily="18" charset="0"/>
-              </a:rPr>
-              <a:t>of</a:t>
-            </a:r>
-            <a:r>
-              <a:rPr lang="es-PE" dirty="0">
-                <a:latin typeface="Times New Roman" panose="02020603050405020304" pitchFamily="18" charset="0"/>
-                <a:cs typeface="Times New Roman" panose="02020603050405020304" pitchFamily="18" charset="0"/>
-              </a:rPr>
-              <a:t> </a:t>
-            </a:r>
-            <a:r>
-              <a:rPr lang="es-PE" dirty="0" err="1">
-                <a:latin typeface="Times New Roman" panose="02020603050405020304" pitchFamily="18" charset="0"/>
-                <a:cs typeface="Times New Roman" panose="02020603050405020304" pitchFamily="18" charset="0"/>
-              </a:rPr>
-              <a:t>Metarhizium</a:t>
-            </a:r>
-            <a:r>
-              <a:rPr lang="es-PE" dirty="0">
-                <a:latin typeface="Times New Roman" panose="02020603050405020304" pitchFamily="18" charset="0"/>
-                <a:cs typeface="Times New Roman" panose="02020603050405020304" pitchFamily="18" charset="0"/>
-              </a:rPr>
-              <a:t> </a:t>
-            </a:r>
-            <a:r>
-              <a:rPr lang="es-PE" dirty="0" err="1">
-                <a:latin typeface="Times New Roman" panose="02020603050405020304" pitchFamily="18" charset="0"/>
-                <a:cs typeface="Times New Roman" panose="02020603050405020304" pitchFamily="18" charset="0"/>
-              </a:rPr>
-              <a:t>species</a:t>
-            </a:r>
-            <a:r>
-              <a:rPr lang="es-PE" dirty="0">
-                <a:latin typeface="Times New Roman" panose="02020603050405020304" pitchFamily="18" charset="0"/>
-                <a:cs typeface="Times New Roman" panose="02020603050405020304" pitchFamily="18" charset="0"/>
-              </a:rPr>
-              <a:t> </a:t>
-            </a:r>
-            <a:r>
-              <a:rPr lang="es-PE" dirty="0" err="1">
-                <a:latin typeface="Times New Roman" panose="02020603050405020304" pitchFamily="18" charset="0"/>
-                <a:cs typeface="Times New Roman" panose="02020603050405020304" pitchFamily="18" charset="0"/>
-              </a:rPr>
-              <a:t>from</a:t>
-            </a:r>
-            <a:r>
-              <a:rPr lang="es-PE" dirty="0">
-                <a:latin typeface="Times New Roman" panose="02020603050405020304" pitchFamily="18" charset="0"/>
-                <a:cs typeface="Times New Roman" panose="02020603050405020304" pitchFamily="18" charset="0"/>
-              </a:rPr>
-              <a:t> Cuba </a:t>
-            </a:r>
-            <a:r>
-              <a:rPr lang="es-PE" dirty="0" err="1">
-                <a:latin typeface="Times New Roman" panose="02020603050405020304" pitchFamily="18" charset="0"/>
-                <a:cs typeface="Times New Roman" panose="02020603050405020304" pitchFamily="18" charset="0"/>
-              </a:rPr>
-              <a:t>to</a:t>
-            </a:r>
-            <a:r>
-              <a:rPr lang="es-PE" dirty="0">
-                <a:latin typeface="Times New Roman" panose="02020603050405020304" pitchFamily="18" charset="0"/>
-                <a:cs typeface="Times New Roman" panose="02020603050405020304" pitchFamily="18" charset="0"/>
-              </a:rPr>
-              <a:t> control </a:t>
-            </a:r>
-            <a:r>
-              <a:rPr lang="es-PE" dirty="0" err="1">
-                <a:latin typeface="Times New Roman" panose="02020603050405020304" pitchFamily="18" charset="0"/>
-                <a:cs typeface="Times New Roman" panose="02020603050405020304" pitchFamily="18" charset="0"/>
-              </a:rPr>
-              <a:t>the</a:t>
-            </a:r>
-            <a:r>
-              <a:rPr lang="es-PE" dirty="0">
-                <a:latin typeface="Times New Roman" panose="02020603050405020304" pitchFamily="18" charset="0"/>
-                <a:cs typeface="Times New Roman" panose="02020603050405020304" pitchFamily="18" charset="0"/>
-              </a:rPr>
-              <a:t> </a:t>
-            </a:r>
-            <a:r>
-              <a:rPr lang="es-PE" dirty="0" err="1">
-                <a:latin typeface="Times New Roman" panose="02020603050405020304" pitchFamily="18" charset="0"/>
-                <a:cs typeface="Times New Roman" panose="02020603050405020304" pitchFamily="18" charset="0"/>
-              </a:rPr>
-              <a:t>sweet</a:t>
-            </a:r>
-            <a:r>
-              <a:rPr lang="es-PE" dirty="0">
-                <a:latin typeface="Times New Roman" panose="02020603050405020304" pitchFamily="18" charset="0"/>
-                <a:cs typeface="Times New Roman" panose="02020603050405020304" pitchFamily="18" charset="0"/>
-              </a:rPr>
-              <a:t> </a:t>
-            </a:r>
-            <a:r>
-              <a:rPr lang="es-PE" dirty="0" err="1">
-                <a:latin typeface="Times New Roman" panose="02020603050405020304" pitchFamily="18" charset="0"/>
-                <a:cs typeface="Times New Roman" panose="02020603050405020304" pitchFamily="18" charset="0"/>
-              </a:rPr>
-              <a:t>potato</a:t>
-            </a:r>
-            <a:r>
-              <a:rPr lang="es-PE" dirty="0">
-                <a:latin typeface="Times New Roman" panose="02020603050405020304" pitchFamily="18" charset="0"/>
-                <a:cs typeface="Times New Roman" panose="02020603050405020304" pitchFamily="18" charset="0"/>
-              </a:rPr>
-              <a:t> </a:t>
-            </a:r>
-            <a:r>
-              <a:rPr lang="es-PE" dirty="0" err="1">
-                <a:latin typeface="Times New Roman" panose="02020603050405020304" pitchFamily="18" charset="0"/>
-                <a:cs typeface="Times New Roman" panose="02020603050405020304" pitchFamily="18" charset="0"/>
-              </a:rPr>
-              <a:t>weevil</a:t>
-            </a:r>
-            <a:r>
-              <a:rPr lang="es-PE" dirty="0">
-                <a:latin typeface="Times New Roman" panose="02020603050405020304" pitchFamily="18" charset="0"/>
-                <a:cs typeface="Times New Roman" panose="02020603050405020304" pitchFamily="18" charset="0"/>
-              </a:rPr>
-              <a:t>, </a:t>
-            </a:r>
-            <a:r>
-              <a:rPr lang="es-PE" dirty="0" err="1">
-                <a:latin typeface="Times New Roman" panose="02020603050405020304" pitchFamily="18" charset="0"/>
-                <a:cs typeface="Times New Roman" panose="02020603050405020304" pitchFamily="18" charset="0"/>
-              </a:rPr>
-              <a:t>Cylas</a:t>
-            </a:r>
-            <a:r>
-              <a:rPr lang="es-PE" dirty="0">
-                <a:latin typeface="Times New Roman" panose="02020603050405020304" pitchFamily="18" charset="0"/>
-                <a:cs typeface="Times New Roman" panose="02020603050405020304" pitchFamily="18" charset="0"/>
-              </a:rPr>
-              <a:t> </a:t>
-            </a:r>
-            <a:r>
-              <a:rPr lang="es-PE" dirty="0" err="1">
-                <a:latin typeface="Times New Roman" panose="02020603050405020304" pitchFamily="18" charset="0"/>
-                <a:cs typeface="Times New Roman" panose="02020603050405020304" pitchFamily="18" charset="0"/>
-              </a:rPr>
-              <a:t>formicarius</a:t>
-            </a:r>
-            <a:r>
-              <a:rPr lang="es-PE" dirty="0">
-                <a:latin typeface="Times New Roman" panose="02020603050405020304" pitchFamily="18" charset="0"/>
-                <a:cs typeface="Times New Roman" panose="02020603050405020304" pitchFamily="18" charset="0"/>
-              </a:rPr>
-              <a:t> Fabricius (</a:t>
-            </a:r>
-            <a:r>
-              <a:rPr lang="es-PE" dirty="0" err="1">
-                <a:latin typeface="Times New Roman" panose="02020603050405020304" pitchFamily="18" charset="0"/>
-                <a:cs typeface="Times New Roman" panose="02020603050405020304" pitchFamily="18" charset="0"/>
-              </a:rPr>
-              <a:t>Coleoptera</a:t>
-            </a:r>
-            <a:r>
-              <a:rPr lang="es-PE" dirty="0">
-                <a:latin typeface="Times New Roman" panose="02020603050405020304" pitchFamily="18" charset="0"/>
-                <a:cs typeface="Times New Roman" panose="02020603050405020304" pitchFamily="18" charset="0"/>
-              </a:rPr>
-              <a:t>: </a:t>
-            </a:r>
-            <a:r>
-              <a:rPr lang="es-PE" dirty="0" err="1">
-                <a:latin typeface="Times New Roman" panose="02020603050405020304" pitchFamily="18" charset="0"/>
-                <a:cs typeface="Times New Roman" panose="02020603050405020304" pitchFamily="18" charset="0"/>
-              </a:rPr>
-              <a:t>Brentidae</a:t>
-            </a:r>
-            <a:r>
-              <a:rPr lang="es-PE" dirty="0">
-                <a:latin typeface="Times New Roman" panose="02020603050405020304" pitchFamily="18" charset="0"/>
-                <a:cs typeface="Times New Roman" panose="02020603050405020304" pitchFamily="18" charset="0"/>
-              </a:rPr>
-              <a:t>). </a:t>
-            </a:r>
-            <a:r>
-              <a:rPr lang="es-PE" dirty="0" err="1">
-                <a:latin typeface="Times New Roman" panose="02020603050405020304" pitchFamily="18" charset="0"/>
-                <a:cs typeface="Times New Roman" panose="02020603050405020304" pitchFamily="18" charset="0"/>
-              </a:rPr>
-              <a:t>Journal</a:t>
-            </a:r>
-            <a:r>
-              <a:rPr lang="es-PE" dirty="0">
-                <a:latin typeface="Times New Roman" panose="02020603050405020304" pitchFamily="18" charset="0"/>
-                <a:cs typeface="Times New Roman" panose="02020603050405020304" pitchFamily="18" charset="0"/>
-              </a:rPr>
-              <a:t> </a:t>
-            </a:r>
-            <a:r>
-              <a:rPr lang="es-PE" dirty="0" err="1">
-                <a:latin typeface="Times New Roman" panose="02020603050405020304" pitchFamily="18" charset="0"/>
-                <a:cs typeface="Times New Roman" panose="02020603050405020304" pitchFamily="18" charset="0"/>
-              </a:rPr>
-              <a:t>of</a:t>
-            </a:r>
-            <a:r>
-              <a:rPr lang="es-PE" dirty="0">
-                <a:latin typeface="Times New Roman" panose="02020603050405020304" pitchFamily="18" charset="0"/>
-                <a:cs typeface="Times New Roman" panose="02020603050405020304" pitchFamily="18" charset="0"/>
-              </a:rPr>
-              <a:t> </a:t>
-            </a:r>
-            <a:r>
-              <a:rPr lang="es-PE" dirty="0" err="1">
-                <a:latin typeface="Times New Roman" panose="02020603050405020304" pitchFamily="18" charset="0"/>
-                <a:cs typeface="Times New Roman" panose="02020603050405020304" pitchFamily="18" charset="0"/>
-              </a:rPr>
-              <a:t>Applied</a:t>
-            </a:r>
-            <a:r>
-              <a:rPr lang="es-PE" dirty="0">
-                <a:latin typeface="Times New Roman" panose="02020603050405020304" pitchFamily="18" charset="0"/>
-                <a:cs typeface="Times New Roman" panose="02020603050405020304" pitchFamily="18" charset="0"/>
-              </a:rPr>
-              <a:t> </a:t>
-            </a:r>
-            <a:r>
-              <a:rPr lang="es-PE" dirty="0" err="1">
-                <a:latin typeface="Times New Roman" panose="02020603050405020304" pitchFamily="18" charset="0"/>
-                <a:cs typeface="Times New Roman" panose="02020603050405020304" pitchFamily="18" charset="0"/>
-              </a:rPr>
-              <a:t>Microbiology</a:t>
-            </a:r>
-            <a:r>
-              <a:rPr lang="es-PE" dirty="0">
-                <a:latin typeface="Times New Roman" panose="02020603050405020304" pitchFamily="18" charset="0"/>
-                <a:cs typeface="Times New Roman" panose="02020603050405020304" pitchFamily="18" charset="0"/>
-              </a:rPr>
-              <a:t>, 132(5), 3705-3716. </a:t>
-            </a:r>
-            <a:r>
-              <a:rPr lang="es-PE" dirty="0">
-                <a:latin typeface="Times New Roman" panose="02020603050405020304" pitchFamily="18" charset="0"/>
-                <a:cs typeface="Times New Roman" panose="02020603050405020304" pitchFamily="18" charset="0"/>
-                <a:hlinkClick r:id="rId3"/>
-              </a:rPr>
-              <a:t>https://doi.org/10.1111/jam.15460</a:t>
-            </a:r>
-            <a:endParaRPr lang="es-PE" dirty="0">
-              <a:latin typeface="Times New Roman" panose="02020603050405020304" pitchFamily="18" charset="0"/>
-              <a:cs typeface="Times New Roman" panose="02020603050405020304" pitchFamily="18" charset="0"/>
-            </a:endParaRPr>
-          </a:p>
-          <a:p>
-            <a:pPr indent="-457200">
-              <a:lnSpc>
-                <a:spcPct val="150000"/>
-              </a:lnSpc>
-            </a:pPr>
-            <a:endParaRPr lang="es-PE" dirty="0">
-              <a:latin typeface="Times New Roman" panose="02020603050405020304" pitchFamily="18" charset="0"/>
-              <a:cs typeface="Times New Roman" panose="02020603050405020304" pitchFamily="18" charset="0"/>
-            </a:endParaRPr>
-          </a:p>
-          <a:p>
-            <a:pPr indent="-457200">
-              <a:lnSpc>
-                <a:spcPct val="150000"/>
-              </a:lnSpc>
-            </a:pPr>
-            <a:r>
-              <a:rPr lang="es-PE" dirty="0" err="1">
-                <a:latin typeface="Times New Roman" panose="02020603050405020304" pitchFamily="18" charset="0"/>
-                <a:cs typeface="Times New Roman" panose="02020603050405020304" pitchFamily="18" charset="0"/>
-              </a:rPr>
-              <a:t>Chuquibala</a:t>
-            </a:r>
-            <a:r>
-              <a:rPr lang="es-PE" dirty="0">
-                <a:latin typeface="Times New Roman" panose="02020603050405020304" pitchFamily="18" charset="0"/>
-                <a:cs typeface="Times New Roman" panose="02020603050405020304" pitchFamily="18" charset="0"/>
-              </a:rPr>
-              <a:t>-Checan, B., Torres-de la Cruz, M., Leiva, S., </a:t>
-            </a:r>
-            <a:r>
-              <a:rPr lang="es-PE" dirty="0" err="1">
-                <a:latin typeface="Times New Roman" panose="02020603050405020304" pitchFamily="18" charset="0"/>
-                <a:cs typeface="Times New Roman" panose="02020603050405020304" pitchFamily="18" charset="0"/>
-              </a:rPr>
-              <a:t>Hernandez</a:t>
-            </a:r>
-            <a:r>
-              <a:rPr lang="es-PE" dirty="0">
-                <a:latin typeface="Times New Roman" panose="02020603050405020304" pitchFamily="18" charset="0"/>
-                <a:cs typeface="Times New Roman" panose="02020603050405020304" pitchFamily="18" charset="0"/>
-              </a:rPr>
-              <a:t>-Diaz, E., Rubio, K., </a:t>
-            </a:r>
-            <a:r>
-              <a:rPr lang="es-PE" dirty="0" err="1">
-                <a:latin typeface="Times New Roman" panose="02020603050405020304" pitchFamily="18" charset="0"/>
-                <a:cs typeface="Times New Roman" panose="02020603050405020304" pitchFamily="18" charset="0"/>
-              </a:rPr>
-              <a:t>Goñas</a:t>
-            </a:r>
-            <a:r>
-              <a:rPr lang="es-PE" dirty="0">
-                <a:latin typeface="Times New Roman" panose="02020603050405020304" pitchFamily="18" charset="0"/>
-                <a:cs typeface="Times New Roman" panose="02020603050405020304" pitchFamily="18" charset="0"/>
-              </a:rPr>
-              <a:t>, M., Arce-Inga, M., &amp; Oliva-Cruz, M. (2023). In Vitro </a:t>
-            </a:r>
-            <a:r>
-              <a:rPr lang="es-PE" dirty="0" err="1">
-                <a:latin typeface="Times New Roman" panose="02020603050405020304" pitchFamily="18" charset="0"/>
-                <a:cs typeface="Times New Roman" panose="02020603050405020304" pitchFamily="18" charset="0"/>
-              </a:rPr>
-              <a:t>Biological</a:t>
-            </a:r>
-            <a:r>
-              <a:rPr lang="es-PE" dirty="0">
-                <a:latin typeface="Times New Roman" panose="02020603050405020304" pitchFamily="18" charset="0"/>
-                <a:cs typeface="Times New Roman" panose="02020603050405020304" pitchFamily="18" charset="0"/>
-              </a:rPr>
-              <a:t> </a:t>
-            </a:r>
-            <a:r>
-              <a:rPr lang="es-PE" dirty="0" err="1">
-                <a:latin typeface="Times New Roman" panose="02020603050405020304" pitchFamily="18" charset="0"/>
-                <a:cs typeface="Times New Roman" panose="02020603050405020304" pitchFamily="18" charset="0"/>
-              </a:rPr>
-              <a:t>Activity</a:t>
-            </a:r>
-            <a:r>
-              <a:rPr lang="es-PE" dirty="0">
-                <a:latin typeface="Times New Roman" panose="02020603050405020304" pitchFamily="18" charset="0"/>
-                <a:cs typeface="Times New Roman" panose="02020603050405020304" pitchFamily="18" charset="0"/>
-              </a:rPr>
-              <a:t> </a:t>
-            </a:r>
-            <a:r>
-              <a:rPr lang="es-PE" dirty="0" err="1">
-                <a:latin typeface="Times New Roman" panose="02020603050405020304" pitchFamily="18" charset="0"/>
-                <a:cs typeface="Times New Roman" panose="02020603050405020304" pitchFamily="18" charset="0"/>
-              </a:rPr>
-              <a:t>of</a:t>
-            </a:r>
-            <a:r>
-              <a:rPr lang="es-PE" dirty="0">
-                <a:latin typeface="Times New Roman" panose="02020603050405020304" pitchFamily="18" charset="0"/>
-                <a:cs typeface="Times New Roman" panose="02020603050405020304" pitchFamily="18" charset="0"/>
-              </a:rPr>
-              <a:t> </a:t>
-            </a:r>
-            <a:r>
-              <a:rPr lang="es-PE" dirty="0" err="1">
-                <a:latin typeface="Times New Roman" panose="02020603050405020304" pitchFamily="18" charset="0"/>
-                <a:cs typeface="Times New Roman" panose="02020603050405020304" pitchFamily="18" charset="0"/>
-              </a:rPr>
-              <a:t>Beauveria</a:t>
-            </a:r>
-            <a:r>
-              <a:rPr lang="es-PE" dirty="0">
-                <a:latin typeface="Times New Roman" panose="02020603050405020304" pitchFamily="18" charset="0"/>
-                <a:cs typeface="Times New Roman" panose="02020603050405020304" pitchFamily="18" charset="0"/>
-              </a:rPr>
-              <a:t> </a:t>
-            </a:r>
-            <a:r>
-              <a:rPr lang="es-PE" dirty="0" err="1">
-                <a:latin typeface="Times New Roman" panose="02020603050405020304" pitchFamily="18" charset="0"/>
-                <a:cs typeface="Times New Roman" panose="02020603050405020304" pitchFamily="18" charset="0"/>
-              </a:rPr>
-              <a:t>bassiana</a:t>
-            </a:r>
-            <a:r>
-              <a:rPr lang="es-PE" dirty="0">
-                <a:latin typeface="Times New Roman" panose="02020603050405020304" pitchFamily="18" charset="0"/>
-                <a:cs typeface="Times New Roman" panose="02020603050405020304" pitchFamily="18" charset="0"/>
-              </a:rPr>
-              <a:t>, </a:t>
-            </a:r>
-            <a:r>
-              <a:rPr lang="es-PE" dirty="0" err="1">
-                <a:latin typeface="Times New Roman" panose="02020603050405020304" pitchFamily="18" charset="0"/>
-                <a:cs typeface="Times New Roman" panose="02020603050405020304" pitchFamily="18" charset="0"/>
-              </a:rPr>
-              <a:t>Beauveria</a:t>
-            </a:r>
-            <a:r>
-              <a:rPr lang="es-PE" dirty="0">
-                <a:latin typeface="Times New Roman" panose="02020603050405020304" pitchFamily="18" charset="0"/>
-                <a:cs typeface="Times New Roman" panose="02020603050405020304" pitchFamily="18" charset="0"/>
-              </a:rPr>
-              <a:t> </a:t>
-            </a:r>
-            <a:r>
-              <a:rPr lang="es-PE" dirty="0" err="1">
-                <a:latin typeface="Times New Roman" panose="02020603050405020304" pitchFamily="18" charset="0"/>
-                <a:cs typeface="Times New Roman" panose="02020603050405020304" pitchFamily="18" charset="0"/>
-              </a:rPr>
-              <a:t>peruviensis</a:t>
-            </a:r>
-            <a:r>
-              <a:rPr lang="es-PE" dirty="0">
-                <a:latin typeface="Times New Roman" panose="02020603050405020304" pitchFamily="18" charset="0"/>
-                <a:cs typeface="Times New Roman" panose="02020603050405020304" pitchFamily="18" charset="0"/>
-              </a:rPr>
-              <a:t>, and </a:t>
-            </a:r>
-            <a:r>
-              <a:rPr lang="es-PE" dirty="0" err="1">
-                <a:latin typeface="Times New Roman" panose="02020603050405020304" pitchFamily="18" charset="0"/>
-                <a:cs typeface="Times New Roman" panose="02020603050405020304" pitchFamily="18" charset="0"/>
-              </a:rPr>
-              <a:t>Metarhizium</a:t>
-            </a:r>
-            <a:r>
-              <a:rPr lang="es-PE" dirty="0">
-                <a:latin typeface="Times New Roman" panose="02020603050405020304" pitchFamily="18" charset="0"/>
-                <a:cs typeface="Times New Roman" panose="02020603050405020304" pitchFamily="18" charset="0"/>
-              </a:rPr>
-              <a:t> </a:t>
-            </a:r>
-            <a:r>
-              <a:rPr lang="es-PE" dirty="0" err="1">
-                <a:latin typeface="Times New Roman" panose="02020603050405020304" pitchFamily="18" charset="0"/>
-                <a:cs typeface="Times New Roman" panose="02020603050405020304" pitchFamily="18" charset="0"/>
-              </a:rPr>
-              <a:t>sp</a:t>
-            </a:r>
-            <a:r>
-              <a:rPr lang="es-PE" dirty="0">
-                <a:latin typeface="Times New Roman" panose="02020603050405020304" pitchFamily="18" charset="0"/>
-                <a:cs typeface="Times New Roman" panose="02020603050405020304" pitchFamily="18" charset="0"/>
-              </a:rPr>
-              <a:t>. </a:t>
-            </a:r>
-            <a:r>
-              <a:rPr lang="es-PE" dirty="0" err="1">
-                <a:latin typeface="Times New Roman" panose="02020603050405020304" pitchFamily="18" charset="0"/>
-                <a:cs typeface="Times New Roman" panose="02020603050405020304" pitchFamily="18" charset="0"/>
-              </a:rPr>
-              <a:t>against</a:t>
-            </a:r>
-            <a:r>
-              <a:rPr lang="es-PE" dirty="0">
-                <a:latin typeface="Times New Roman" panose="02020603050405020304" pitchFamily="18" charset="0"/>
-                <a:cs typeface="Times New Roman" panose="02020603050405020304" pitchFamily="18" charset="0"/>
-              </a:rPr>
-              <a:t> </a:t>
-            </a:r>
-            <a:r>
-              <a:rPr lang="es-PE" dirty="0" err="1">
-                <a:latin typeface="Times New Roman" panose="02020603050405020304" pitchFamily="18" charset="0"/>
-                <a:cs typeface="Times New Roman" panose="02020603050405020304" pitchFamily="18" charset="0"/>
-              </a:rPr>
-              <a:t>Hypothenemus</a:t>
-            </a:r>
-            <a:r>
-              <a:rPr lang="es-PE" dirty="0">
-                <a:latin typeface="Times New Roman" panose="02020603050405020304" pitchFamily="18" charset="0"/>
-                <a:cs typeface="Times New Roman" panose="02020603050405020304" pitchFamily="18" charset="0"/>
-              </a:rPr>
-              <a:t> </a:t>
-            </a:r>
-            <a:r>
-              <a:rPr lang="es-PE" dirty="0" err="1">
-                <a:latin typeface="Times New Roman" panose="02020603050405020304" pitchFamily="18" charset="0"/>
-                <a:cs typeface="Times New Roman" panose="02020603050405020304" pitchFamily="18" charset="0"/>
-              </a:rPr>
-              <a:t>hampei</a:t>
-            </a:r>
-            <a:r>
-              <a:rPr lang="es-PE" dirty="0">
-                <a:latin typeface="Times New Roman" panose="02020603050405020304" pitchFamily="18" charset="0"/>
-                <a:cs typeface="Times New Roman" panose="02020603050405020304" pitchFamily="18" charset="0"/>
-              </a:rPr>
-              <a:t> (</a:t>
-            </a:r>
-            <a:r>
-              <a:rPr lang="es-PE" dirty="0" err="1">
-                <a:latin typeface="Times New Roman" panose="02020603050405020304" pitchFamily="18" charset="0"/>
-                <a:cs typeface="Times New Roman" panose="02020603050405020304" pitchFamily="18" charset="0"/>
-              </a:rPr>
-              <a:t>Coleoptera</a:t>
-            </a:r>
-            <a:r>
-              <a:rPr lang="es-PE" dirty="0">
-                <a:latin typeface="Times New Roman" panose="02020603050405020304" pitchFamily="18" charset="0"/>
-                <a:cs typeface="Times New Roman" panose="02020603050405020304" pitchFamily="18" charset="0"/>
-              </a:rPr>
-              <a:t>: </a:t>
-            </a:r>
-            <a:r>
-              <a:rPr lang="es-PE" dirty="0" err="1">
-                <a:latin typeface="Times New Roman" panose="02020603050405020304" pitchFamily="18" charset="0"/>
-                <a:cs typeface="Times New Roman" panose="02020603050405020304" pitchFamily="18" charset="0"/>
-              </a:rPr>
-              <a:t>Curculionidae</a:t>
-            </a:r>
-            <a:r>
-              <a:rPr lang="es-PE" dirty="0">
-                <a:latin typeface="Times New Roman" panose="02020603050405020304" pitchFamily="18" charset="0"/>
-                <a:cs typeface="Times New Roman" panose="02020603050405020304" pitchFamily="18" charset="0"/>
-              </a:rPr>
-              <a:t>). International </a:t>
-            </a:r>
-            <a:r>
-              <a:rPr lang="es-PE" dirty="0" err="1">
-                <a:latin typeface="Times New Roman" panose="02020603050405020304" pitchFamily="18" charset="0"/>
-                <a:cs typeface="Times New Roman" panose="02020603050405020304" pitchFamily="18" charset="0"/>
-              </a:rPr>
-              <a:t>Journal</a:t>
-            </a:r>
-            <a:r>
-              <a:rPr lang="es-PE" dirty="0">
-                <a:latin typeface="Times New Roman" panose="02020603050405020304" pitchFamily="18" charset="0"/>
-                <a:cs typeface="Times New Roman" panose="02020603050405020304" pitchFamily="18" charset="0"/>
-              </a:rPr>
-              <a:t> </a:t>
-            </a:r>
-            <a:r>
-              <a:rPr lang="es-PE" dirty="0" err="1">
-                <a:latin typeface="Times New Roman" panose="02020603050405020304" pitchFamily="18" charset="0"/>
-                <a:cs typeface="Times New Roman" panose="02020603050405020304" pitchFamily="18" charset="0"/>
-              </a:rPr>
-              <a:t>of</a:t>
-            </a:r>
-            <a:r>
-              <a:rPr lang="es-PE" dirty="0">
-                <a:latin typeface="Times New Roman" panose="02020603050405020304" pitchFamily="18" charset="0"/>
-                <a:cs typeface="Times New Roman" panose="02020603050405020304" pitchFamily="18" charset="0"/>
-              </a:rPr>
-              <a:t> </a:t>
-            </a:r>
-            <a:r>
-              <a:rPr lang="es-PE" dirty="0" err="1">
-                <a:latin typeface="Times New Roman" panose="02020603050405020304" pitchFamily="18" charset="0"/>
-                <a:cs typeface="Times New Roman" panose="02020603050405020304" pitchFamily="18" charset="0"/>
-              </a:rPr>
-              <a:t>Agronomy</a:t>
-            </a:r>
-            <a:r>
-              <a:rPr lang="es-PE" dirty="0">
-                <a:latin typeface="Times New Roman" panose="02020603050405020304" pitchFamily="18" charset="0"/>
-                <a:cs typeface="Times New Roman" panose="02020603050405020304" pitchFamily="18" charset="0"/>
-              </a:rPr>
-              <a:t>, 2023(1), 4982399. </a:t>
-            </a:r>
-            <a:r>
-              <a:rPr lang="es-PE" dirty="0">
-                <a:latin typeface="Times New Roman" panose="02020603050405020304" pitchFamily="18" charset="0"/>
-                <a:cs typeface="Times New Roman" panose="02020603050405020304" pitchFamily="18" charset="0"/>
-                <a:hlinkClick r:id="rId4"/>
-              </a:rPr>
-              <a:t>https://doi.org/10.1155/2023/4982399</a:t>
-            </a:r>
-            <a:endParaRPr lang="es-PE" dirty="0">
-              <a:latin typeface="Times New Roman" panose="02020603050405020304" pitchFamily="18" charset="0"/>
-              <a:cs typeface="Times New Roman" panose="02020603050405020304" pitchFamily="18" charset="0"/>
-            </a:endParaRPr>
-          </a:p>
-          <a:p>
-            <a:pPr indent="-457200">
-              <a:lnSpc>
-                <a:spcPct val="150000"/>
-              </a:lnSpc>
-            </a:pPr>
-            <a:endParaRPr lang="es-PE" dirty="0">
-              <a:latin typeface="Times New Roman" panose="02020603050405020304" pitchFamily="18" charset="0"/>
-              <a:cs typeface="Times New Roman" panose="02020603050405020304" pitchFamily="18" charset="0"/>
-            </a:endParaRPr>
-          </a:p>
-          <a:p>
-            <a:pPr indent="-457200">
-              <a:lnSpc>
-                <a:spcPct val="150000"/>
-              </a:lnSpc>
-            </a:pPr>
-            <a:r>
-              <a:rPr lang="es-PE" dirty="0">
-                <a:latin typeface="Times New Roman" panose="02020603050405020304" pitchFamily="18" charset="0"/>
-                <a:cs typeface="Times New Roman" panose="02020603050405020304" pitchFamily="18" charset="0"/>
-              </a:rPr>
-              <a:t>Gerónimo-Torres, J. D. C., Torres-de-la-Cruz, M., Cruz, M. P., </a:t>
-            </a:r>
-            <a:r>
-              <a:rPr lang="es-PE" dirty="0" err="1">
-                <a:latin typeface="Times New Roman" panose="02020603050405020304" pitchFamily="18" charset="0"/>
-                <a:cs typeface="Times New Roman" panose="02020603050405020304" pitchFamily="18" charset="0"/>
-              </a:rPr>
-              <a:t>De-la-Cruz-Pérez</a:t>
-            </a:r>
-            <a:r>
-              <a:rPr lang="es-PE" dirty="0">
-                <a:latin typeface="Times New Roman" panose="02020603050405020304" pitchFamily="18" charset="0"/>
-                <a:cs typeface="Times New Roman" panose="02020603050405020304" pitchFamily="18" charset="0"/>
-              </a:rPr>
-              <a:t>, A., Ortiz-</a:t>
-            </a:r>
-            <a:r>
-              <a:rPr lang="es-PE" dirty="0" err="1">
-                <a:latin typeface="Times New Roman" panose="02020603050405020304" pitchFamily="18" charset="0"/>
-                <a:cs typeface="Times New Roman" panose="02020603050405020304" pitchFamily="18" charset="0"/>
-              </a:rPr>
-              <a:t>garcía</a:t>
-            </a:r>
-            <a:r>
-              <a:rPr lang="es-PE" dirty="0">
-                <a:latin typeface="Times New Roman" panose="02020603050405020304" pitchFamily="18" charset="0"/>
-                <a:cs typeface="Times New Roman" panose="02020603050405020304" pitchFamily="18" charset="0"/>
-              </a:rPr>
-              <a:t>, C. F., &amp; </a:t>
-            </a:r>
-            <a:r>
-              <a:rPr lang="es-PE" dirty="0" err="1">
-                <a:latin typeface="Times New Roman" panose="02020603050405020304" pitchFamily="18" charset="0"/>
-                <a:cs typeface="Times New Roman" panose="02020603050405020304" pitchFamily="18" charset="0"/>
-              </a:rPr>
-              <a:t>Cappello</a:t>
-            </a:r>
-            <a:r>
-              <a:rPr lang="es-PE" dirty="0">
-                <a:latin typeface="Times New Roman" panose="02020603050405020304" pitchFamily="18" charset="0"/>
-                <a:cs typeface="Times New Roman" panose="02020603050405020304" pitchFamily="18" charset="0"/>
-              </a:rPr>
-              <a:t>-García, S. (2016). Caracterización de aislamientos nativos de </a:t>
-            </a:r>
-            <a:r>
-              <a:rPr lang="es-PE" dirty="0" err="1">
-                <a:latin typeface="Times New Roman" panose="02020603050405020304" pitchFamily="18" charset="0"/>
-                <a:cs typeface="Times New Roman" panose="02020603050405020304" pitchFamily="18" charset="0"/>
-              </a:rPr>
-              <a:t>Beauveria</a:t>
-            </a:r>
-            <a:r>
-              <a:rPr lang="es-PE" dirty="0">
-                <a:latin typeface="Times New Roman" panose="02020603050405020304" pitchFamily="18" charset="0"/>
-                <a:cs typeface="Times New Roman" panose="02020603050405020304" pitchFamily="18" charset="0"/>
-              </a:rPr>
-              <a:t> </a:t>
-            </a:r>
-            <a:r>
-              <a:rPr lang="es-PE" dirty="0" err="1">
-                <a:latin typeface="Times New Roman" panose="02020603050405020304" pitchFamily="18" charset="0"/>
-                <a:cs typeface="Times New Roman" panose="02020603050405020304" pitchFamily="18" charset="0"/>
-              </a:rPr>
-              <a:t>bassiana</a:t>
-            </a:r>
-            <a:r>
-              <a:rPr lang="es-PE" dirty="0">
-                <a:latin typeface="Times New Roman" panose="02020603050405020304" pitchFamily="18" charset="0"/>
-                <a:cs typeface="Times New Roman" panose="02020603050405020304" pitchFamily="18" charset="0"/>
-              </a:rPr>
-              <a:t> y su patogenicidad hacia </a:t>
-            </a:r>
-            <a:r>
-              <a:rPr lang="es-PE" dirty="0" err="1">
-                <a:latin typeface="Times New Roman" panose="02020603050405020304" pitchFamily="18" charset="0"/>
-                <a:cs typeface="Times New Roman" panose="02020603050405020304" pitchFamily="18" charset="0"/>
-              </a:rPr>
-              <a:t>Hypothenemus</a:t>
-            </a:r>
-            <a:r>
-              <a:rPr lang="es-PE" dirty="0">
-                <a:latin typeface="Times New Roman" panose="02020603050405020304" pitchFamily="18" charset="0"/>
-                <a:cs typeface="Times New Roman" panose="02020603050405020304" pitchFamily="18" charset="0"/>
-              </a:rPr>
-              <a:t> </a:t>
-            </a:r>
-            <a:r>
-              <a:rPr lang="es-PE" dirty="0" err="1">
-                <a:latin typeface="Times New Roman" panose="02020603050405020304" pitchFamily="18" charset="0"/>
-                <a:cs typeface="Times New Roman" panose="02020603050405020304" pitchFamily="18" charset="0"/>
-              </a:rPr>
-              <a:t>hampei</a:t>
-            </a:r>
-            <a:r>
-              <a:rPr lang="es-PE" dirty="0">
-                <a:latin typeface="Times New Roman" panose="02020603050405020304" pitchFamily="18" charset="0"/>
-                <a:cs typeface="Times New Roman" panose="02020603050405020304" pitchFamily="18" charset="0"/>
-              </a:rPr>
-              <a:t>, en Tabasco, México. Revista Colombiana de Entomología, 42(1), 28-35.</a:t>
-            </a:r>
-          </a:p>
-          <a:p>
-            <a:pPr indent="-457200">
-              <a:lnSpc>
-                <a:spcPct val="150000"/>
-              </a:lnSpc>
-            </a:pPr>
-            <a:br>
-              <a:rPr lang="es-PE" dirty="0"/>
-            </a:br>
-            <a:endParaRPr lang="es-PE" dirty="0"/>
-          </a:p>
-        </p:txBody>
-      </p:sp>
-    </p:spTree>
-    <p:extLst>
-      <p:ext uri="{BB962C8B-B14F-4D97-AF65-F5344CB8AC3E}">
-        <p14:creationId xmlns:p14="http://schemas.microsoft.com/office/powerpoint/2010/main" val="2176882519"/>
-      </p:ext>
-    </p:extLst>
-  </p:cSld>
-  <p:clrMapOvr>
-    <a:masterClrMapping/>
-  </p:clrMapOvr>
-</p:sld>
-</file>
-
 <file path=ppt/theme/theme1.xml><?xml version="1.0" encoding="utf-8"?>
 <a:theme xmlns:a="http://schemas.openxmlformats.org/drawingml/2006/main" name="Office Theme">
   <a:themeElements>
